--- a/paper_esem/slides/colleague_briefing.pptx
+++ b/paper_esem/slides/colleague_briefing.pptx
@@ -13,9 +13,10 @@
     <p:sldId id="261" r:id="rId7"/>
     <p:sldId id="262" r:id="rId8"/>
     <p:sldId id="263" r:id="rId9"/>
+    <p:sldId id="264" r:id="rId10"/>
   </p:sldIdLst>
   <p:notesMasterIdLst>
-    <p:notesMasterId r:id="rId10"/>
+    <p:notesMasterId r:id="rId11"/>
   </p:notesMasterIdLst>
   <p:sldSz cx="12192000" cy="6858000"/>
   <p:notesSz cx="6858000" cy="12192000"/>
@@ -1149,6 +1150,94 @@
             <a:fld id="{F7021451-1387-4CA6-816F-3879F97B5CBC}" type="slidenum">
               <a:rPr lang="en-US"/>
               <a:t>8</a:t>
+            </a:fld>
+            <a:endParaRPr lang="en-US"/>
+          </a:p>
+        </p:txBody>
+      </p:sp>
+    </p:spTree>
+    <p:extLst>
+      <p:ext uri="{BB962C8B-B14F-4D97-AF65-F5344CB8AC3E}">
+        <p14:creationId xmlns:p14="http://schemas.microsoft.com/office/powerpoint/2010/main" val="1024086991"/>
+      </p:ext>
+    </p:extLst>
+  </p:cSld>
+  <p:clrMapOvr>
+    <a:masterClrMapping/>
+  </p:clrMapOvr>
+</p:notes>
+</file>
+
+<file path=ppt/notesSlides/notesSlide9.xml><?xml version="1.0" encoding="utf-8"?>
+<p:notes xmlns:a="http://schemas.openxmlformats.org/drawingml/2006/main" xmlns:r="http://schemas.openxmlformats.org/officeDocument/2006/relationships" xmlns:p="http://schemas.openxmlformats.org/presentationml/2006/main">
+  <p:cSld>
+    <p:spTree>
+      <p:nvGrpSpPr>
+        <p:cNvPr id="1" name=""/>
+        <p:cNvGrpSpPr/>
+        <p:nvPr/>
+      </p:nvGrpSpPr>
+      <p:grpSpPr>
+        <a:xfrm>
+          <a:off x="0" y="0"/>
+          <a:ext cx="0" cy="0"/>
+          <a:chOff x="0" y="0"/>
+          <a:chExt cx="0" cy="0"/>
+        </a:xfrm>
+      </p:grpSpPr>
+      <p:sp>
+        <p:nvSpPr>
+          <p:cNvPr id="2" name="Slide Image Placeholder 1"/>
+          <p:cNvSpPr>
+            <a:spLocks noGrp="1" noRot="1" noChangeAspect="1"/>
+          </p:cNvSpPr>
+          <p:nvPr>
+            <p:ph type="sldImg"/>
+          </p:nvPr>
+        </p:nvSpPr>
+        <p:spPr/>
+      </p:sp>
+      <p:sp>
+        <p:nvSpPr>
+          <p:cNvPr id="3" name="Notes Placeholder 2"/>
+          <p:cNvSpPr>
+            <a:spLocks noGrp="1"/>
+          </p:cNvSpPr>
+          <p:nvPr>
+            <p:ph type="body" idx="1"/>
+          </p:nvPr>
+        </p:nvSpPr>
+        <p:spPr/>
+        <p:txBody>
+          <a:bodyPr/>
+          <a:lstStyle/>
+          <a:p>
+            <a:r>
+              <a:rPr lang="en-US" dirty="0"/>
+              <a:t/>
+            </a:r>
+            <a:endParaRPr lang="en-US" dirty="0"/>
+          </a:p>
+        </p:txBody>
+      </p:sp>
+      <p:sp>
+        <p:nvSpPr>
+          <p:cNvPr id="4" name="Slide Number Placeholder 3"/>
+          <p:cNvSpPr>
+            <a:spLocks noGrp="1"/>
+          </p:cNvSpPr>
+          <p:nvPr>
+            <p:ph type="sldNum" sz="quarter" idx="10"/>
+          </p:nvPr>
+        </p:nvSpPr>
+        <p:spPr/>
+        <p:txBody>
+          <a:bodyPr/>
+          <a:lstStyle/>
+          <a:p>
+            <a:fld id="{F7021451-1387-4CA6-816F-3879F97B5CBC}" type="slidenum">
+              <a:rPr lang="en-US"/>
+              <a:t>9</a:t>
             </a:fld>
             <a:endParaRPr lang="en-US"/>
           </a:p>
@@ -1585,7 +1674,7 @@
         </p:nvSpPr>
         <p:spPr>
           <a:xfrm>
-            <a:off x="640080" y="1645920"/>
+            <a:off x="640080" y="1554480"/>
             <a:ext cx="10881360" cy="2377440"/>
           </a:xfrm>
           <a:prstGeom prst="rect">
@@ -1602,7 +1691,7 @@
               <a:buNone/>
             </a:pPr>
             <a:r>
-              <a:rPr lang="en-US" sz="4800" b="1" dirty="0">
+              <a:rPr lang="en-US" sz="5400" b="1" dirty="0">
                 <a:solidFill>
                   <a:srgbClr val="FFFFFF"/>
                 </a:solidFill>
@@ -1610,16 +1699,16 @@
                 <a:ea typeface="Georgia" pitchFamily="34" charset="-122"/>
                 <a:cs typeface="Georgia" pitchFamily="34" charset="-120"/>
               </a:rPr>
-              <a:t>Coverage-Biased Correlations</a:t>
-            </a:r>
-            <a:endParaRPr lang="en-US" sz="4800" dirty="0"/>
+              <a:t>The Civic-Tech</a:t>
+            </a:r>
+            <a:endParaRPr lang="en-US" sz="5400" dirty="0"/>
           </a:p>
           <a:p>
             <a:pPr algn="l" indent="0" marL="0">
               <a:buNone/>
             </a:pPr>
             <a:r>
-              <a:rPr lang="en-US" sz="4800" b="1" dirty="0">
+              <a:rPr lang="en-US" sz="5400" b="1" dirty="0">
                 <a:solidFill>
                   <a:srgbClr val="FFFFFF"/>
                 </a:solidFill>
@@ -1627,9 +1716,9 @@
                 <a:ea typeface="Georgia" pitchFamily="34" charset="-122"/>
                 <a:cs typeface="Georgia" pitchFamily="34" charset="-120"/>
               </a:rPr>
-              <a:t>in OSS Repository Health Studies</a:t>
-            </a:r>
-            <a:endParaRPr lang="en-US" sz="4800" dirty="0"/>
+              <a:t>Open-Source Landscape</a:t>
+            </a:r>
+            <a:endParaRPr lang="en-US" sz="5400" dirty="0"/>
           </a:p>
         </p:txBody>
       </p:sp>
@@ -1641,8 +1730,8 @@
         </p:nvSpPr>
         <p:spPr>
           <a:xfrm>
-            <a:off x="640080" y="4114800"/>
-            <a:ext cx="10881360" cy="502920"/>
+            <a:off x="640080" y="4206240"/>
+            <a:ext cx="10881360" cy="548640"/>
           </a:xfrm>
           <a:prstGeom prst="rect">
             <a:avLst/>
@@ -1658,62 +1747,23 @@
               <a:buNone/>
             </a:pPr>
             <a:r>
-              <a:rPr lang="en-US" sz="2400" i="1" dirty="0">
-                <a:solidFill>
-                  <a:srgbClr val="9CA3AF"/>
+              <a:rPr lang="en-US" sz="2600" i="1" dirty="0">
+                <a:solidFill>
+                  <a:srgbClr val="14B8A6"/>
                 </a:solidFill>
                 <a:latin typeface="Georgia" pitchFamily="34" charset="0"/>
                 <a:ea typeface="Georgia" pitchFamily="34" charset="-122"/>
                 <a:cs typeface="Georgia" pitchFamily="34" charset="-120"/>
               </a:rPr>
-              <a:t>What we thought we found —</a:t>
-            </a:r>
-            <a:endParaRPr lang="en-US" sz="2400" dirty="0"/>
+              <a:t>Sustainability challenges across 37 projects.</a:t>
+            </a:r>
+            <a:endParaRPr lang="en-US" sz="2600" dirty="0"/>
           </a:p>
         </p:txBody>
       </p:sp>
       <p:sp>
         <p:nvSpPr>
           <p:cNvPr id="7" name="Text 5"/>
-          <p:cNvSpPr/>
-          <p:nvPr/>
-        </p:nvSpPr>
-        <p:spPr>
-          <a:xfrm>
-            <a:off x="640080" y="4663440"/>
-            <a:ext cx="10881360" cy="502920"/>
-          </a:xfrm>
-          <a:prstGeom prst="rect">
-            <a:avLst/>
-          </a:prstGeom>
-          <a:noFill/>
-          <a:ln/>
-        </p:spPr>
-        <p:txBody>
-          <a:bodyPr wrap="square" lIns="0" tIns="0" rIns="0" bIns="0" rtlCol="0" anchor="t"/>
-          <a:lstStyle/>
-          <a:p>
-            <a:pPr algn="l" indent="0" marL="0">
-              <a:buNone/>
-            </a:pPr>
-            <a:r>
-              <a:rPr lang="en-US" sz="2400" b="1" i="1" dirty="0">
-                <a:solidFill>
-                  <a:srgbClr val="14B8A6"/>
-                </a:solidFill>
-                <a:latin typeface="Georgia" pitchFamily="34" charset="0"/>
-                <a:ea typeface="Georgia" pitchFamily="34" charset="-122"/>
-                <a:cs typeface="Georgia" pitchFamily="34" charset="-120"/>
-              </a:rPr>
-              <a:t>and what was actually there.</a:t>
-            </a:r>
-            <a:endParaRPr lang="en-US" sz="2400" dirty="0"/>
-          </a:p>
-        </p:txBody>
-      </p:sp>
-      <p:sp>
-        <p:nvSpPr>
-          <p:cNvPr id="8" name="Text 6"/>
           <p:cNvSpPr/>
           <p:nvPr/>
         </p:nvSpPr>
@@ -1736,7 +1786,7 @@
               <a:buNone/>
             </a:pPr>
             <a:r>
-              <a:rPr lang="en-US" sz="1100" dirty="0">
+              <a:rPr lang="en-US" sz="1200" dirty="0">
                 <a:solidFill>
                   <a:srgbClr val="94A3B8"/>
                 </a:solidFill>
@@ -1744,9 +1794,9 @@
                 <a:ea typeface="Calibri" pitchFamily="34" charset="-122"/>
                 <a:cs typeface="Calibri" pitchFamily="34" charset="-120"/>
               </a:rPr>
-              <a:t>A 37-repository civic-tech panel · open-source toolchain · paired-design results</a:t>
-            </a:r>
-            <a:endParaRPr lang="en-US" sz="1100" dirty="0"/>
+              <a:t>37 repos  ·  16 organisations  ·  6 continents  ·  15 years  ·  178k commits  ·  2,506 contributor records</a:t>
+            </a:r>
+            <a:endParaRPr lang="en-US" sz="1200" dirty="0"/>
           </a:p>
         </p:txBody>
       </p:sp>
@@ -1835,7 +1885,7 @@
                 <a:ea typeface="Calibri" pitchFamily="34" charset="-122"/>
                 <a:cs typeface="Calibri" pitchFamily="34" charset="-120"/>
               </a:rPr>
-              <a:t>02 / 08</a:t>
+              <a:t>02 / 09</a:t>
             </a:r>
             <a:endParaRPr lang="en-US" sz="1000" dirty="0"/>
           </a:p>
@@ -1849,8 +1899,8 @@
         </p:nvSpPr>
         <p:spPr>
           <a:xfrm>
-            <a:off x="8503920" y="502920"/>
-            <a:ext cx="3383280" cy="274320"/>
+            <a:off x="7589520" y="502920"/>
+            <a:ext cx="4297680" cy="274320"/>
           </a:xfrm>
           <a:prstGeom prst="rect">
             <a:avLst/>
@@ -1874,7 +1924,7 @@
                 <a:ea typeface="Calibri" pitchFamily="34" charset="-122"/>
                 <a:cs typeface="Calibri" pitchFamily="34" charset="-120"/>
               </a:rPr>
-              <a:t>THE PROBLEM</a:t>
+              <a:t>WHY THIS MATTERS</a:t>
             </a:r>
             <a:endParaRPr lang="en-US" sz="900" dirty="0"/>
           </a:p>
@@ -1913,7 +1963,7 @@
                 <a:ea typeface="Georgia" pitchFamily="34" charset="-122"/>
                 <a:cs typeface="Georgia" pitchFamily="34" charset="-120"/>
               </a:rPr>
-              <a:t>Your OSS health metrics depend on flaky endpoints.</a:t>
+              <a:t>Civic tech is public infrastructure.</a:t>
             </a:r>
             <a:endParaRPr lang="en-US" sz="3000" dirty="0"/>
           </a:p>
@@ -1927,8 +1977,8 @@
         </p:nvSpPr>
         <p:spPr>
           <a:xfrm>
-            <a:off x="640080" y="1920240"/>
-            <a:ext cx="5029200" cy="1645920"/>
+            <a:off x="640080" y="1554480"/>
+            <a:ext cx="10881360" cy="457200"/>
           </a:xfrm>
           <a:prstGeom prst="rect">
             <a:avLst/>
@@ -1944,7 +1994,7 @@
               <a:buNone/>
             </a:pPr>
             <a:r>
-              <a:rPr lang="en-US" sz="11000" b="1" dirty="0">
+              <a:rPr lang="en-US" sz="2200" i="1" dirty="0">
                 <a:solidFill>
                   <a:srgbClr val="0D9488"/>
                 </a:solidFill>
@@ -1952,9 +2002,9 @@
                 <a:ea typeface="Georgia" pitchFamily="34" charset="-122"/>
                 <a:cs typeface="Georgia" pitchFamily="34" charset="-120"/>
               </a:rPr>
-              <a:t>5 of 37</a:t>
-            </a:r>
-            <a:endParaRPr lang="en-US" sz="11000" dirty="0"/>
+              <a:t>We don't actually know how it's holding up.</a:t>
+            </a:r>
+            <a:endParaRPr lang="en-US" sz="2200" dirty="0"/>
           </a:p>
         </p:txBody>
       </p:sp>
@@ -1966,8 +2016,8 @@
         </p:nvSpPr>
         <p:spPr>
           <a:xfrm>
-            <a:off x="640080" y="3657600"/>
-            <a:ext cx="5029200" cy="457200"/>
+            <a:off x="640080" y="2468880"/>
+            <a:ext cx="5212080" cy="274320"/>
           </a:xfrm>
           <a:prstGeom prst="rect">
             <a:avLst/>
@@ -1983,7 +2033,50 @@
               <a:buNone/>
             </a:pPr>
             <a:r>
-              <a:rPr lang="en-US" sz="1600" dirty="0">
+              <a:rPr lang="en-US" sz="1000" b="1" spc="400" kern="0" dirty="0">
+                <a:solidFill>
+                  <a:srgbClr val="0D9488"/>
+                </a:solidFill>
+                <a:latin typeface="Calibri" pitchFamily="34" charset="0"/>
+                <a:ea typeface="Calibri" pitchFamily="34" charset="-122"/>
+                <a:cs typeface="Calibri" pitchFamily="34" charset="-120"/>
+              </a:rPr>
+              <a:t>WHAT CIVIC TECH ACTUALLY IS</a:t>
+            </a:r>
+            <a:endParaRPr lang="en-US" sz="1000" dirty="0"/>
+          </a:p>
+        </p:txBody>
+      </p:sp>
+      <p:sp>
+        <p:nvSpPr>
+          <p:cNvPr id="8" name="Text 6"/>
+          <p:cNvSpPr/>
+          <p:nvPr/>
+        </p:nvSpPr>
+        <p:spPr>
+          <a:xfrm>
+            <a:off x="640080" y="2788920"/>
+            <a:ext cx="5212080" cy="2286000"/>
+          </a:xfrm>
+          <a:prstGeom prst="rect">
+            <a:avLst/>
+          </a:prstGeom>
+          <a:noFill/>
+          <a:ln/>
+        </p:spPr>
+        <p:txBody>
+          <a:bodyPr wrap="square" rtlCol="0" anchor="t"/>
+          <a:lstStyle/>
+          <a:p>
+            <a:pPr algn="l" marL="342900" indent="-342900">
+              <a:spcAft>
+                <a:spcPts val="400"/>
+              </a:spcAft>
+              <a:buSzPct val="100000"/>
+              <a:buChar char="•"/>
+            </a:pPr>
+            <a:r>
+              <a:rPr lang="en-US" sz="1300" dirty="0">
                 <a:solidFill>
                   <a:srgbClr val="1E293B"/>
                 </a:solidFill>
@@ -1991,22 +2084,127 @@
                 <a:ea typeface="Calibri" pitchFamily="34" charset="-122"/>
                 <a:cs typeface="Calibri" pitchFamily="34" charset="-120"/>
               </a:rPr>
-              <a:t>repositories returned populated</a:t>
-            </a:r>
-            <a:endParaRPr lang="en-US" sz="1600" dirty="0"/>
-          </a:p>
-        </p:txBody>
-      </p:sp>
-      <p:sp>
-        <p:nvSpPr>
-          <p:cNvPr id="8" name="Text 6"/>
-          <p:cNvSpPr/>
-          <p:nvPr/>
-        </p:nvSpPr>
-        <p:spPr>
-          <a:xfrm>
-            <a:off x="640080" y="4023360"/>
-            <a:ext cx="5029200" cy="457200"/>
+              <a:t>Elections and voter information</a:t>
+            </a:r>
+            <a:endParaRPr lang="en-US" sz="1300" dirty="0"/>
+          </a:p>
+          <a:p>
+            <a:pPr algn="l" marL="342900" indent="-342900">
+              <a:spcAft>
+                <a:spcPts val="400"/>
+              </a:spcAft>
+              <a:buSzPct val="100000"/>
+              <a:buChar char="•"/>
+            </a:pPr>
+            <a:r>
+              <a:rPr lang="en-US" sz="1300" dirty="0">
+                <a:solidFill>
+                  <a:srgbClr val="1E293B"/>
+                </a:solidFill>
+                <a:latin typeface="Calibri" pitchFamily="34" charset="0"/>
+                <a:ea typeface="Calibri" pitchFamily="34" charset="-122"/>
+                <a:cs typeface="Calibri" pitchFamily="34" charset="-120"/>
+              </a:rPr>
+              <a:t>Government services and benefits portals</a:t>
+            </a:r>
+            <a:endParaRPr lang="en-US" sz="1300" dirty="0"/>
+          </a:p>
+          <a:p>
+            <a:pPr algn="l" marL="342900" indent="-342900">
+              <a:spcAft>
+                <a:spcPts val="400"/>
+              </a:spcAft>
+              <a:buSzPct val="100000"/>
+              <a:buChar char="•"/>
+            </a:pPr>
+            <a:r>
+              <a:rPr lang="en-US" sz="1300" dirty="0">
+                <a:solidFill>
+                  <a:srgbClr val="1E293B"/>
+                </a:solidFill>
+                <a:latin typeface="Calibri" pitchFamily="34" charset="0"/>
+                <a:ea typeface="Calibri" pitchFamily="34" charset="-122"/>
+                <a:cs typeface="Calibri" pitchFamily="34" charset="-120"/>
+              </a:rPr>
+              <a:t>Freedom-of-information platforms</a:t>
+            </a:r>
+            <a:endParaRPr lang="en-US" sz="1300" dirty="0"/>
+          </a:p>
+          <a:p>
+            <a:pPr algn="l" marL="342900" indent="-342900">
+              <a:spcAft>
+                <a:spcPts val="400"/>
+              </a:spcAft>
+              <a:buSzPct val="100000"/>
+              <a:buChar char="•"/>
+            </a:pPr>
+            <a:r>
+              <a:rPr lang="en-US" sz="1300" dirty="0">
+                <a:solidFill>
+                  <a:srgbClr val="1E293B"/>
+                </a:solidFill>
+                <a:latin typeface="Calibri" pitchFamily="34" charset="0"/>
+                <a:ea typeface="Calibri" pitchFamily="34" charset="-122"/>
+                <a:cs typeface="Calibri" pitchFamily="34" charset="-120"/>
+              </a:rPr>
+              <a:t>Environmental monitoring</a:t>
+            </a:r>
+            <a:endParaRPr lang="en-US" sz="1300" dirty="0"/>
+          </a:p>
+          <a:p>
+            <a:pPr algn="l" marL="342900" indent="-342900">
+              <a:spcAft>
+                <a:spcPts val="400"/>
+              </a:spcAft>
+              <a:buSzPct val="100000"/>
+              <a:buChar char="•"/>
+            </a:pPr>
+            <a:r>
+              <a:rPr lang="en-US" sz="1300" dirty="0">
+                <a:solidFill>
+                  <a:srgbClr val="1E293B"/>
+                </a:solidFill>
+                <a:latin typeface="Calibri" pitchFamily="34" charset="0"/>
+                <a:ea typeface="Calibri" pitchFamily="34" charset="-122"/>
+                <a:cs typeface="Calibri" pitchFamily="34" charset="-120"/>
+              </a:rPr>
+              <a:t>Federated social infrastructure</a:t>
+            </a:r>
+            <a:endParaRPr lang="en-US" sz="1300" dirty="0"/>
+          </a:p>
+          <a:p>
+            <a:pPr algn="l" marL="342900" indent="-342900">
+              <a:spcAft>
+                <a:spcPts val="400"/>
+              </a:spcAft>
+              <a:buSzPct val="100000"/>
+              <a:buChar char="•"/>
+            </a:pPr>
+            <a:r>
+              <a:rPr lang="en-US" sz="1300" dirty="0">
+                <a:solidFill>
+                  <a:srgbClr val="1E293B"/>
+                </a:solidFill>
+                <a:latin typeface="Calibri" pitchFamily="34" charset="0"/>
+                <a:ea typeface="Calibri" pitchFamily="34" charset="-122"/>
+                <a:cs typeface="Calibri" pitchFamily="34" charset="-120"/>
+              </a:rPr>
+              <a:t>Civic mapping, deliberation, transparency tools</a:t>
+            </a:r>
+            <a:endParaRPr lang="en-US" sz="1300" dirty="0"/>
+          </a:p>
+        </p:txBody>
+      </p:sp>
+      <p:sp>
+        <p:nvSpPr>
+          <p:cNvPr id="9" name="Text 7"/>
+          <p:cNvSpPr/>
+          <p:nvPr/>
+        </p:nvSpPr>
+        <p:spPr>
+          <a:xfrm>
+            <a:off x="6400800" y="2468880"/>
+            <a:ext cx="5120640" cy="274320"/>
           </a:xfrm>
           <a:prstGeom prst="rect">
             <a:avLst/>
@@ -2022,30 +2220,69 @@
               <a:buNone/>
             </a:pPr>
             <a:r>
-              <a:rPr lang="en-US" sz="1400" dirty="0">
+              <a:rPr lang="en-US" sz="1000" b="1" spc="400" kern="0" dirty="0">
+                <a:solidFill>
+                  <a:srgbClr val="0D9488"/>
+                </a:solidFill>
+                <a:latin typeface="Calibri" pitchFamily="34" charset="0"/>
+                <a:ea typeface="Calibri" pitchFamily="34" charset="-122"/>
+                <a:cs typeface="Calibri" pitchFamily="34" charset="-120"/>
+              </a:rPr>
+              <a:t>WHY MEASURE IT</a:t>
+            </a:r>
+            <a:endParaRPr lang="en-US" sz="1000" dirty="0"/>
+          </a:p>
+        </p:txBody>
+      </p:sp>
+      <p:sp>
+        <p:nvSpPr>
+          <p:cNvPr id="10" name="Text 8"/>
+          <p:cNvSpPr/>
+          <p:nvPr/>
+        </p:nvSpPr>
+        <p:spPr>
+          <a:xfrm>
+            <a:off x="6400800" y="2788920"/>
+            <a:ext cx="5120640" cy="1463040"/>
+          </a:xfrm>
+          <a:prstGeom prst="rect">
+            <a:avLst/>
+          </a:prstGeom>
+          <a:noFill/>
+          <a:ln/>
+        </p:spPr>
+        <p:txBody>
+          <a:bodyPr wrap="square" lIns="0" tIns="0" rIns="0" bIns="0" rtlCol="0" anchor="t"/>
+          <a:lstStyle/>
+          <a:p>
+            <a:pPr algn="l" indent="0" marL="0">
+              <a:buNone/>
+            </a:pPr>
+            <a:r>
+              <a:rPr lang="en-US" sz="1300" dirty="0">
                 <a:solidFill>
                   <a:srgbClr val="1E293B"/>
                 </a:solidFill>
-                <a:latin typeface="Consolas" pitchFamily="34" charset="0"/>
-                <a:ea typeface="Consolas" pitchFamily="34" charset="-122"/>
-                <a:cs typeface="Consolas" pitchFamily="34" charset="-120"/>
-              </a:rPr>
-              <a:t>/stats/commit_activity   data on our initial crawl.</a:t>
-            </a:r>
-            <a:endParaRPr lang="en-US" sz="1400" dirty="0"/>
-          </a:p>
-        </p:txBody>
-      </p:sp>
-      <p:sp>
-        <p:nvSpPr>
-          <p:cNvPr id="9" name="Text 7"/>
-          <p:cNvSpPr/>
-          <p:nvPr/>
-        </p:nvSpPr>
-        <p:spPr>
-          <a:xfrm>
-            <a:off x="640080" y="4663440"/>
-            <a:ext cx="5029200" cy="1097280"/>
+                <a:latin typeface="Calibri" pitchFamily="34" charset="0"/>
+                <a:ea typeface="Calibri" pitchFamily="34" charset="-122"/>
+                <a:cs typeface="Calibri" pitchFamily="34" charset="-120"/>
+              </a:rPr>
+              <a:t>Mostly volunteer-led. Intermittently funded. Small non-profit teams. When a project fails, the cost falls on democratic participation and public-service delivery — not on private customers.</a:t>
+            </a:r>
+            <a:endParaRPr lang="en-US" sz="1300" dirty="0"/>
+          </a:p>
+        </p:txBody>
+      </p:sp>
+      <p:sp>
+        <p:nvSpPr>
+          <p:cNvPr id="11" name="Text 9"/>
+          <p:cNvSpPr/>
+          <p:nvPr/>
+        </p:nvSpPr>
+        <p:spPr>
+          <a:xfrm>
+            <a:off x="6400800" y="4251960"/>
+            <a:ext cx="5120640" cy="1371600"/>
           </a:xfrm>
           <a:prstGeom prst="rect">
             <a:avLst/>
@@ -2069,7 +2306,7 @@
                 <a:ea typeface="Calibri" pitchFamily="34" charset="-122"/>
                 <a:cs typeface="Calibri" pitchFamily="34" charset="-120"/>
               </a:rPr>
-              <a:t>GitHub computes the rest asynchronously, then caches results only for repos with recent traffic.</a:t>
+              <a:t>Existing literature is qualitative civic-tech work or quantitative OSS-health work on commercial flagships. No quantitative landscape of civic-tech specifically.</a:t>
             </a:r>
             <a:endParaRPr lang="en-US" sz="1300" dirty="0"/>
           </a:p>
@@ -2077,378 +2314,60 @@
       </p:sp>
       <p:sp>
         <p:nvSpPr>
-          <p:cNvPr id="10" name="Shape 8"/>
-          <p:cNvSpPr/>
-          <p:nvPr/>
-        </p:nvSpPr>
-        <p:spPr>
-          <a:xfrm>
-            <a:off x="6400800" y="1920240"/>
-            <a:ext cx="5120640" cy="4114800"/>
+          <p:cNvPr id="12" name="Shape 10"/>
+          <p:cNvSpPr/>
+          <p:nvPr/>
+        </p:nvSpPr>
+        <p:spPr>
+          <a:xfrm>
+            <a:off x="640080" y="5760720"/>
+            <a:ext cx="10881360" cy="731520"/>
           </a:xfrm>
           <a:prstGeom prst="rect">
             <a:avLst/>
           </a:prstGeom>
           <a:solidFill>
-            <a:srgbClr val="FFFFFF"/>
+            <a:srgbClr val="0F172A"/>
           </a:solidFill>
-          <a:ln w="12700">
-            <a:solidFill>
-              <a:srgbClr val="E2E8F0"/>
-            </a:solidFill>
-            <a:prstDash val="solid"/>
-          </a:ln>
-          <a:effectLst>
-            <a:outerShdw sx="100000" sy="100000" kx="0" ky="0" algn="bl" rotWithShape="0" blurRad="152400" dist="38100" dir="5400000">
-              <a:srgbClr val="0F172A">
-                <a:alpha val="6000"/>
-              </a:srgbClr>
-            </a:outerShdw>
-          </a:effectLst>
-        </p:spPr>
-      </p:sp>
-      <p:sp>
-        <p:nvSpPr>
-          <p:cNvPr id="11" name="Text 9"/>
-          <p:cNvSpPr/>
-          <p:nvPr/>
-        </p:nvSpPr>
-        <p:spPr>
-          <a:xfrm>
-            <a:off x="6675120" y="2103120"/>
-            <a:ext cx="4572000" cy="365760"/>
-          </a:xfrm>
-          <a:prstGeom prst="rect">
-            <a:avLst/>
-          </a:prstGeom>
-          <a:noFill/>
-          <a:ln/>
-        </p:spPr>
-        <p:txBody>
-          <a:bodyPr wrap="square" lIns="0" tIns="0" rIns="0" bIns="0" rtlCol="0" anchor="t"/>
-          <a:lstStyle/>
-          <a:p>
-            <a:pPr algn="l" indent="0" marL="0">
-              <a:buNone/>
-            </a:pPr>
-            <a:r>
-              <a:rPr lang="en-US" sz="1400" b="1" dirty="0">
-                <a:solidFill>
-                  <a:srgbClr val="1E293B"/>
+          <a:ln/>
+        </p:spPr>
+      </p:sp>
+      <p:sp>
+        <p:nvSpPr>
+          <p:cNvPr id="13" name="Text 11"/>
+          <p:cNvSpPr/>
+          <p:nvPr/>
+        </p:nvSpPr>
+        <p:spPr>
+          <a:xfrm>
+            <a:off x="640080" y="5760720"/>
+            <a:ext cx="10881360" cy="731520"/>
+          </a:xfrm>
+          <a:prstGeom prst="rect">
+            <a:avLst/>
+          </a:prstGeom>
+          <a:noFill/>
+          <a:ln/>
+        </p:spPr>
+        <p:txBody>
+          <a:bodyPr wrap="square" lIns="0" tIns="0" rIns="0" bIns="0" rtlCol="0" anchor="ctr"/>
+          <a:lstStyle/>
+          <a:p>
+            <a:pPr algn="ctr" indent="0" marL="0">
+              <a:buNone/>
+            </a:pPr>
+            <a:r>
+              <a:rPr lang="en-US" sz="1600" b="1" i="1" dirty="0">
+                <a:solidFill>
+                  <a:srgbClr val="FFFFFF"/>
                 </a:solidFill>
                 <a:latin typeface="Georgia" pitchFamily="34" charset="0"/>
                 <a:ea typeface="Georgia" pitchFamily="34" charset="-122"/>
                 <a:cs typeface="Georgia" pitchFamily="34" charset="-120"/>
               </a:rPr>
-              <a:t>Why the missingness is non-random</a:t>
-            </a:r>
-            <a:endParaRPr lang="en-US" sz="1400" dirty="0"/>
-          </a:p>
-        </p:txBody>
-      </p:sp>
-      <p:pic>
-        <p:nvPicPr>
-          <p:cNvPr id="12" name="Image 0" descr="preencoded.png">    </p:cNvPr>
-          <p:cNvPicPr>
-            <a:picLocks noChangeAspect="1"/>
-          </p:cNvPicPr>
-          <p:nvPr/>
-        </p:nvPicPr>
-        <p:blipFill>
-          <a:blip r:embed="rId1"/>
-          <a:stretch>
-            <a:fillRect/>
-          </a:stretch>
-        </p:blipFill>
-        <p:spPr>
-          <a:xfrm>
-            <a:off x="6675120" y="2606040"/>
-            <a:ext cx="502920" cy="502920"/>
-          </a:xfrm>
-          <a:prstGeom prst="rect">
-            <a:avLst/>
-          </a:prstGeom>
-        </p:spPr>
-      </p:pic>
-      <p:sp>
-        <p:nvSpPr>
-          <p:cNvPr id="13" name="Text 10"/>
-          <p:cNvSpPr/>
-          <p:nvPr/>
-        </p:nvSpPr>
-        <p:spPr>
-          <a:xfrm>
-            <a:off x="7360920" y="2560320"/>
-            <a:ext cx="4114800" cy="365760"/>
-          </a:xfrm>
-          <a:prstGeom prst="rect">
-            <a:avLst/>
-          </a:prstGeom>
-          <a:noFill/>
-          <a:ln/>
-        </p:spPr>
-        <p:txBody>
-          <a:bodyPr wrap="square" lIns="0" tIns="0" rIns="0" bIns="0" rtlCol="0" anchor="t"/>
-          <a:lstStyle/>
-          <a:p>
-            <a:pPr algn="l" indent="0" marL="0">
-              <a:buNone/>
-            </a:pPr>
-            <a:r>
-              <a:rPr lang="en-US" sz="1400" b="1" dirty="0">
-                <a:solidFill>
-                  <a:srgbClr val="1E293B"/>
-                </a:solidFill>
-                <a:latin typeface="Georgia" pitchFamily="34" charset="0"/>
-                <a:ea typeface="Georgia" pitchFamily="34" charset="-122"/>
-                <a:cs typeface="Georgia" pitchFamily="34" charset="-120"/>
-              </a:rPr>
-              <a:t>Timeout under retry budget</a:t>
-            </a:r>
-            <a:endParaRPr lang="en-US" sz="1400" dirty="0"/>
-          </a:p>
-        </p:txBody>
-      </p:sp>
-      <p:sp>
-        <p:nvSpPr>
-          <p:cNvPr id="14" name="Text 11"/>
-          <p:cNvSpPr/>
-          <p:nvPr/>
-        </p:nvSpPr>
-        <p:spPr>
-          <a:xfrm>
-            <a:off x="7360920" y="2898648"/>
-            <a:ext cx="4114800" cy="640080"/>
-          </a:xfrm>
-          <a:prstGeom prst="rect">
-            <a:avLst/>
-          </a:prstGeom>
-          <a:noFill/>
-          <a:ln/>
-        </p:spPr>
-        <p:txBody>
-          <a:bodyPr wrap="square" lIns="0" tIns="0" rIns="0" bIns="0" rtlCol="0" anchor="t"/>
-          <a:lstStyle/>
-          <a:p>
-            <a:pPr algn="l" indent="0" marL="0">
-              <a:buNone/>
-            </a:pPr>
-            <a:r>
-              <a:rPr lang="en-US" sz="1200" dirty="0">
-                <a:solidFill>
-                  <a:srgbClr val="64748B"/>
-                </a:solidFill>
-                <a:latin typeface="Calibri" pitchFamily="34" charset="0"/>
-                <a:ea typeface="Calibri" pitchFamily="34" charset="-122"/>
-                <a:cs typeface="Calibri" pitchFamily="34" charset="-120"/>
-              </a:rPr>
-              <a:t>/stats/* returns HTTP 202 indefinitely for cold repos.</a:t>
-            </a:r>
-            <a:endParaRPr lang="en-US" sz="1200" dirty="0"/>
-          </a:p>
-        </p:txBody>
-      </p:sp>
-      <p:pic>
-        <p:nvPicPr>
-          <p:cNvPr id="15" name="Image 1" descr="preencoded.png">    </p:cNvPr>
-          <p:cNvPicPr>
-            <a:picLocks noChangeAspect="1"/>
-          </p:cNvPicPr>
-          <p:nvPr/>
-        </p:nvPicPr>
-        <p:blipFill>
-          <a:blip r:embed="rId2"/>
-          <a:stretch>
-            <a:fillRect/>
-          </a:stretch>
-        </p:blipFill>
-        <p:spPr>
-          <a:xfrm>
-            <a:off x="6675120" y="3685032"/>
-            <a:ext cx="502920" cy="502920"/>
-          </a:xfrm>
-          <a:prstGeom prst="rect">
-            <a:avLst/>
-          </a:prstGeom>
-        </p:spPr>
-      </p:pic>
-      <p:sp>
-        <p:nvSpPr>
-          <p:cNvPr id="16" name="Text 12"/>
-          <p:cNvSpPr/>
-          <p:nvPr/>
-        </p:nvSpPr>
-        <p:spPr>
-          <a:xfrm>
-            <a:off x="7360920" y="3639312"/>
-            <a:ext cx="4114800" cy="365760"/>
-          </a:xfrm>
-          <a:prstGeom prst="rect">
-            <a:avLst/>
-          </a:prstGeom>
-          <a:noFill/>
-          <a:ln/>
-        </p:spPr>
-        <p:txBody>
-          <a:bodyPr wrap="square" lIns="0" tIns="0" rIns="0" bIns="0" rtlCol="0" anchor="t"/>
-          <a:lstStyle/>
-          <a:p>
-            <a:pPr algn="l" indent="0" marL="0">
-              <a:buNone/>
-            </a:pPr>
-            <a:r>
-              <a:rPr lang="en-US" sz="1400" b="1" dirty="0">
-                <a:solidFill>
-                  <a:srgbClr val="1E293B"/>
-                </a:solidFill>
-                <a:latin typeface="Georgia" pitchFamily="34" charset="0"/>
-                <a:ea typeface="Georgia" pitchFamily="34" charset="-122"/>
-                <a:cs typeface="Georgia" pitchFamily="34" charset="-120"/>
-              </a:rPr>
-              <a:t>Cache is warm for active repos</a:t>
-            </a:r>
-            <a:endParaRPr lang="en-US" sz="1400" dirty="0"/>
-          </a:p>
-        </p:txBody>
-      </p:sp>
-      <p:sp>
-        <p:nvSpPr>
-          <p:cNvPr id="17" name="Text 13"/>
-          <p:cNvSpPr/>
-          <p:nvPr/>
-        </p:nvSpPr>
-        <p:spPr>
-          <a:xfrm>
-            <a:off x="7360920" y="3977640"/>
-            <a:ext cx="4114800" cy="640080"/>
-          </a:xfrm>
-          <a:prstGeom prst="rect">
-            <a:avLst/>
-          </a:prstGeom>
-          <a:noFill/>
-          <a:ln/>
-        </p:spPr>
-        <p:txBody>
-          <a:bodyPr wrap="square" lIns="0" tIns="0" rIns="0" bIns="0" rtlCol="0" anchor="t"/>
-          <a:lstStyle/>
-          <a:p>
-            <a:pPr algn="l" indent="0" marL="0">
-              <a:buNone/>
-            </a:pPr>
-            <a:r>
-              <a:rPr lang="en-US" sz="1200" dirty="0">
-                <a:solidFill>
-                  <a:srgbClr val="64748B"/>
-                </a:solidFill>
-                <a:latin typeface="Calibri" pitchFamily="34" charset="0"/>
-                <a:ea typeface="Calibri" pitchFamily="34" charset="-122"/>
-                <a:cs typeface="Calibri" pitchFamily="34" charset="-120"/>
-              </a:rPr>
-              <a:t>Heavy API traffic → recent recomputation → populated response.</a:t>
-            </a:r>
-            <a:endParaRPr lang="en-US" sz="1200" dirty="0"/>
-          </a:p>
-        </p:txBody>
-      </p:sp>
-      <p:pic>
-        <p:nvPicPr>
-          <p:cNvPr id="18" name="Image 2" descr="preencoded.png">    </p:cNvPr>
-          <p:cNvPicPr>
-            <a:picLocks noChangeAspect="1"/>
-          </p:cNvPicPr>
-          <p:nvPr/>
-        </p:nvPicPr>
-        <p:blipFill>
-          <a:blip r:embed="rId3"/>
-          <a:stretch>
-            <a:fillRect/>
-          </a:stretch>
-        </p:blipFill>
-        <p:spPr>
-          <a:xfrm>
-            <a:off x="6675120" y="4764024"/>
-            <a:ext cx="502920" cy="502920"/>
-          </a:xfrm>
-          <a:prstGeom prst="rect">
-            <a:avLst/>
-          </a:prstGeom>
-        </p:spPr>
-      </p:pic>
-      <p:sp>
-        <p:nvSpPr>
-          <p:cNvPr id="19" name="Text 14"/>
-          <p:cNvSpPr/>
-          <p:nvPr/>
-        </p:nvSpPr>
-        <p:spPr>
-          <a:xfrm>
-            <a:off x="7360920" y="4718304"/>
-            <a:ext cx="4114800" cy="365760"/>
-          </a:xfrm>
-          <a:prstGeom prst="rect">
-            <a:avLst/>
-          </a:prstGeom>
-          <a:noFill/>
-          <a:ln/>
-        </p:spPr>
-        <p:txBody>
-          <a:bodyPr wrap="square" lIns="0" tIns="0" rIns="0" bIns="0" rtlCol="0" anchor="t"/>
-          <a:lstStyle/>
-          <a:p>
-            <a:pPr algn="l" indent="0" marL="0">
-              <a:buNone/>
-            </a:pPr>
-            <a:r>
-              <a:rPr lang="en-US" sz="1400" b="1" dirty="0">
-                <a:solidFill>
-                  <a:srgbClr val="1E293B"/>
-                </a:solidFill>
-                <a:latin typeface="Georgia" pitchFamily="34" charset="0"/>
-                <a:ea typeface="Georgia" pitchFamily="34" charset="-122"/>
-                <a:cs typeface="Georgia" pitchFamily="34" charset="-120"/>
-              </a:rPr>
-              <a:t>The 'populated' subset is biased</a:t>
-            </a:r>
-            <a:endParaRPr lang="en-US" sz="1400" dirty="0"/>
-          </a:p>
-        </p:txBody>
-      </p:sp>
-      <p:sp>
-        <p:nvSpPr>
-          <p:cNvPr id="20" name="Text 15"/>
-          <p:cNvSpPr/>
-          <p:nvPr/>
-        </p:nvSpPr>
-        <p:spPr>
-          <a:xfrm>
-            <a:off x="7360920" y="5056632"/>
-            <a:ext cx="4114800" cy="640080"/>
-          </a:xfrm>
-          <a:prstGeom prst="rect">
-            <a:avLst/>
-          </a:prstGeom>
-          <a:noFill/>
-          <a:ln/>
-        </p:spPr>
-        <p:txBody>
-          <a:bodyPr wrap="square" lIns="0" tIns="0" rIns="0" bIns="0" rtlCol="0" anchor="t"/>
-          <a:lstStyle/>
-          <a:p>
-            <a:pPr algn="l" indent="0" marL="0">
-              <a:buNone/>
-            </a:pPr>
-            <a:r>
-              <a:rPr lang="en-US" sz="1200" dirty="0">
-                <a:solidFill>
-                  <a:srgbClr val="64748B"/>
-                </a:solidFill>
-                <a:latin typeface="Calibri" pitchFamily="34" charset="0"/>
-                <a:ea typeface="Calibri" pitchFamily="34" charset="-122"/>
-                <a:cs typeface="Calibri" pitchFamily="34" charset="-120"/>
-              </a:rPr>
-              <a:t>And the bias correlates with the variables you care about.</a:t>
-            </a:r>
-            <a:endParaRPr lang="en-US" sz="1200" dirty="0"/>
+              <a:t>Our question:  what does the civic-tech OSS landscape look like, and where are its sustainability stresses?</a:t>
+            </a:r>
+            <a:endParaRPr lang="en-US" sz="1600" dirty="0"/>
           </a:p>
         </p:txBody>
       </p:sp>
@@ -2537,7 +2456,7 @@
                 <a:ea typeface="Calibri" pitchFamily="34" charset="-122"/>
                 <a:cs typeface="Calibri" pitchFamily="34" charset="-120"/>
               </a:rPr>
-              <a:t>03 / 08</a:t>
+              <a:t>03 / 09</a:t>
             </a:r>
             <a:endParaRPr lang="en-US" sz="1000" dirty="0"/>
           </a:p>
@@ -2551,8 +2470,8 @@
         </p:nvSpPr>
         <p:spPr>
           <a:xfrm>
-            <a:off x="8503920" y="502920"/>
-            <a:ext cx="3383280" cy="274320"/>
+            <a:off x="7589520" y="502920"/>
+            <a:ext cx="4297680" cy="274320"/>
           </a:xfrm>
           <a:prstGeom prst="rect">
             <a:avLst/>
@@ -2576,7 +2495,7 @@
                 <a:ea typeface="Calibri" pitchFamily="34" charset="-122"/>
                 <a:cs typeface="Calibri" pitchFamily="34" charset="-120"/>
               </a:rPr>
-              <a:t>THE DISCOVERY</a:t>
+              <a:t>WHAT WE HAVE</a:t>
             </a:r>
             <a:endParaRPr lang="en-US" sz="900" dirty="0"/>
           </a:p>
@@ -2615,7 +2534,7 @@
                 <a:ea typeface="Georgia" pitchFamily="34" charset="-122"/>
                 <a:cs typeface="Georgia" pitchFamily="34" charset="-120"/>
               </a:rPr>
-              <a:t>A 'robust' correlation that vanished under triangulation</a:t>
+              <a:t>A purposive panel covering scale, age, and topic.</a:t>
             </a:r>
             <a:endParaRPr lang="en-US" sz="2800" dirty="0"/>
           </a:p>
@@ -2654,7 +2573,7 @@
                 <a:ea typeface="Calibri" pitchFamily="34" charset="-122"/>
                 <a:cs typeface="Calibri" pitchFamily="34" charset="-120"/>
               </a:rPr>
-              <a:t>burstiness  ↔  stale-issue ratio, across our 37-repo civic-tech panel</a:t>
+              <a:t>All artefacts open-source under CC-BY 4.0 / MIT; Zenodo-archived.</a:t>
             </a:r>
             <a:endParaRPr lang="en-US" sz="1400" dirty="0"/>
           </a:p>
@@ -2668,61 +2587,49 @@
         </p:nvSpPr>
         <p:spPr>
           <a:xfrm>
-            <a:off x="640080" y="2194560"/>
-            <a:ext cx="5212080" cy="3291840"/>
+            <a:off x="640080" y="2286000"/>
+            <a:ext cx="2651760" cy="1828800"/>
           </a:xfrm>
           <a:prstGeom prst="rect">
             <a:avLst/>
           </a:prstGeom>
           <a:solidFill>
-            <a:srgbClr val="FEF3C7"/>
+            <a:srgbClr val="FFFFFF"/>
           </a:solidFill>
-          <a:ln w="19050">
+          <a:ln w="12700">
             <a:solidFill>
-              <a:srgbClr val="F59E0B"/>
+              <a:srgbClr val="E2E8F0"/>
             </a:solidFill>
             <a:prstDash val="solid"/>
           </a:ln>
-        </p:spPr>
-      </p:sp>
-      <p:sp>
-        <p:nvSpPr>
-          <p:cNvPr id="8" name="Text 6"/>
-          <p:cNvSpPr/>
-          <p:nvPr/>
-        </p:nvSpPr>
-        <p:spPr>
-          <a:xfrm>
-            <a:off x="868680" y="2331720"/>
-            <a:ext cx="4754880" cy="320040"/>
-          </a:xfrm>
-          <a:prstGeom prst="rect">
-            <a:avLst/>
-          </a:prstGeom>
-          <a:noFill/>
-          <a:ln/>
-        </p:spPr>
-        <p:txBody>
-          <a:bodyPr wrap="square" lIns="0" tIns="0" rIns="0" bIns="0" rtlCol="0" anchor="t"/>
-          <a:lstStyle/>
-          <a:p>
-            <a:pPr algn="l" indent="0" marL="0">
-              <a:buNone/>
-            </a:pPr>
-            <a:r>
-              <a:rPr lang="en-US" sz="1100" b="1" spc="400" kern="0" dirty="0">
-                <a:solidFill>
-                  <a:srgbClr val="B45309"/>
-                </a:solidFill>
-                <a:latin typeface="Calibri" pitchFamily="34" charset="0"/>
-                <a:ea typeface="Calibri" pitchFamily="34" charset="-122"/>
-                <a:cs typeface="Calibri" pitchFamily="34" charset="-120"/>
-              </a:rPr>
-              <a:t>PILOT  (n = 29)</a:t>
-            </a:r>
-            <a:endParaRPr lang="en-US" sz="1100" dirty="0"/>
-          </a:p>
-        </p:txBody>
+          <a:effectLst>
+            <a:outerShdw sx="100000" sy="100000" kx="0" ky="0" algn="bl" rotWithShape="0" blurRad="152400" dist="38100" dir="5400000">
+              <a:srgbClr val="0F172A">
+                <a:alpha val="6000"/>
+              </a:srgbClr>
+            </a:outerShdw>
+          </a:effectLst>
+        </p:spPr>
+      </p:sp>
+      <p:sp>
+        <p:nvSpPr>
+          <p:cNvPr id="8" name="Shape 6"/>
+          <p:cNvSpPr/>
+          <p:nvPr/>
+        </p:nvSpPr>
+        <p:spPr>
+          <a:xfrm>
+            <a:off x="640080" y="2286000"/>
+            <a:ext cx="2651760" cy="73152"/>
+          </a:xfrm>
+          <a:prstGeom prst="rect">
+            <a:avLst/>
+          </a:prstGeom>
+          <a:solidFill>
+            <a:srgbClr val="0D9488"/>
+          </a:solidFill>
+          <a:ln/>
+        </p:spPr>
       </p:sp>
       <p:sp>
         <p:nvSpPr>
@@ -2732,34 +2639,34 @@
         </p:nvSpPr>
         <p:spPr>
           <a:xfrm>
-            <a:off x="868680" y="2697480"/>
-            <a:ext cx="4754880" cy="914400"/>
-          </a:xfrm>
-          <a:prstGeom prst="rect">
-            <a:avLst/>
-          </a:prstGeom>
-          <a:noFill/>
-          <a:ln/>
-        </p:spPr>
-        <p:txBody>
-          <a:bodyPr wrap="square" lIns="0" tIns="0" rIns="0" bIns="0" rtlCol="0" anchor="t"/>
-          <a:lstStyle/>
-          <a:p>
-            <a:pPr algn="l" indent="0" marL="0">
-              <a:buNone/>
-            </a:pPr>
-            <a:r>
-              <a:rPr lang="en-US" sz="5600" b="1" dirty="0">
-                <a:solidFill>
-                  <a:srgbClr val="92400E"/>
+            <a:off x="640080" y="2468880"/>
+            <a:ext cx="2651760" cy="868680"/>
+          </a:xfrm>
+          <a:prstGeom prst="rect">
+            <a:avLst/>
+          </a:prstGeom>
+          <a:noFill/>
+          <a:ln/>
+        </p:spPr>
+        <p:txBody>
+          <a:bodyPr wrap="square" lIns="0" tIns="0" rIns="0" bIns="0" rtlCol="0" anchor="ctr"/>
+          <a:lstStyle/>
+          <a:p>
+            <a:pPr algn="ctr" indent="0" marL="0">
+              <a:buNone/>
+            </a:pPr>
+            <a:r>
+              <a:rPr lang="en-US" sz="4400" b="1" dirty="0">
+                <a:solidFill>
+                  <a:srgbClr val="0D9488"/>
                 </a:solidFill>
                 <a:latin typeface="Georgia" pitchFamily="34" charset="0"/>
                 <a:ea typeface="Georgia" pitchFamily="34" charset="-122"/>
                 <a:cs typeface="Georgia" pitchFamily="34" charset="-120"/>
               </a:rPr>
-              <a:t>ρ = 0.685</a:t>
-            </a:r>
-            <a:endParaRPr lang="en-US" sz="5600" dirty="0"/>
+              <a:t>37</a:t>
+            </a:r>
+            <a:endParaRPr lang="en-US" sz="4400" dirty="0"/>
           </a:p>
         </p:txBody>
       </p:sp>
@@ -2771,34 +2678,34 @@
         </p:nvSpPr>
         <p:spPr>
           <a:xfrm>
-            <a:off x="868680" y="3703320"/>
-            <a:ext cx="4754880" cy="365760"/>
-          </a:xfrm>
-          <a:prstGeom prst="rect">
-            <a:avLst/>
-          </a:prstGeom>
-          <a:noFill/>
-          <a:ln/>
-        </p:spPr>
-        <p:txBody>
-          <a:bodyPr wrap="square" lIns="0" tIns="0" rIns="0" bIns="0" rtlCol="0" anchor="t"/>
-          <a:lstStyle/>
-          <a:p>
-            <a:pPr algn="l" indent="0" marL="0">
-              <a:buNone/>
-            </a:pPr>
-            <a:r>
-              <a:rPr lang="en-US" sz="1400" b="1" dirty="0">
-                <a:solidFill>
-                  <a:srgbClr val="78350F"/>
-                </a:solidFill>
-                <a:latin typeface="Calibri" pitchFamily="34" charset="0"/>
-                <a:ea typeface="Calibri" pitchFamily="34" charset="-122"/>
-                <a:cs typeface="Calibri" pitchFamily="34" charset="-120"/>
-              </a:rPr>
-              <a:t>FDR-significant on n = 17 pairs</a:t>
-            </a:r>
-            <a:endParaRPr lang="en-US" sz="1400" dirty="0"/>
+            <a:off x="640080" y="3337560"/>
+            <a:ext cx="2651760" cy="320040"/>
+          </a:xfrm>
+          <a:prstGeom prst="rect">
+            <a:avLst/>
+          </a:prstGeom>
+          <a:noFill/>
+          <a:ln/>
+        </p:spPr>
+        <p:txBody>
+          <a:bodyPr wrap="square" lIns="0" tIns="0" rIns="0" bIns="0" rtlCol="0" anchor="t"/>
+          <a:lstStyle/>
+          <a:p>
+            <a:pPr algn="ctr" indent="0" marL="0">
+              <a:buNone/>
+            </a:pPr>
+            <a:r>
+              <a:rPr lang="en-US" sz="1300" b="1" dirty="0">
+                <a:solidFill>
+                  <a:srgbClr val="1E293B"/>
+                </a:solidFill>
+                <a:latin typeface="Calibri" pitchFamily="34" charset="0"/>
+                <a:ea typeface="Calibri" pitchFamily="34" charset="-122"/>
+                <a:cs typeface="Calibri" pitchFamily="34" charset="-120"/>
+              </a:rPr>
+              <a:t>repositories</a:t>
+            </a:r>
+            <a:endParaRPr lang="en-US" sz="1300" dirty="0"/>
           </a:p>
         </p:txBody>
       </p:sp>
@@ -2810,47 +2717,99 @@
         </p:nvSpPr>
         <p:spPr>
           <a:xfrm>
-            <a:off x="868680" y="4160520"/>
-            <a:ext cx="4754880" cy="1188720"/>
-          </a:xfrm>
-          <a:prstGeom prst="rect">
-            <a:avLst/>
-          </a:prstGeom>
-          <a:noFill/>
-          <a:ln/>
-        </p:spPr>
-        <p:txBody>
-          <a:bodyPr wrap="square" lIns="0" tIns="0" rIns="0" bIns="0" rtlCol="0" anchor="t"/>
-          <a:lstStyle/>
-          <a:p>
-            <a:pPr algn="l" indent="0" marL="0">
-              <a:buNone/>
-            </a:pPr>
-            <a:r>
-              <a:rPr lang="en-US" sz="1200" i="1" dirty="0">
-                <a:solidFill>
-                  <a:srgbClr val="78350F"/>
-                </a:solidFill>
-                <a:latin typeface="Calibri" pitchFamily="34" charset="0"/>
-                <a:ea typeface="Calibri" pitchFamily="34" charset="-122"/>
-                <a:cs typeface="Calibri" pitchFamily="34" charset="-120"/>
-              </a:rPr>
-              <a:t>Built on the subset of repos for which GitHub had pre-cached /stats/* results.</a:t>
-            </a:r>
-            <a:endParaRPr lang="en-US" sz="1200" dirty="0"/>
-          </a:p>
-        </p:txBody>
-      </p:sp>
-      <p:sp>
-        <p:nvSpPr>
-          <p:cNvPr id="12" name="Text 10"/>
-          <p:cNvSpPr/>
-          <p:nvPr/>
-        </p:nvSpPr>
-        <p:spPr>
-          <a:xfrm>
-            <a:off x="5852160" y="3383280"/>
-            <a:ext cx="731520" cy="822960"/>
+            <a:off x="640080" y="3657600"/>
+            <a:ext cx="2651760" cy="365760"/>
+          </a:xfrm>
+          <a:prstGeom prst="rect">
+            <a:avLst/>
+          </a:prstGeom>
+          <a:noFill/>
+          <a:ln/>
+        </p:spPr>
+        <p:txBody>
+          <a:bodyPr wrap="square" lIns="0" tIns="0" rIns="0" bIns="0" rtlCol="0" anchor="t"/>
+          <a:lstStyle/>
+          <a:p>
+            <a:pPr algn="ctr" indent="0" marL="0">
+              <a:buNone/>
+            </a:pPr>
+            <a:r>
+              <a:rPr lang="en-US" sz="1000" i="1" dirty="0">
+                <a:solidFill>
+                  <a:srgbClr val="64748B"/>
+                </a:solidFill>
+                <a:latin typeface="Calibri" pitchFamily="34" charset="0"/>
+                <a:ea typeface="Calibri" pitchFamily="34" charset="-122"/>
+                <a:cs typeface="Calibri" pitchFamily="34" charset="-120"/>
+              </a:rPr>
+              <a:t>from 16 organisations</a:t>
+            </a:r>
+            <a:endParaRPr lang="en-US" sz="1000" dirty="0"/>
+          </a:p>
+        </p:txBody>
+      </p:sp>
+      <p:sp>
+        <p:nvSpPr>
+          <p:cNvPr id="12" name="Shape 10"/>
+          <p:cNvSpPr/>
+          <p:nvPr/>
+        </p:nvSpPr>
+        <p:spPr>
+          <a:xfrm>
+            <a:off x="3474720" y="2286000"/>
+            <a:ext cx="2651760" cy="1828800"/>
+          </a:xfrm>
+          <a:prstGeom prst="rect">
+            <a:avLst/>
+          </a:prstGeom>
+          <a:solidFill>
+            <a:srgbClr val="FFFFFF"/>
+          </a:solidFill>
+          <a:ln w="12700">
+            <a:solidFill>
+              <a:srgbClr val="E2E8F0"/>
+            </a:solidFill>
+            <a:prstDash val="solid"/>
+          </a:ln>
+          <a:effectLst>
+            <a:outerShdw sx="100000" sy="100000" kx="0" ky="0" algn="bl" rotWithShape="0" blurRad="152400" dist="38100" dir="5400000">
+              <a:srgbClr val="0F172A">
+                <a:alpha val="6000"/>
+              </a:srgbClr>
+            </a:outerShdw>
+          </a:effectLst>
+        </p:spPr>
+      </p:sp>
+      <p:sp>
+        <p:nvSpPr>
+          <p:cNvPr id="13" name="Shape 11"/>
+          <p:cNvSpPr/>
+          <p:nvPr/>
+        </p:nvSpPr>
+        <p:spPr>
+          <a:xfrm>
+            <a:off x="3474720" y="2286000"/>
+            <a:ext cx="2651760" cy="73152"/>
+          </a:xfrm>
+          <a:prstGeom prst="rect">
+            <a:avLst/>
+          </a:prstGeom>
+          <a:solidFill>
+            <a:srgbClr val="0D9488"/>
+          </a:solidFill>
+          <a:ln/>
+        </p:spPr>
+      </p:sp>
+      <p:sp>
+        <p:nvSpPr>
+          <p:cNvPr id="14" name="Text 12"/>
+          <p:cNvSpPr/>
+          <p:nvPr/>
+        </p:nvSpPr>
+        <p:spPr>
+          <a:xfrm>
+            <a:off x="3474720" y="2468880"/>
+            <a:ext cx="2651760" cy="868680"/>
           </a:xfrm>
           <a:prstGeom prst="rect">
             <a:avLst/>
@@ -2866,7 +2825,7 @@
               <a:buNone/>
             </a:pPr>
             <a:r>
-              <a:rPr lang="en-US" sz="6000" b="1" dirty="0">
+              <a:rPr lang="en-US" sz="4400" b="1" dirty="0">
                 <a:solidFill>
                   <a:srgbClr val="0D9488"/>
                 </a:solidFill>
@@ -2874,125 +2833,438 @@
                 <a:ea typeface="Georgia" pitchFamily="34" charset="-122"/>
                 <a:cs typeface="Georgia" pitchFamily="34" charset="-120"/>
               </a:rPr>
-              <a:t>→</a:t>
-            </a:r>
-            <a:endParaRPr lang="en-US" sz="6000" dirty="0"/>
-          </a:p>
-        </p:txBody>
-      </p:sp>
-      <p:sp>
-        <p:nvSpPr>
-          <p:cNvPr id="13" name="Shape 11"/>
-          <p:cNvSpPr/>
-          <p:nvPr/>
-        </p:nvSpPr>
-        <p:spPr>
-          <a:xfrm>
-            <a:off x="6583680" y="2194560"/>
-            <a:ext cx="5212080" cy="3291840"/>
+              <a:t>6</a:t>
+            </a:r>
+            <a:endParaRPr lang="en-US" sz="4400" dirty="0"/>
+          </a:p>
+        </p:txBody>
+      </p:sp>
+      <p:sp>
+        <p:nvSpPr>
+          <p:cNvPr id="15" name="Text 13"/>
+          <p:cNvSpPr/>
+          <p:nvPr/>
+        </p:nvSpPr>
+        <p:spPr>
+          <a:xfrm>
+            <a:off x="3474720" y="3337560"/>
+            <a:ext cx="2651760" cy="320040"/>
+          </a:xfrm>
+          <a:prstGeom prst="rect">
+            <a:avLst/>
+          </a:prstGeom>
+          <a:noFill/>
+          <a:ln/>
+        </p:spPr>
+        <p:txBody>
+          <a:bodyPr wrap="square" lIns="0" tIns="0" rIns="0" bIns="0" rtlCol="0" anchor="t"/>
+          <a:lstStyle/>
+          <a:p>
+            <a:pPr algn="ctr" indent="0" marL="0">
+              <a:buNone/>
+            </a:pPr>
+            <a:r>
+              <a:rPr lang="en-US" sz="1300" b="1" dirty="0">
+                <a:solidFill>
+                  <a:srgbClr val="1E293B"/>
+                </a:solidFill>
+                <a:latin typeface="Calibri" pitchFamily="34" charset="0"/>
+                <a:ea typeface="Calibri" pitchFamily="34" charset="-122"/>
+                <a:cs typeface="Calibri" pitchFamily="34" charset="-120"/>
+              </a:rPr>
+              <a:t>continents</a:t>
+            </a:r>
+            <a:endParaRPr lang="en-US" sz="1300" dirty="0"/>
+          </a:p>
+        </p:txBody>
+      </p:sp>
+      <p:sp>
+        <p:nvSpPr>
+          <p:cNvPr id="16" name="Text 14"/>
+          <p:cNvSpPr/>
+          <p:nvPr/>
+        </p:nvSpPr>
+        <p:spPr>
+          <a:xfrm>
+            <a:off x="3474720" y="3657600"/>
+            <a:ext cx="2651760" cy="365760"/>
+          </a:xfrm>
+          <a:prstGeom prst="rect">
+            <a:avLst/>
+          </a:prstGeom>
+          <a:noFill/>
+          <a:ln/>
+        </p:spPr>
+        <p:txBody>
+          <a:bodyPr wrap="square" lIns="0" tIns="0" rIns="0" bIns="0" rtlCol="0" anchor="t"/>
+          <a:lstStyle/>
+          <a:p>
+            <a:pPr algn="ctr" indent="0" marL="0">
+              <a:buNone/>
+            </a:pPr>
+            <a:r>
+              <a:rPr lang="en-US" sz="1000" i="1" dirty="0">
+                <a:solidFill>
+                  <a:srgbClr val="64748B"/>
+                </a:solidFill>
+                <a:latin typeface="Calibri" pitchFamily="34" charset="0"/>
+                <a:ea typeface="Calibri" pitchFamily="34" charset="-122"/>
+                <a:cs typeface="Calibri" pitchFamily="34" charset="-120"/>
+              </a:rPr>
+              <a:t>Pan-African, EU, US, JP, AR, AU</a:t>
+            </a:r>
+            <a:endParaRPr lang="en-US" sz="1000" dirty="0"/>
+          </a:p>
+        </p:txBody>
+      </p:sp>
+      <p:sp>
+        <p:nvSpPr>
+          <p:cNvPr id="17" name="Shape 15"/>
+          <p:cNvSpPr/>
+          <p:nvPr/>
+        </p:nvSpPr>
+        <p:spPr>
+          <a:xfrm>
+            <a:off x="6309360" y="2286000"/>
+            <a:ext cx="2651760" cy="1828800"/>
           </a:xfrm>
           <a:prstGeom prst="rect">
             <a:avLst/>
           </a:prstGeom>
           <a:solidFill>
-            <a:srgbClr val="D1FAE5"/>
+            <a:srgbClr val="FFFFFF"/>
           </a:solidFill>
-          <a:ln w="19050">
+          <a:ln w="12700">
             <a:solidFill>
-              <a:srgbClr val="10B981"/>
+              <a:srgbClr val="E2E8F0"/>
             </a:solidFill>
             <a:prstDash val="solid"/>
           </a:ln>
-        </p:spPr>
-      </p:sp>
-      <p:sp>
-        <p:nvSpPr>
-          <p:cNvPr id="14" name="Text 12"/>
-          <p:cNvSpPr/>
-          <p:nvPr/>
-        </p:nvSpPr>
-        <p:spPr>
-          <a:xfrm>
-            <a:off x="6812280" y="2331720"/>
-            <a:ext cx="4754880" cy="320040"/>
-          </a:xfrm>
-          <a:prstGeom prst="rect">
-            <a:avLst/>
-          </a:prstGeom>
-          <a:noFill/>
-          <a:ln/>
-        </p:spPr>
-        <p:txBody>
-          <a:bodyPr wrap="square" lIns="0" tIns="0" rIns="0" bIns="0" rtlCol="0" anchor="t"/>
-          <a:lstStyle/>
-          <a:p>
-            <a:pPr algn="l" indent="0" marL="0">
-              <a:buNone/>
-            </a:pPr>
-            <a:r>
-              <a:rPr lang="en-US" sz="1100" b="1" spc="400" kern="0" dirty="0">
-                <a:solidFill>
-                  <a:srgbClr val="065F46"/>
-                </a:solidFill>
-                <a:latin typeface="Calibri" pitchFamily="34" charset="0"/>
-                <a:ea typeface="Calibri" pitchFamily="34" charset="-122"/>
-                <a:cs typeface="Calibri" pitchFamily="34" charset="-120"/>
-              </a:rPr>
-              <a:t>CORRECTED  (n = 37, GraphQL triangulation)</a:t>
-            </a:r>
-            <a:endParaRPr lang="en-US" sz="1100" dirty="0"/>
-          </a:p>
-        </p:txBody>
-      </p:sp>
-      <p:sp>
-        <p:nvSpPr>
-          <p:cNvPr id="15" name="Text 13"/>
-          <p:cNvSpPr/>
-          <p:nvPr/>
-        </p:nvSpPr>
-        <p:spPr>
-          <a:xfrm>
-            <a:off x="6812280" y="2697480"/>
-            <a:ext cx="4754880" cy="914400"/>
-          </a:xfrm>
-          <a:prstGeom prst="rect">
-            <a:avLst/>
-          </a:prstGeom>
-          <a:noFill/>
-          <a:ln/>
-        </p:spPr>
-        <p:txBody>
-          <a:bodyPr wrap="square" lIns="0" tIns="0" rIns="0" bIns="0" rtlCol="0" anchor="t"/>
-          <a:lstStyle/>
-          <a:p>
-            <a:pPr algn="l" indent="0" marL="0">
-              <a:buNone/>
-            </a:pPr>
-            <a:r>
-              <a:rPr lang="en-US" sz="5600" b="1" dirty="0">
-                <a:solidFill>
-                  <a:srgbClr val="047857"/>
+          <a:effectLst>
+            <a:outerShdw sx="100000" sy="100000" kx="0" ky="0" algn="bl" rotWithShape="0" blurRad="152400" dist="38100" dir="5400000">
+              <a:srgbClr val="0F172A">
+                <a:alpha val="6000"/>
+              </a:srgbClr>
+            </a:outerShdw>
+          </a:effectLst>
+        </p:spPr>
+      </p:sp>
+      <p:sp>
+        <p:nvSpPr>
+          <p:cNvPr id="18" name="Shape 16"/>
+          <p:cNvSpPr/>
+          <p:nvPr/>
+        </p:nvSpPr>
+        <p:spPr>
+          <a:xfrm>
+            <a:off x="6309360" y="2286000"/>
+            <a:ext cx="2651760" cy="73152"/>
+          </a:xfrm>
+          <a:prstGeom prst="rect">
+            <a:avLst/>
+          </a:prstGeom>
+          <a:solidFill>
+            <a:srgbClr val="0D9488"/>
+          </a:solidFill>
+          <a:ln/>
+        </p:spPr>
+      </p:sp>
+      <p:sp>
+        <p:nvSpPr>
+          <p:cNvPr id="19" name="Text 17"/>
+          <p:cNvSpPr/>
+          <p:nvPr/>
+        </p:nvSpPr>
+        <p:spPr>
+          <a:xfrm>
+            <a:off x="6309360" y="2468880"/>
+            <a:ext cx="2651760" cy="868680"/>
+          </a:xfrm>
+          <a:prstGeom prst="rect">
+            <a:avLst/>
+          </a:prstGeom>
+          <a:noFill/>
+          <a:ln/>
+        </p:spPr>
+        <p:txBody>
+          <a:bodyPr wrap="square" lIns="0" tIns="0" rIns="0" bIns="0" rtlCol="0" anchor="ctr"/>
+          <a:lstStyle/>
+          <a:p>
+            <a:pPr algn="ctr" indent="0" marL="0">
+              <a:buNone/>
+            </a:pPr>
+            <a:r>
+              <a:rPr lang="en-US" sz="4400" b="1" dirty="0">
+                <a:solidFill>
+                  <a:srgbClr val="0D9488"/>
                 </a:solidFill>
                 <a:latin typeface="Georgia" pitchFamily="34" charset="0"/>
                 <a:ea typeface="Georgia" pitchFamily="34" charset="-122"/>
                 <a:cs typeface="Georgia" pitchFamily="34" charset="-120"/>
               </a:rPr>
-              <a:t>ρ = 0.444</a:t>
-            </a:r>
-            <a:endParaRPr lang="en-US" sz="5600" dirty="0"/>
-          </a:p>
-        </p:txBody>
-      </p:sp>
-      <p:sp>
-        <p:nvSpPr>
-          <p:cNvPr id="16" name="Text 14"/>
-          <p:cNvSpPr/>
-          <p:nvPr/>
-        </p:nvSpPr>
-        <p:spPr>
-          <a:xfrm>
-            <a:off x="6812280" y="3703320"/>
-            <a:ext cx="4754880" cy="365760"/>
+              <a:t>15</a:t>
+            </a:r>
+            <a:endParaRPr lang="en-US" sz="4400" dirty="0"/>
+          </a:p>
+        </p:txBody>
+      </p:sp>
+      <p:sp>
+        <p:nvSpPr>
+          <p:cNvPr id="20" name="Text 18"/>
+          <p:cNvSpPr/>
+          <p:nvPr/>
+        </p:nvSpPr>
+        <p:spPr>
+          <a:xfrm>
+            <a:off x="6309360" y="3337560"/>
+            <a:ext cx="2651760" cy="320040"/>
+          </a:xfrm>
+          <a:prstGeom prst="rect">
+            <a:avLst/>
+          </a:prstGeom>
+          <a:noFill/>
+          <a:ln/>
+        </p:spPr>
+        <p:txBody>
+          <a:bodyPr wrap="square" lIns="0" tIns="0" rIns="0" bIns="0" rtlCol="0" anchor="t"/>
+          <a:lstStyle/>
+          <a:p>
+            <a:pPr algn="ctr" indent="0" marL="0">
+              <a:buNone/>
+            </a:pPr>
+            <a:r>
+              <a:rPr lang="en-US" sz="1300" b="1" dirty="0">
+                <a:solidFill>
+                  <a:srgbClr val="1E293B"/>
+                </a:solidFill>
+                <a:latin typeface="Calibri" pitchFamily="34" charset="0"/>
+                <a:ea typeface="Calibri" pitchFamily="34" charset="-122"/>
+                <a:cs typeface="Calibri" pitchFamily="34" charset="-120"/>
+              </a:rPr>
+              <a:t>years of history</a:t>
+            </a:r>
+            <a:endParaRPr lang="en-US" sz="1300" dirty="0"/>
+          </a:p>
+        </p:txBody>
+      </p:sp>
+      <p:sp>
+        <p:nvSpPr>
+          <p:cNvPr id="21" name="Text 19"/>
+          <p:cNvSpPr/>
+          <p:nvPr/>
+        </p:nvSpPr>
+        <p:spPr>
+          <a:xfrm>
+            <a:off x="6309360" y="3657600"/>
+            <a:ext cx="2651760" cy="365760"/>
+          </a:xfrm>
+          <a:prstGeom prst="rect">
+            <a:avLst/>
+          </a:prstGeom>
+          <a:noFill/>
+          <a:ln/>
+        </p:spPr>
+        <p:txBody>
+          <a:bodyPr wrap="square" lIns="0" tIns="0" rIns="0" bIns="0" rtlCol="0" anchor="t"/>
+          <a:lstStyle/>
+          <a:p>
+            <a:pPr algn="ctr" indent="0" marL="0">
+              <a:buNone/>
+            </a:pPr>
+            <a:r>
+              <a:rPr lang="en-US" sz="1000" i="1" dirty="0">
+                <a:solidFill>
+                  <a:srgbClr val="64748B"/>
+                </a:solidFill>
+                <a:latin typeface="Calibri" pitchFamily="34" charset="0"/>
+                <a:ea typeface="Calibri" pitchFamily="34" charset="-122"/>
+                <a:cs typeface="Calibri" pitchFamily="34" charset="-120"/>
+              </a:rPr>
+              <a:t>earliest commit 2011-04</a:t>
+            </a:r>
+            <a:endParaRPr lang="en-US" sz="1000" dirty="0"/>
+          </a:p>
+        </p:txBody>
+      </p:sp>
+      <p:sp>
+        <p:nvSpPr>
+          <p:cNvPr id="22" name="Shape 20"/>
+          <p:cNvSpPr/>
+          <p:nvPr/>
+        </p:nvSpPr>
+        <p:spPr>
+          <a:xfrm>
+            <a:off x="9144000" y="2286000"/>
+            <a:ext cx="2651760" cy="1828800"/>
+          </a:xfrm>
+          <a:prstGeom prst="rect">
+            <a:avLst/>
+          </a:prstGeom>
+          <a:solidFill>
+            <a:srgbClr val="FFFFFF"/>
+          </a:solidFill>
+          <a:ln w="12700">
+            <a:solidFill>
+              <a:srgbClr val="E2E8F0"/>
+            </a:solidFill>
+            <a:prstDash val="solid"/>
+          </a:ln>
+          <a:effectLst>
+            <a:outerShdw sx="100000" sy="100000" kx="0" ky="0" algn="bl" rotWithShape="0" blurRad="152400" dist="38100" dir="5400000">
+              <a:srgbClr val="0F172A">
+                <a:alpha val="6000"/>
+              </a:srgbClr>
+            </a:outerShdw>
+          </a:effectLst>
+        </p:spPr>
+      </p:sp>
+      <p:sp>
+        <p:nvSpPr>
+          <p:cNvPr id="23" name="Shape 21"/>
+          <p:cNvSpPr/>
+          <p:nvPr/>
+        </p:nvSpPr>
+        <p:spPr>
+          <a:xfrm>
+            <a:off x="9144000" y="2286000"/>
+            <a:ext cx="2651760" cy="73152"/>
+          </a:xfrm>
+          <a:prstGeom prst="rect">
+            <a:avLst/>
+          </a:prstGeom>
+          <a:solidFill>
+            <a:srgbClr val="0D9488"/>
+          </a:solidFill>
+          <a:ln/>
+        </p:spPr>
+      </p:sp>
+      <p:sp>
+        <p:nvSpPr>
+          <p:cNvPr id="24" name="Text 22"/>
+          <p:cNvSpPr/>
+          <p:nvPr/>
+        </p:nvSpPr>
+        <p:spPr>
+          <a:xfrm>
+            <a:off x="9144000" y="2468880"/>
+            <a:ext cx="2651760" cy="868680"/>
+          </a:xfrm>
+          <a:prstGeom prst="rect">
+            <a:avLst/>
+          </a:prstGeom>
+          <a:noFill/>
+          <a:ln/>
+        </p:spPr>
+        <p:txBody>
+          <a:bodyPr wrap="square" lIns="0" tIns="0" rIns="0" bIns="0" rtlCol="0" anchor="ctr"/>
+          <a:lstStyle/>
+          <a:p>
+            <a:pPr algn="ctr" indent="0" marL="0">
+              <a:buNone/>
+            </a:pPr>
+            <a:r>
+              <a:rPr lang="en-US" sz="4400" b="1" dirty="0">
+                <a:solidFill>
+                  <a:srgbClr val="0D9488"/>
+                </a:solidFill>
+                <a:latin typeface="Georgia" pitchFamily="34" charset="0"/>
+                <a:ea typeface="Georgia" pitchFamily="34" charset="-122"/>
+                <a:cs typeface="Georgia" pitchFamily="34" charset="-120"/>
+              </a:rPr>
+              <a:t>2,506</a:t>
+            </a:r>
+            <a:endParaRPr lang="en-US" sz="4400" dirty="0"/>
+          </a:p>
+        </p:txBody>
+      </p:sp>
+      <p:sp>
+        <p:nvSpPr>
+          <p:cNvPr id="25" name="Text 23"/>
+          <p:cNvSpPr/>
+          <p:nvPr/>
+        </p:nvSpPr>
+        <p:spPr>
+          <a:xfrm>
+            <a:off x="9144000" y="3337560"/>
+            <a:ext cx="2651760" cy="320040"/>
+          </a:xfrm>
+          <a:prstGeom prst="rect">
+            <a:avLst/>
+          </a:prstGeom>
+          <a:noFill/>
+          <a:ln/>
+        </p:spPr>
+        <p:txBody>
+          <a:bodyPr wrap="square" lIns="0" tIns="0" rIns="0" bIns="0" rtlCol="0" anchor="t"/>
+          <a:lstStyle/>
+          <a:p>
+            <a:pPr algn="ctr" indent="0" marL="0">
+              <a:buNone/>
+            </a:pPr>
+            <a:r>
+              <a:rPr lang="en-US" sz="1300" b="1" dirty="0">
+                <a:solidFill>
+                  <a:srgbClr val="1E293B"/>
+                </a:solidFill>
+                <a:latin typeface="Calibri" pitchFamily="34" charset="0"/>
+                <a:ea typeface="Calibri" pitchFamily="34" charset="-122"/>
+                <a:cs typeface="Calibri" pitchFamily="34" charset="-120"/>
+              </a:rPr>
+              <a:t>contributor records</a:t>
+            </a:r>
+            <a:endParaRPr lang="en-US" sz="1300" dirty="0"/>
+          </a:p>
+        </p:txBody>
+      </p:sp>
+      <p:sp>
+        <p:nvSpPr>
+          <p:cNvPr id="26" name="Text 24"/>
+          <p:cNvSpPr/>
+          <p:nvPr/>
+        </p:nvSpPr>
+        <p:spPr>
+          <a:xfrm>
+            <a:off x="9144000" y="3657600"/>
+            <a:ext cx="2651760" cy="365760"/>
+          </a:xfrm>
+          <a:prstGeom prst="rect">
+            <a:avLst/>
+          </a:prstGeom>
+          <a:noFill/>
+          <a:ln/>
+        </p:spPr>
+        <p:txBody>
+          <a:bodyPr wrap="square" lIns="0" tIns="0" rIns="0" bIns="0" rtlCol="0" anchor="t"/>
+          <a:lstStyle/>
+          <a:p>
+            <a:pPr algn="ctr" indent="0" marL="0">
+              <a:buNone/>
+            </a:pPr>
+            <a:r>
+              <a:rPr lang="en-US" sz="1000" i="1" dirty="0">
+                <a:solidFill>
+                  <a:srgbClr val="64748B"/>
+                </a:solidFill>
+                <a:latin typeface="Calibri" pitchFamily="34" charset="0"/>
+                <a:ea typeface="Calibri" pitchFamily="34" charset="-122"/>
+                <a:cs typeface="Calibri" pitchFamily="34" charset="-120"/>
+              </a:rPr>
+              <a:t>22,486 contributor-weeks</a:t>
+            </a:r>
+            <a:endParaRPr lang="en-US" sz="1000" dirty="0"/>
+          </a:p>
+        </p:txBody>
+      </p:sp>
+      <p:sp>
+        <p:nvSpPr>
+          <p:cNvPr id="27" name="Text 25"/>
+          <p:cNvSpPr/>
+          <p:nvPr/>
+        </p:nvSpPr>
+        <p:spPr>
+          <a:xfrm>
+            <a:off x="640080" y="4526280"/>
+            <a:ext cx="10881360" cy="274320"/>
           </a:xfrm>
           <a:prstGeom prst="rect">
             <a:avLst/>
@@ -3008,15 +3280,68 @@
               <a:buNone/>
             </a:pPr>
             <a:r>
+              <a:rPr lang="en-US" sz="1000" b="1" spc="400" kern="0" dirty="0">
+                <a:solidFill>
+                  <a:srgbClr val="0D9488"/>
+                </a:solidFill>
+                <a:latin typeface="Calibri" pitchFamily="34" charset="0"/>
+                <a:ea typeface="Calibri" pitchFamily="34" charset="-122"/>
+                <a:cs typeface="Calibri" pitchFamily="34" charset="-120"/>
+              </a:rPr>
+              <a:t>INCLUSION CRITERIA  (C1–C3, applied by two coders)</a:t>
+            </a:r>
+            <a:endParaRPr lang="en-US" sz="1000" dirty="0"/>
+          </a:p>
+        </p:txBody>
+      </p:sp>
+      <p:sp>
+        <p:nvSpPr>
+          <p:cNvPr id="28" name="Text 26"/>
+          <p:cNvSpPr/>
+          <p:nvPr/>
+        </p:nvSpPr>
+        <p:spPr>
+          <a:xfrm>
+            <a:off x="640080" y="4846320"/>
+            <a:ext cx="3657600" cy="365760"/>
+          </a:xfrm>
+          <a:prstGeom prst="rect">
+            <a:avLst/>
+          </a:prstGeom>
+          <a:noFill/>
+          <a:ln/>
+        </p:spPr>
+        <p:txBody>
+          <a:bodyPr wrap="square" lIns="0" tIns="0" rIns="0" bIns="0" rtlCol="0" anchor="t"/>
+          <a:lstStyle/>
+          <a:p>
+            <a:pPr algn="l" indent="0" marL="0">
+              <a:buNone/>
+            </a:pPr>
+            <a:r>
               <a:rPr lang="en-US" sz="1400" b="1" dirty="0">
                 <a:solidFill>
-                  <a:srgbClr val="065F46"/>
-                </a:solidFill>
-                <a:latin typeface="Calibri" pitchFamily="34" charset="0"/>
-                <a:ea typeface="Calibri" pitchFamily="34" charset="-122"/>
-                <a:cs typeface="Calibri" pitchFamily="34" charset="-120"/>
-              </a:rPr>
-              <a:t>not FDR-significant; n = 26 pairs</a:t>
+                  <a:srgbClr val="F59E0B"/>
+                </a:solidFill>
+                <a:latin typeface="Georgia" pitchFamily="34" charset="0"/>
+                <a:ea typeface="Georgia" pitchFamily="34" charset="-122"/>
+                <a:cs typeface="Georgia" pitchFamily="34" charset="-120"/>
+              </a:rPr>
+              <a:t>C1   </a:t>
+            </a:r>
+            <a:pPr algn="l" indent="0" marL="0">
+              <a:buNone/>
+            </a:pPr>
+            <a:r>
+              <a:rPr lang="en-US" sz="1400" b="1" dirty="0">
+                <a:solidFill>
+                  <a:srgbClr val="1E293B"/>
+                </a:solidFill>
+                <a:latin typeface="Georgia" pitchFamily="34" charset="0"/>
+                <a:ea typeface="Georgia" pitchFamily="34" charset="-122"/>
+                <a:cs typeface="Georgia" pitchFamily="34" charset="-120"/>
+              </a:rPr>
+              <a:t>Public-interest design intent</a:t>
             </a:r>
             <a:endParaRPr lang="en-US" sz="1400" dirty="0"/>
           </a:p>
@@ -3024,14 +3349,14 @@
       </p:sp>
       <p:sp>
         <p:nvSpPr>
-          <p:cNvPr id="17" name="Text 15"/>
-          <p:cNvSpPr/>
-          <p:nvPr/>
-        </p:nvSpPr>
-        <p:spPr>
-          <a:xfrm>
-            <a:off x="6812280" y="4160520"/>
-            <a:ext cx="4754880" cy="1188720"/>
+          <p:cNvPr id="29" name="Text 27"/>
+          <p:cNvSpPr/>
+          <p:nvPr/>
+        </p:nvSpPr>
+        <p:spPr>
+          <a:xfrm>
+            <a:off x="640080" y="5212080"/>
+            <a:ext cx="3657600" cy="640080"/>
           </a:xfrm>
           <a:prstGeom prst="rect">
             <a:avLst/>
@@ -3047,30 +3372,214 @@
               <a:buNone/>
             </a:pPr>
             <a:r>
-              <a:rPr lang="en-US" sz="1200" i="1" dirty="0">
-                <a:solidFill>
-                  <a:srgbClr val="065F46"/>
-                </a:solidFill>
-                <a:latin typeface="Calibri" pitchFamily="34" charset="0"/>
-                <a:ea typeface="Calibri" pitchFamily="34" charset="-122"/>
-                <a:cs typeface="Calibri" pitchFamily="34" charset="-120"/>
-              </a:rPr>
-              <a:t>Coverage 17/29 → 37/37 on burstiness via GraphQL bulk fetch.</a:t>
-            </a:r>
-            <a:endParaRPr lang="en-US" sz="1200" dirty="0"/>
-          </a:p>
-        </p:txBody>
-      </p:sp>
-      <p:sp>
-        <p:nvSpPr>
-          <p:cNvPr id="18" name="Shape 16"/>
-          <p:cNvSpPr/>
-          <p:nvPr/>
-        </p:nvSpPr>
-        <p:spPr>
-          <a:xfrm>
-            <a:off x="640080" y="5852160"/>
-            <a:ext cx="10881360" cy="640080"/>
+              <a:rPr lang="en-US" sz="1100" dirty="0">
+                <a:solidFill>
+                  <a:srgbClr val="64748B"/>
+                </a:solidFill>
+                <a:latin typeface="Calibri" pitchFamily="34" charset="0"/>
+                <a:ea typeface="Calibri" pitchFamily="34" charset="-122"/>
+                <a:cs typeface="Calibri" pitchFamily="34" charset="-120"/>
+              </a:rPr>
+              <a:t>Civic mission at project inception, not incidental use</a:t>
+            </a:r>
+            <a:endParaRPr lang="en-US" sz="1100" dirty="0"/>
+          </a:p>
+        </p:txBody>
+      </p:sp>
+      <p:sp>
+        <p:nvSpPr>
+          <p:cNvPr id="30" name="Text 28"/>
+          <p:cNvSpPr/>
+          <p:nvPr/>
+        </p:nvSpPr>
+        <p:spPr>
+          <a:xfrm>
+            <a:off x="4480560" y="4846320"/>
+            <a:ext cx="3657600" cy="365760"/>
+          </a:xfrm>
+          <a:prstGeom prst="rect">
+            <a:avLst/>
+          </a:prstGeom>
+          <a:noFill/>
+          <a:ln/>
+        </p:spPr>
+        <p:txBody>
+          <a:bodyPr wrap="square" lIns="0" tIns="0" rIns="0" bIns="0" rtlCol="0" anchor="t"/>
+          <a:lstStyle/>
+          <a:p>
+            <a:pPr algn="l" indent="0" marL="0">
+              <a:buNone/>
+            </a:pPr>
+            <a:r>
+              <a:rPr lang="en-US" sz="1400" b="1" dirty="0">
+                <a:solidFill>
+                  <a:srgbClr val="F59E0B"/>
+                </a:solidFill>
+                <a:latin typeface="Georgia" pitchFamily="34" charset="0"/>
+                <a:ea typeface="Georgia" pitchFamily="34" charset="-122"/>
+                <a:cs typeface="Georgia" pitchFamily="34" charset="-120"/>
+              </a:rPr>
+              <a:t>C2   </a:t>
+            </a:r>
+            <a:pPr algn="l" indent="0" marL="0">
+              <a:buNone/>
+            </a:pPr>
+            <a:r>
+              <a:rPr lang="en-US" sz="1400" b="1" dirty="0">
+                <a:solidFill>
+                  <a:srgbClr val="1E293B"/>
+                </a:solidFill>
+                <a:latin typeface="Georgia" pitchFamily="34" charset="0"/>
+                <a:ea typeface="Georgia" pitchFamily="34" charset="-122"/>
+                <a:cs typeface="Georgia" pitchFamily="34" charset="-120"/>
+              </a:rPr>
+              <a:t>Public-interest steward</a:t>
+            </a:r>
+            <a:endParaRPr lang="en-US" sz="1400" dirty="0"/>
+          </a:p>
+        </p:txBody>
+      </p:sp>
+      <p:sp>
+        <p:nvSpPr>
+          <p:cNvPr id="31" name="Text 29"/>
+          <p:cNvSpPr/>
+          <p:nvPr/>
+        </p:nvSpPr>
+        <p:spPr>
+          <a:xfrm>
+            <a:off x="4480560" y="5212080"/>
+            <a:ext cx="3657600" cy="640080"/>
+          </a:xfrm>
+          <a:prstGeom prst="rect">
+            <a:avLst/>
+          </a:prstGeom>
+          <a:noFill/>
+          <a:ln/>
+        </p:spPr>
+        <p:txBody>
+          <a:bodyPr wrap="square" lIns="0" tIns="0" rIns="0" bIns="0" rtlCol="0" anchor="t"/>
+          <a:lstStyle/>
+          <a:p>
+            <a:pPr algn="l" indent="0" marL="0">
+              <a:buNone/>
+            </a:pPr>
+            <a:r>
+              <a:rPr lang="en-US" sz="1100" dirty="0">
+                <a:solidFill>
+                  <a:srgbClr val="64748B"/>
+                </a:solidFill>
+                <a:latin typeface="Calibri" pitchFamily="34" charset="0"/>
+                <a:ea typeface="Calibri" pitchFamily="34" charset="-122"/>
+                <a:cs typeface="Calibri" pitchFamily="34" charset="-120"/>
+              </a:rPr>
+              <a:t>Non-profit, government, academic, or civic collective</a:t>
+            </a:r>
+            <a:endParaRPr lang="en-US" sz="1100" dirty="0"/>
+          </a:p>
+        </p:txBody>
+      </p:sp>
+      <p:sp>
+        <p:nvSpPr>
+          <p:cNvPr id="32" name="Text 30"/>
+          <p:cNvSpPr/>
+          <p:nvPr/>
+        </p:nvSpPr>
+        <p:spPr>
+          <a:xfrm>
+            <a:off x="8321040" y="4846320"/>
+            <a:ext cx="3657600" cy="365760"/>
+          </a:xfrm>
+          <a:prstGeom prst="rect">
+            <a:avLst/>
+          </a:prstGeom>
+          <a:noFill/>
+          <a:ln/>
+        </p:spPr>
+        <p:txBody>
+          <a:bodyPr wrap="square" lIns="0" tIns="0" rIns="0" bIns="0" rtlCol="0" anchor="t"/>
+          <a:lstStyle/>
+          <a:p>
+            <a:pPr algn="l" indent="0" marL="0">
+              <a:buNone/>
+            </a:pPr>
+            <a:r>
+              <a:rPr lang="en-US" sz="1400" b="1" dirty="0">
+                <a:solidFill>
+                  <a:srgbClr val="F59E0B"/>
+                </a:solidFill>
+                <a:latin typeface="Georgia" pitchFamily="34" charset="0"/>
+                <a:ea typeface="Georgia" pitchFamily="34" charset="-122"/>
+                <a:cs typeface="Georgia" pitchFamily="34" charset="-120"/>
+              </a:rPr>
+              <a:t>C3   </a:t>
+            </a:r>
+            <a:pPr algn="l" indent="0" marL="0">
+              <a:buNone/>
+            </a:pPr>
+            <a:r>
+              <a:rPr lang="en-US" sz="1400" b="1" dirty="0">
+                <a:solidFill>
+                  <a:srgbClr val="1E293B"/>
+                </a:solidFill>
+                <a:latin typeface="Georgia" pitchFamily="34" charset="0"/>
+                <a:ea typeface="Georgia" pitchFamily="34" charset="-122"/>
+                <a:cs typeface="Georgia" pitchFamily="34" charset="-120"/>
+              </a:rPr>
+              <a:t>Open development</a:t>
+            </a:r>
+            <a:endParaRPr lang="en-US" sz="1400" dirty="0"/>
+          </a:p>
+        </p:txBody>
+      </p:sp>
+      <p:sp>
+        <p:nvSpPr>
+          <p:cNvPr id="33" name="Text 31"/>
+          <p:cNvSpPr/>
+          <p:nvPr/>
+        </p:nvSpPr>
+        <p:spPr>
+          <a:xfrm>
+            <a:off x="8321040" y="5212080"/>
+            <a:ext cx="3657600" cy="640080"/>
+          </a:xfrm>
+          <a:prstGeom prst="rect">
+            <a:avLst/>
+          </a:prstGeom>
+          <a:noFill/>
+          <a:ln/>
+        </p:spPr>
+        <p:txBody>
+          <a:bodyPr wrap="square" lIns="0" tIns="0" rIns="0" bIns="0" rtlCol="0" anchor="t"/>
+          <a:lstStyle/>
+          <a:p>
+            <a:pPr algn="l" indent="0" marL="0">
+              <a:buNone/>
+            </a:pPr>
+            <a:r>
+              <a:rPr lang="en-US" sz="1100" dirty="0">
+                <a:solidFill>
+                  <a:srgbClr val="64748B"/>
+                </a:solidFill>
+                <a:latin typeface="Calibri" pitchFamily="34" charset="0"/>
+                <a:ea typeface="Calibri" pitchFamily="34" charset="-122"/>
+                <a:cs typeface="Calibri" pitchFamily="34" charset="-120"/>
+              </a:rPr>
+              <a:t>Public Git forge with public commit history</a:t>
+            </a:r>
+            <a:endParaRPr lang="en-US" sz="1100" dirty="0"/>
+          </a:p>
+        </p:txBody>
+      </p:sp>
+      <p:sp>
+        <p:nvSpPr>
+          <p:cNvPr id="34" name="Shape 32"/>
+          <p:cNvSpPr/>
+          <p:nvPr/>
+        </p:nvSpPr>
+        <p:spPr>
+          <a:xfrm>
+            <a:off x="640080" y="5989320"/>
+            <a:ext cx="10881360" cy="548640"/>
           </a:xfrm>
           <a:prstGeom prst="rect">
             <a:avLst/>
@@ -3083,14 +3592,14 @@
       </p:sp>
       <p:sp>
         <p:nvSpPr>
-          <p:cNvPr id="19" name="Text 17"/>
-          <p:cNvSpPr/>
-          <p:nvPr/>
-        </p:nvSpPr>
-        <p:spPr>
-          <a:xfrm>
-            <a:off x="640080" y="5852160"/>
-            <a:ext cx="10881360" cy="640080"/>
+          <p:cNvPr id="35" name="Text 33"/>
+          <p:cNvSpPr/>
+          <p:nvPr/>
+        </p:nvSpPr>
+        <p:spPr>
+          <a:xfrm>
+            <a:off x="640080" y="5989320"/>
+            <a:ext cx="10881360" cy="548640"/>
           </a:xfrm>
           <a:prstGeom prst="rect">
             <a:avLst/>
@@ -3106,17 +3615,17 @@
               <a:buNone/>
             </a:pPr>
             <a:r>
-              <a:rPr lang="en-US" sz="1700" b="1" i="1" dirty="0">
+              <a:rPr lang="en-US" sz="1400" b="1" dirty="0">
                 <a:solidFill>
                   <a:srgbClr val="FFFFFF"/>
                 </a:solidFill>
-                <a:latin typeface="Georgia" pitchFamily="34" charset="0"/>
-                <a:ea typeface="Georgia" pitchFamily="34" charset="-122"/>
-                <a:cs typeface="Georgia" pitchFamily="34" charset="-120"/>
-              </a:rPr>
-              <a:t>Same direction. Different population behind the number.</a:t>
-            </a:r>
-            <a:endParaRPr lang="en-US" sz="1700" dirty="0"/>
+                <a:latin typeface="Calibri" pitchFamily="34" charset="0"/>
+                <a:ea typeface="Calibri" pitchFamily="34" charset="-122"/>
+                <a:cs typeface="Calibri" pitchFamily="34" charset="-120"/>
+              </a:rPr>
+              <a:t>64 candidate repositories  →  21 failed C1  ·  6 failed C3  →  37 in panel</a:t>
+            </a:r>
+            <a:endParaRPr lang="en-US" sz="1400" dirty="0"/>
           </a:p>
         </p:txBody>
       </p:sp>
@@ -3205,7 +3714,7 @@
                 <a:ea typeface="Calibri" pitchFamily="34" charset="-122"/>
                 <a:cs typeface="Calibri" pitchFamily="34" charset="-120"/>
               </a:rPr>
-              <a:t>04 / 08</a:t>
+              <a:t>04 / 09</a:t>
             </a:r>
             <a:endParaRPr lang="en-US" sz="1000" dirty="0"/>
           </a:p>
@@ -3219,8 +3728,8 @@
         </p:nvSpPr>
         <p:spPr>
           <a:xfrm>
-            <a:off x="8503920" y="502920"/>
-            <a:ext cx="3383280" cy="274320"/>
+            <a:off x="7589520" y="502920"/>
+            <a:ext cx="4297680" cy="274320"/>
           </a:xfrm>
           <a:prstGeom prst="rect">
             <a:avLst/>
@@ -3244,7 +3753,7 @@
                 <a:ea typeface="Calibri" pitchFamily="34" charset="-122"/>
                 <a:cs typeface="Calibri" pitchFamily="34" charset="-120"/>
               </a:rPr>
-              <a:t>WHY IT GENERALISES</a:t>
+              <a:t>DRIVE-BY CONTRIBUTION</a:t>
             </a:r>
             <a:endParaRPr lang="en-US" sz="900" dirty="0"/>
           </a:p>
@@ -3252,14 +3761,78 @@
       </p:sp>
       <p:sp>
         <p:nvSpPr>
-          <p:cNvPr id="5" name="Text 3"/>
-          <p:cNvSpPr/>
-          <p:nvPr/>
-        </p:nvSpPr>
-        <p:spPr>
-          <a:xfrm>
-            <a:off x="640080" y="914400"/>
-            <a:ext cx="10881360" cy="548640"/>
+          <p:cNvPr id="5" name="Shape 3"/>
+          <p:cNvSpPr/>
+          <p:nvPr/>
+        </p:nvSpPr>
+        <p:spPr>
+          <a:xfrm>
+            <a:off x="640080" y="868680"/>
+            <a:ext cx="1325880" cy="411480"/>
+          </a:xfrm>
+          <a:prstGeom prst="rect">
+            <a:avLst/>
+          </a:prstGeom>
+          <a:solidFill>
+            <a:srgbClr val="FEF3C7"/>
+          </a:solidFill>
+          <a:ln w="12700">
+            <a:solidFill>
+              <a:srgbClr val="F59E0B"/>
+            </a:solidFill>
+            <a:prstDash val="solid"/>
+          </a:ln>
+        </p:spPr>
+      </p:sp>
+      <p:sp>
+        <p:nvSpPr>
+          <p:cNvPr id="6" name="Text 4"/>
+          <p:cNvSpPr/>
+          <p:nvPr/>
+        </p:nvSpPr>
+        <p:spPr>
+          <a:xfrm>
+            <a:off x="640080" y="868680"/>
+            <a:ext cx="1325880" cy="411480"/>
+          </a:xfrm>
+          <a:prstGeom prst="rect">
+            <a:avLst/>
+          </a:prstGeom>
+          <a:noFill/>
+          <a:ln/>
+        </p:spPr>
+        <p:txBody>
+          <a:bodyPr wrap="square" lIns="0" tIns="0" rIns="0" bIns="0" rtlCol="0" anchor="ctr"/>
+          <a:lstStyle/>
+          <a:p>
+            <a:pPr algn="ctr" indent="0" marL="0">
+              <a:buNone/>
+            </a:pPr>
+            <a:r>
+              <a:rPr lang="en-US" sz="1000" b="1" spc="400" kern="0" dirty="0">
+                <a:solidFill>
+                  <a:srgbClr val="92400E"/>
+                </a:solidFill>
+                <a:latin typeface="Calibri" pitchFamily="34" charset="0"/>
+                <a:ea typeface="Calibri" pitchFamily="34" charset="-122"/>
+                <a:cs typeface="Calibri" pitchFamily="34" charset="-120"/>
+              </a:rPr>
+              <a:t>CHALLENGE 01</a:t>
+            </a:r>
+            <a:endParaRPr lang="en-US" sz="1000" dirty="0"/>
+          </a:p>
+        </p:txBody>
+      </p:sp>
+      <p:sp>
+        <p:nvSpPr>
+          <p:cNvPr id="7" name="Text 5"/>
+          <p:cNvSpPr/>
+          <p:nvPr/>
+        </p:nvSpPr>
+        <p:spPr>
+          <a:xfrm>
+            <a:off x="640080" y="1417320"/>
+            <a:ext cx="10881360" cy="640080"/>
           </a:xfrm>
           <a:prstGeom prst="rect">
             <a:avLst/>
@@ -3283,7 +3856,7 @@
                 <a:ea typeface="Georgia" pitchFamily="34" charset="-122"/>
                 <a:cs typeface="Georgia" pitchFamily="34" charset="-120"/>
               </a:rPr>
-              <a:t>It's not about burstiness.</a:t>
+              <a:t>More than half of contributors never come back.</a:t>
             </a:r>
             <a:endParaRPr lang="en-US" sz="2800" dirty="0"/>
           </a:p>
@@ -3291,14 +3864,14 @@
       </p:sp>
       <p:sp>
         <p:nvSpPr>
-          <p:cNvPr id="6" name="Text 4"/>
-          <p:cNvSpPr/>
-          <p:nvPr/>
-        </p:nvSpPr>
-        <p:spPr>
-          <a:xfrm>
-            <a:off x="640080" y="1463040"/>
-            <a:ext cx="10881360" cy="457200"/>
+          <p:cNvPr id="8" name="Text 6"/>
+          <p:cNvSpPr/>
+          <p:nvPr/>
+        </p:nvSpPr>
+        <p:spPr>
+          <a:xfrm>
+            <a:off x="640080" y="2331720"/>
+            <a:ext cx="5029200" cy="1645920"/>
           </a:xfrm>
           <a:prstGeom prst="rect">
             <a:avLst/>
@@ -3314,71 +3887,19 @@
               <a:buNone/>
             </a:pPr>
             <a:r>
-              <a:rPr lang="en-US" sz="2000" i="1" dirty="0">
-                <a:solidFill>
-                  <a:srgbClr val="0D9488"/>
+              <a:rPr lang="en-US" sz="13000" b="1" dirty="0">
+                <a:solidFill>
+                  <a:srgbClr val="F59E0B"/>
                 </a:solidFill>
                 <a:latin typeface="Georgia" pitchFamily="34" charset="0"/>
                 <a:ea typeface="Georgia" pitchFamily="34" charset="-122"/>
                 <a:cs typeface="Georgia" pitchFamily="34" charset="-120"/>
               </a:rPr>
-              <a:t>It's about how aggregate endpoints behave under cache-driven coverage.</a:t>
-            </a:r>
-            <a:endParaRPr lang="en-US" sz="2000" dirty="0"/>
-          </a:p>
-        </p:txBody>
-      </p:sp>
-      <p:sp>
-        <p:nvSpPr>
-          <p:cNvPr id="7" name="Shape 5"/>
-          <p:cNvSpPr/>
-          <p:nvPr/>
-        </p:nvSpPr>
-        <p:spPr>
-          <a:xfrm>
-            <a:off x="640080" y="2377440"/>
-            <a:ext cx="3611880" cy="3291840"/>
-          </a:xfrm>
-          <a:prstGeom prst="rect">
-            <a:avLst/>
-          </a:prstGeom>
-          <a:solidFill>
-            <a:srgbClr val="FFFFFF"/>
-          </a:solidFill>
-          <a:ln w="12700">
-            <a:solidFill>
-              <a:srgbClr val="E2E8F0"/>
-            </a:solidFill>
-            <a:prstDash val="solid"/>
-          </a:ln>
-          <a:effectLst>
-            <a:outerShdw sx="100000" sy="100000" kx="0" ky="0" algn="bl" rotWithShape="0" blurRad="152400" dist="38100" dir="5400000">
-              <a:srgbClr val="0F172A">
-                <a:alpha val="6000"/>
-              </a:srgbClr>
-            </a:outerShdw>
-          </a:effectLst>
-        </p:spPr>
-      </p:sp>
-      <p:sp>
-        <p:nvSpPr>
-          <p:cNvPr id="8" name="Shape 6"/>
-          <p:cNvSpPr/>
-          <p:nvPr/>
-        </p:nvSpPr>
-        <p:spPr>
-          <a:xfrm>
-            <a:off x="640080" y="2377440"/>
-            <a:ext cx="3611880" cy="91440"/>
-          </a:xfrm>
-          <a:prstGeom prst="rect">
-            <a:avLst/>
-          </a:prstGeom>
-          <a:solidFill>
-            <a:srgbClr val="0D9488"/>
-          </a:solidFill>
-          <a:ln/>
-        </p:spPr>
+              <a:t>52%</a:t>
+            </a:r>
+            <a:endParaRPr lang="en-US" sz="13000" dirty="0"/>
+          </a:p>
+        </p:txBody>
       </p:sp>
       <p:sp>
         <p:nvSpPr>
@@ -3388,8 +3909,8 @@
         </p:nvSpPr>
         <p:spPr>
           <a:xfrm>
-            <a:off x="914400" y="2606040"/>
-            <a:ext cx="1097280" cy="640080"/>
+            <a:off x="640080" y="4069080"/>
+            <a:ext cx="5029200" cy="822960"/>
           </a:xfrm>
           <a:prstGeom prst="rect">
             <a:avLst/>
@@ -3405,7 +3926,46 @@
               <a:buNone/>
             </a:pPr>
             <a:r>
-              <a:rPr lang="en-US" sz="4200" b="1" dirty="0">
+              <a:rPr lang="en-US" sz="1500" dirty="0">
+                <a:solidFill>
+                  <a:srgbClr val="1E293B"/>
+                </a:solidFill>
+                <a:latin typeface="Calibri" pitchFamily="34" charset="0"/>
+                <a:ea typeface="Calibri" pitchFamily="34" charset="-122"/>
+                <a:cs typeface="Calibri" pitchFamily="34" charset="-120"/>
+              </a:rPr>
+              <a:t>of 2,506 human contributor records made a single commit and never returned.</a:t>
+            </a:r>
+            <a:endParaRPr lang="en-US" sz="1500" dirty="0"/>
+          </a:p>
+        </p:txBody>
+      </p:sp>
+      <p:sp>
+        <p:nvSpPr>
+          <p:cNvPr id="10" name="Text 8"/>
+          <p:cNvSpPr/>
+          <p:nvPr/>
+        </p:nvSpPr>
+        <p:spPr>
+          <a:xfrm>
+            <a:off x="640080" y="5029200"/>
+            <a:ext cx="1280160" cy="320040"/>
+          </a:xfrm>
+          <a:prstGeom prst="rect">
+            <a:avLst/>
+          </a:prstGeom>
+          <a:noFill/>
+          <a:ln/>
+        </p:spPr>
+        <p:txBody>
+          <a:bodyPr wrap="square" lIns="0" tIns="0" rIns="0" bIns="0" rtlCol="0" anchor="ctr"/>
+          <a:lstStyle/>
+          <a:p>
+            <a:pPr algn="l" indent="0" marL="0">
+              <a:buNone/>
+            </a:pPr>
+            <a:r>
+              <a:rPr lang="en-US" sz="1600" b="1" dirty="0">
                 <a:solidFill>
                   <a:srgbClr val="0D9488"/>
                 </a:solidFill>
@@ -3413,46 +3973,85 @@
                 <a:ea typeface="Georgia" pitchFamily="34" charset="-122"/>
                 <a:cs typeface="Georgia" pitchFamily="34" charset="-120"/>
               </a:rPr>
-              <a:t>01</a:t>
-            </a:r>
-            <a:endParaRPr lang="en-US" sz="4200" dirty="0"/>
-          </a:p>
-        </p:txBody>
-      </p:sp>
-      <p:sp>
-        <p:nvSpPr>
-          <p:cNvPr id="10" name="Text 8"/>
-          <p:cNvSpPr/>
-          <p:nvPr/>
-        </p:nvSpPr>
-        <p:spPr>
-          <a:xfrm>
-            <a:off x="914400" y="3383280"/>
-            <a:ext cx="3108960" cy="777240"/>
-          </a:xfrm>
-          <a:prstGeom prst="rect">
-            <a:avLst/>
-          </a:prstGeom>
-          <a:noFill/>
-          <a:ln/>
-        </p:spPr>
-        <p:txBody>
-          <a:bodyPr wrap="square" lIns="0" tIns="0" rIns="0" bIns="0" rtlCol="0" anchor="t"/>
+              <a:t>73%</a:t>
+            </a:r>
+            <a:endParaRPr lang="en-US" sz="1600" dirty="0"/>
+          </a:p>
+        </p:txBody>
+      </p:sp>
+      <p:sp>
+        <p:nvSpPr>
+          <p:cNvPr id="11" name="Text 9"/>
+          <p:cNvSpPr/>
+          <p:nvPr/>
+        </p:nvSpPr>
+        <p:spPr>
+          <a:xfrm>
+            <a:off x="1965960" y="5029200"/>
+            <a:ext cx="3749040" cy="320040"/>
+          </a:xfrm>
+          <a:prstGeom prst="rect">
+            <a:avLst/>
+          </a:prstGeom>
+          <a:noFill/>
+          <a:ln/>
+        </p:spPr>
+        <p:txBody>
+          <a:bodyPr wrap="square" lIns="0" tIns="0" rIns="0" bIns="0" rtlCol="0" anchor="ctr"/>
           <a:lstStyle/>
           <a:p>
             <a:pPr algn="l" indent="0" marL="0">
               <a:buNone/>
             </a:pPr>
             <a:r>
+              <a:rPr lang="en-US" sz="1200" dirty="0">
+                <a:solidFill>
+                  <a:srgbClr val="64748B"/>
+                </a:solidFill>
+                <a:latin typeface="Calibri" pitchFamily="34" charset="0"/>
+                <a:ea typeface="Calibri" pitchFamily="34" charset="-122"/>
+                <a:cs typeface="Calibri" pitchFamily="34" charset="-120"/>
+              </a:rPr>
+              <a:t>within 3 months of first commit</a:t>
+            </a:r>
+            <a:endParaRPr lang="en-US" sz="1200" dirty="0"/>
+          </a:p>
+        </p:txBody>
+      </p:sp>
+      <p:sp>
+        <p:nvSpPr>
+          <p:cNvPr id="12" name="Text 10"/>
+          <p:cNvSpPr/>
+          <p:nvPr/>
+        </p:nvSpPr>
+        <p:spPr>
+          <a:xfrm>
+            <a:off x="640080" y="5413248"/>
+            <a:ext cx="1280160" cy="320040"/>
+          </a:xfrm>
+          <a:prstGeom prst="rect">
+            <a:avLst/>
+          </a:prstGeom>
+          <a:noFill/>
+          <a:ln/>
+        </p:spPr>
+        <p:txBody>
+          <a:bodyPr wrap="square" lIns="0" tIns="0" rIns="0" bIns="0" rtlCol="0" anchor="ctr"/>
+          <a:lstStyle/>
+          <a:p>
+            <a:pPr algn="l" indent="0" marL="0">
+              <a:buNone/>
+            </a:pPr>
+            <a:r>
               <a:rPr lang="en-US" sz="1600" b="1" dirty="0">
                 <a:solidFill>
-                  <a:srgbClr val="1E293B"/>
+                  <a:srgbClr val="0D9488"/>
                 </a:solidFill>
                 <a:latin typeface="Georgia" pitchFamily="34" charset="0"/>
                 <a:ea typeface="Georgia" pitchFamily="34" charset="-122"/>
                 <a:cs typeface="Georgia" pitchFamily="34" charset="-120"/>
               </a:rPr>
-              <a:t>Endpoint returns only what's cached</a:t>
+              <a:t>2.4%</a:t>
             </a:r>
             <a:endParaRPr lang="en-US" sz="1600" dirty="0"/>
           </a:p>
@@ -3460,23 +4059,23 @@
       </p:sp>
       <p:sp>
         <p:nvSpPr>
-          <p:cNvPr id="11" name="Text 9"/>
-          <p:cNvSpPr/>
-          <p:nvPr/>
-        </p:nvSpPr>
-        <p:spPr>
-          <a:xfrm>
-            <a:off x="914400" y="4297680"/>
-            <a:ext cx="3108960" cy="1280160"/>
-          </a:xfrm>
-          <a:prstGeom prst="rect">
-            <a:avLst/>
-          </a:prstGeom>
-          <a:noFill/>
-          <a:ln/>
-        </p:spPr>
-        <p:txBody>
-          <a:bodyPr wrap="square" lIns="0" tIns="0" rIns="0" bIns="0" rtlCol="0" anchor="t"/>
+          <p:cNvPr id="13" name="Text 11"/>
+          <p:cNvSpPr/>
+          <p:nvPr/>
+        </p:nvSpPr>
+        <p:spPr>
+          <a:xfrm>
+            <a:off x="1965960" y="5413248"/>
+            <a:ext cx="3749040" cy="320040"/>
+          </a:xfrm>
+          <a:prstGeom prst="rect">
+            <a:avLst/>
+          </a:prstGeom>
+          <a:noFill/>
+          <a:ln/>
+        </p:spPr>
+        <p:txBody>
+          <a:bodyPr wrap="square" lIns="0" tIns="0" rIns="0" bIns="0" rtlCol="0" anchor="ctr"/>
           <a:lstStyle/>
           <a:p>
             <a:pPr algn="l" indent="0" marL="0">
@@ -3491,7 +4090,7 @@
                 <a:ea typeface="Calibri" pitchFamily="34" charset="-122"/>
                 <a:cs typeface="Calibri" pitchFamily="34" charset="-120"/>
               </a:rPr>
-              <a:t>Async aggregate endpoints serve repos GitHub has recently computed.</a:t>
+              <a:t>sustain activity &gt; 5 years</a:t>
             </a:r>
             <a:endParaRPr lang="en-US" sz="1200" dirty="0"/>
           </a:p>
@@ -3499,82 +4098,30 @@
       </p:sp>
       <p:sp>
         <p:nvSpPr>
-          <p:cNvPr id="12" name="Shape 10"/>
-          <p:cNvSpPr/>
-          <p:nvPr/>
-        </p:nvSpPr>
-        <p:spPr>
-          <a:xfrm>
-            <a:off x="4480560" y="2377440"/>
-            <a:ext cx="3611880" cy="3291840"/>
-          </a:xfrm>
-          <a:prstGeom prst="rect">
-            <a:avLst/>
-          </a:prstGeom>
-          <a:solidFill>
-            <a:srgbClr val="FFFFFF"/>
-          </a:solidFill>
-          <a:ln w="12700">
-            <a:solidFill>
-              <a:srgbClr val="E2E8F0"/>
-            </a:solidFill>
-            <a:prstDash val="solid"/>
-          </a:ln>
-          <a:effectLst>
-            <a:outerShdw sx="100000" sy="100000" kx="0" ky="0" algn="bl" rotWithShape="0" blurRad="152400" dist="38100" dir="5400000">
-              <a:srgbClr val="0F172A">
-                <a:alpha val="6000"/>
-              </a:srgbClr>
-            </a:outerShdw>
-          </a:effectLst>
-        </p:spPr>
-      </p:sp>
-      <p:sp>
-        <p:nvSpPr>
-          <p:cNvPr id="13" name="Shape 11"/>
-          <p:cNvSpPr/>
-          <p:nvPr/>
-        </p:nvSpPr>
-        <p:spPr>
-          <a:xfrm>
-            <a:off x="4480560" y="2377440"/>
-            <a:ext cx="3611880" cy="91440"/>
-          </a:xfrm>
-          <a:prstGeom prst="rect">
-            <a:avLst/>
-          </a:prstGeom>
-          <a:solidFill>
-            <a:srgbClr val="0D9488"/>
-          </a:solidFill>
-          <a:ln/>
-        </p:spPr>
-      </p:sp>
-      <p:sp>
-        <p:nvSpPr>
           <p:cNvPr id="14" name="Text 12"/>
           <p:cNvSpPr/>
           <p:nvPr/>
         </p:nvSpPr>
         <p:spPr>
           <a:xfrm>
-            <a:off x="4754880" y="2606040"/>
-            <a:ext cx="1097280" cy="640080"/>
-          </a:xfrm>
-          <a:prstGeom prst="rect">
-            <a:avLst/>
-          </a:prstGeom>
-          <a:noFill/>
-          <a:ln/>
-        </p:spPr>
-        <p:txBody>
-          <a:bodyPr wrap="square" lIns="0" tIns="0" rIns="0" bIns="0" rtlCol="0" anchor="t"/>
+            <a:off x="640080" y="5797296"/>
+            <a:ext cx="1280160" cy="320040"/>
+          </a:xfrm>
+          <a:prstGeom prst="rect">
+            <a:avLst/>
+          </a:prstGeom>
+          <a:noFill/>
+          <a:ln/>
+        </p:spPr>
+        <p:txBody>
+          <a:bodyPr wrap="square" lIns="0" tIns="0" rIns="0" bIns="0" rtlCol="0" anchor="ctr"/>
           <a:lstStyle/>
           <a:p>
             <a:pPr algn="l" indent="0" marL="0">
               <a:buNone/>
             </a:pPr>
             <a:r>
-              <a:rPr lang="en-US" sz="4200" b="1" dirty="0">
+              <a:rPr lang="en-US" sz="1600" b="1" dirty="0">
                 <a:solidFill>
                   <a:srgbClr val="0D9488"/>
                 </a:solidFill>
@@ -3582,9 +4129,9 @@
                 <a:ea typeface="Georgia" pitchFamily="34" charset="-122"/>
                 <a:cs typeface="Georgia" pitchFamily="34" charset="-120"/>
               </a:rPr>
-              <a:t>02</a:t>
-            </a:r>
-            <a:endParaRPr lang="en-US" sz="4200" dirty="0"/>
+              <a:t>11.5 : 1</a:t>
+            </a:r>
+            <a:endParaRPr lang="en-US" sz="1600" dirty="0"/>
           </a:p>
         </p:txBody>
       </p:sp>
@@ -3596,47 +4143,71 @@
         </p:nvSpPr>
         <p:spPr>
           <a:xfrm>
-            <a:off x="4754880" y="3383280"/>
-            <a:ext cx="3108960" cy="777240"/>
-          </a:xfrm>
-          <a:prstGeom prst="rect">
-            <a:avLst/>
-          </a:prstGeom>
-          <a:noFill/>
-          <a:ln/>
-        </p:spPr>
-        <p:txBody>
-          <a:bodyPr wrap="square" lIns="0" tIns="0" rIns="0" bIns="0" rtlCol="0" anchor="t"/>
+            <a:off x="1965960" y="5797296"/>
+            <a:ext cx="3749040" cy="320040"/>
+          </a:xfrm>
+          <a:prstGeom prst="rect">
+            <a:avLst/>
+          </a:prstGeom>
+          <a:noFill/>
+          <a:ln/>
+        </p:spPr>
+        <p:txBody>
+          <a:bodyPr wrap="square" lIns="0" tIns="0" rIns="0" bIns="0" rtlCol="0" anchor="ctr"/>
           <a:lstStyle/>
           <a:p>
             <a:pPr algn="l" indent="0" marL="0">
               <a:buNone/>
             </a:pPr>
             <a:r>
-              <a:rPr lang="en-US" sz="1600" b="1" dirty="0">
-                <a:solidFill>
-                  <a:srgbClr val="1E293B"/>
-                </a:solidFill>
-                <a:latin typeface="Georgia" pitchFamily="34" charset="0"/>
-                <a:ea typeface="Georgia" pitchFamily="34" charset="-122"/>
-                <a:cs typeface="Georgia" pitchFamily="34" charset="-120"/>
-              </a:rPr>
-              <a:t>Caching correlates with activity</a:t>
-            </a:r>
-            <a:endParaRPr lang="en-US" sz="1600" dirty="0"/>
-          </a:p>
-        </p:txBody>
-      </p:sp>
-      <p:sp>
-        <p:nvSpPr>
-          <p:cNvPr id="16" name="Text 14"/>
-          <p:cNvSpPr/>
-          <p:nvPr/>
-        </p:nvSpPr>
-        <p:spPr>
-          <a:xfrm>
-            <a:off x="4754880" y="4297680"/>
-            <a:ext cx="3108960" cy="1280160"/>
+              <a:rPr lang="en-US" sz="1200" dirty="0">
+                <a:solidFill>
+                  <a:srgbClr val="64748B"/>
+                </a:solidFill>
+                <a:latin typeface="Calibri" pitchFamily="34" charset="0"/>
+                <a:ea typeface="Calibri" pitchFamily="34" charset="-122"/>
+                <a:cs typeface="Calibri" pitchFamily="34" charset="-120"/>
+              </a:rPr>
+              <a:t>departed-to-active ratio (humans)</a:t>
+            </a:r>
+            <a:endParaRPr lang="en-US" sz="1200" dirty="0"/>
+          </a:p>
+        </p:txBody>
+      </p:sp>
+      <p:pic>
+        <p:nvPicPr>
+          <p:cNvPr id="16" name="Image 0" descr="../figures/fig_contributor_duration.png">    </p:cNvPr>
+          <p:cNvPicPr>
+            <a:picLocks noChangeAspect="1"/>
+          </p:cNvPicPr>
+          <p:nvPr/>
+        </p:nvPicPr>
+        <p:blipFill>
+          <a:blip r:embed="rId1"/>
+          <a:stretch>
+            <a:fillRect/>
+          </a:stretch>
+        </p:blipFill>
+        <p:spPr>
+          <a:xfrm>
+            <a:off x="6035040" y="2194560"/>
+            <a:ext cx="5669280" cy="3200400"/>
+          </a:xfrm>
+          <a:prstGeom prst="rect">
+            <a:avLst/>
+          </a:prstGeom>
+        </p:spPr>
+      </p:pic>
+      <p:sp>
+        <p:nvSpPr>
+          <p:cNvPr id="17" name="Text 14"/>
+          <p:cNvSpPr/>
+          <p:nvPr/>
+        </p:nvSpPr>
+        <p:spPr>
+          <a:xfrm>
+            <a:off x="6035040" y="5532120"/>
+            <a:ext cx="5669280" cy="1005840"/>
           </a:xfrm>
           <a:prstGeom prst="rect">
             <a:avLst/>
@@ -3652,7 +4223,7 @@
               <a:buNone/>
             </a:pPr>
             <a:r>
-              <a:rPr lang="en-US" sz="1200" dirty="0">
+              <a:rPr lang="en-US" sz="1200" i="1" dirty="0">
                 <a:solidFill>
                   <a:srgbClr val="64748B"/>
                 </a:solidFill>
@@ -3660,217 +4231,9 @@
                 <a:ea typeface="Calibri" pitchFamily="34" charset="-122"/>
                 <a:cs typeface="Calibri" pitchFamily="34" charset="-120"/>
               </a:rPr>
-              <a:t>Recent computation is triggered by external API traffic, which scales with popularity.</a:t>
+              <a:t>Why it matters: the 'total contributors' number on a repo's landing page is a poor proxy for current engagement. Drive-by patches are valuable — but they don't sustain a project.</a:t>
             </a:r>
             <a:endParaRPr lang="en-US" sz="1200" dirty="0"/>
-          </a:p>
-        </p:txBody>
-      </p:sp>
-      <p:sp>
-        <p:nvSpPr>
-          <p:cNvPr id="17" name="Shape 15"/>
-          <p:cNvSpPr/>
-          <p:nvPr/>
-        </p:nvSpPr>
-        <p:spPr>
-          <a:xfrm>
-            <a:off x="8321040" y="2377440"/>
-            <a:ext cx="3611880" cy="3291840"/>
-          </a:xfrm>
-          <a:prstGeom prst="rect">
-            <a:avLst/>
-          </a:prstGeom>
-          <a:solidFill>
-            <a:srgbClr val="FFFFFF"/>
-          </a:solidFill>
-          <a:ln w="12700">
-            <a:solidFill>
-              <a:srgbClr val="E2E8F0"/>
-            </a:solidFill>
-            <a:prstDash val="solid"/>
-          </a:ln>
-          <a:effectLst>
-            <a:outerShdw sx="100000" sy="100000" kx="0" ky="0" algn="bl" rotWithShape="0" blurRad="152400" dist="38100" dir="5400000">
-              <a:srgbClr val="0F172A">
-                <a:alpha val="6000"/>
-              </a:srgbClr>
-            </a:outerShdw>
-          </a:effectLst>
-        </p:spPr>
-      </p:sp>
-      <p:sp>
-        <p:nvSpPr>
-          <p:cNvPr id="18" name="Shape 16"/>
-          <p:cNvSpPr/>
-          <p:nvPr/>
-        </p:nvSpPr>
-        <p:spPr>
-          <a:xfrm>
-            <a:off x="8321040" y="2377440"/>
-            <a:ext cx="3611880" cy="91440"/>
-          </a:xfrm>
-          <a:prstGeom prst="rect">
-            <a:avLst/>
-          </a:prstGeom>
-          <a:solidFill>
-            <a:srgbClr val="0D9488"/>
-          </a:solidFill>
-          <a:ln/>
-        </p:spPr>
-      </p:sp>
-      <p:sp>
-        <p:nvSpPr>
-          <p:cNvPr id="19" name="Text 17"/>
-          <p:cNvSpPr/>
-          <p:nvPr/>
-        </p:nvSpPr>
-        <p:spPr>
-          <a:xfrm>
-            <a:off x="8595360" y="2606040"/>
-            <a:ext cx="1097280" cy="640080"/>
-          </a:xfrm>
-          <a:prstGeom prst="rect">
-            <a:avLst/>
-          </a:prstGeom>
-          <a:noFill/>
-          <a:ln/>
-        </p:spPr>
-        <p:txBody>
-          <a:bodyPr wrap="square" lIns="0" tIns="0" rIns="0" bIns="0" rtlCol="0" anchor="t"/>
-          <a:lstStyle/>
-          <a:p>
-            <a:pPr algn="l" indent="0" marL="0">
-              <a:buNone/>
-            </a:pPr>
-            <a:r>
-              <a:rPr lang="en-US" sz="4200" b="1" dirty="0">
-                <a:solidFill>
-                  <a:srgbClr val="0D9488"/>
-                </a:solidFill>
-                <a:latin typeface="Georgia" pitchFamily="34" charset="0"/>
-                <a:ea typeface="Georgia" pitchFamily="34" charset="-122"/>
-                <a:cs typeface="Georgia" pitchFamily="34" charset="-120"/>
-              </a:rPr>
-              <a:t>03</a:t>
-            </a:r>
-            <a:endParaRPr lang="en-US" sz="4200" dirty="0"/>
-          </a:p>
-        </p:txBody>
-      </p:sp>
-      <p:sp>
-        <p:nvSpPr>
-          <p:cNvPr id="20" name="Text 18"/>
-          <p:cNvSpPr/>
-          <p:nvPr/>
-        </p:nvSpPr>
-        <p:spPr>
-          <a:xfrm>
-            <a:off x="8595360" y="3383280"/>
-            <a:ext cx="3108960" cy="777240"/>
-          </a:xfrm>
-          <a:prstGeom prst="rect">
-            <a:avLst/>
-          </a:prstGeom>
-          <a:noFill/>
-          <a:ln/>
-        </p:spPr>
-        <p:txBody>
-          <a:bodyPr wrap="square" lIns="0" tIns="0" rIns="0" bIns="0" rtlCol="0" anchor="t"/>
-          <a:lstStyle/>
-          <a:p>
-            <a:pPr algn="l" indent="0" marL="0">
-              <a:buNone/>
-            </a:pPr>
-            <a:r>
-              <a:rPr lang="en-US" sz="1600" b="1" dirty="0">
-                <a:solidFill>
-                  <a:srgbClr val="1E293B"/>
-                </a:solidFill>
-                <a:latin typeface="Georgia" pitchFamily="34" charset="0"/>
-                <a:ea typeface="Georgia" pitchFamily="34" charset="-122"/>
-                <a:cs typeface="Georgia" pitchFamily="34" charset="-120"/>
-              </a:rPr>
-              <a:t>Correlations across the subset are biased</a:t>
-            </a:r>
-            <a:endParaRPr lang="en-US" sz="1600" dirty="0"/>
-          </a:p>
-        </p:txBody>
-      </p:sp>
-      <p:sp>
-        <p:nvSpPr>
-          <p:cNvPr id="21" name="Text 19"/>
-          <p:cNvSpPr/>
-          <p:nvPr/>
-        </p:nvSpPr>
-        <p:spPr>
-          <a:xfrm>
-            <a:off x="8595360" y="4297680"/>
-            <a:ext cx="3108960" cy="1280160"/>
-          </a:xfrm>
-          <a:prstGeom prst="rect">
-            <a:avLst/>
-          </a:prstGeom>
-          <a:noFill/>
-          <a:ln/>
-        </p:spPr>
-        <p:txBody>
-          <a:bodyPr wrap="square" lIns="0" tIns="0" rIns="0" bIns="0" rtlCol="0" anchor="t"/>
-          <a:lstStyle/>
-          <a:p>
-            <a:pPr algn="l" indent="0" marL="0">
-              <a:buNone/>
-            </a:pPr>
-            <a:r>
-              <a:rPr lang="en-US" sz="1200" dirty="0">
-                <a:solidFill>
-                  <a:srgbClr val="64748B"/>
-                </a:solidFill>
-                <a:latin typeface="Calibri" pitchFamily="34" charset="0"/>
-                <a:ea typeface="Calibri" pitchFamily="34" charset="-122"/>
-                <a:cs typeface="Calibri" pitchFamily="34" charset="-120"/>
-              </a:rPr>
-              <a:t>Joined-subset correlations skew toward the very variables you wanted to measure independently.</a:t>
-            </a:r>
-            <a:endParaRPr lang="en-US" sz="1200" dirty="0"/>
-          </a:p>
-        </p:txBody>
-      </p:sp>
-      <p:sp>
-        <p:nvSpPr>
-          <p:cNvPr id="22" name="Text 20"/>
-          <p:cNvSpPr/>
-          <p:nvPr/>
-        </p:nvSpPr>
-        <p:spPr>
-          <a:xfrm>
-            <a:off x="640080" y="5989320"/>
-            <a:ext cx="10881360" cy="548640"/>
-          </a:xfrm>
-          <a:prstGeom prst="rect">
-            <a:avLst/>
-          </a:prstGeom>
-          <a:noFill/>
-          <a:ln/>
-        </p:spPr>
-        <p:txBody>
-          <a:bodyPr wrap="square" lIns="0" tIns="0" rIns="0" bIns="0" rtlCol="0" anchor="t"/>
-          <a:lstStyle/>
-          <a:p>
-            <a:pPr algn="ctr" indent="0" marL="0">
-              <a:buNone/>
-            </a:pPr>
-            <a:r>
-              <a:rPr lang="en-US" sz="1400" i="1" dirty="0">
-                <a:solidFill>
-                  <a:srgbClr val="1E293B"/>
-                </a:solidFill>
-                <a:latin typeface="Georgia" pitchFamily="34" charset="0"/>
-                <a:ea typeface="Georgia" pitchFamily="34" charset="-122"/>
-                <a:cs typeface="Georgia" pitchFamily="34" charset="-120"/>
-              </a:rPr>
-              <a:t>Any OSS health study that joins an aggregate endpoint with a target metric is exposed to this failure mode.</a:t>
-            </a:r>
-            <a:endParaRPr lang="en-US" sz="1400" dirty="0"/>
           </a:p>
         </p:txBody>
       </p:sp>
@@ -3959,7 +4322,7 @@
                 <a:ea typeface="Calibri" pitchFamily="34" charset="-122"/>
                 <a:cs typeface="Calibri" pitchFamily="34" charset="-120"/>
               </a:rPr>
-              <a:t>05 / 08</a:t>
+              <a:t>05 / 09</a:t>
             </a:r>
             <a:endParaRPr lang="en-US" sz="1000" dirty="0"/>
           </a:p>
@@ -3973,8 +4336,8 @@
         </p:nvSpPr>
         <p:spPr>
           <a:xfrm>
-            <a:off x="8503920" y="502920"/>
-            <a:ext cx="3383280" cy="274320"/>
+            <a:off x="7589520" y="502920"/>
+            <a:ext cx="4297680" cy="274320"/>
           </a:xfrm>
           <a:prstGeom prst="rect">
             <a:avLst/>
@@ -3998,7 +4361,7 @@
                 <a:ea typeface="Calibri" pitchFamily="34" charset="-122"/>
                 <a:cs typeface="Calibri" pitchFamily="34" charset="-120"/>
               </a:rPr>
-              <a:t>WHY THIS WORKS</a:t>
+              <a:t>CONCENTRATION</a:t>
             </a:r>
             <a:endParaRPr lang="en-US" sz="900" dirty="0"/>
           </a:p>
@@ -4006,14 +4369,78 @@
       </p:sp>
       <p:sp>
         <p:nvSpPr>
-          <p:cNvPr id="5" name="Text 3"/>
-          <p:cNvSpPr/>
-          <p:nvPr/>
-        </p:nvSpPr>
-        <p:spPr>
-          <a:xfrm>
-            <a:off x="640080" y="914400"/>
-            <a:ext cx="10881360" cy="548640"/>
+          <p:cNvPr id="5" name="Shape 3"/>
+          <p:cNvSpPr/>
+          <p:nvPr/>
+        </p:nvSpPr>
+        <p:spPr>
+          <a:xfrm>
+            <a:off x="640080" y="868680"/>
+            <a:ext cx="1325880" cy="411480"/>
+          </a:xfrm>
+          <a:prstGeom prst="rect">
+            <a:avLst/>
+          </a:prstGeom>
+          <a:solidFill>
+            <a:srgbClr val="FEF3C7"/>
+          </a:solidFill>
+          <a:ln w="12700">
+            <a:solidFill>
+              <a:srgbClr val="F59E0B"/>
+            </a:solidFill>
+            <a:prstDash val="solid"/>
+          </a:ln>
+        </p:spPr>
+      </p:sp>
+      <p:sp>
+        <p:nvSpPr>
+          <p:cNvPr id="6" name="Text 4"/>
+          <p:cNvSpPr/>
+          <p:nvPr/>
+        </p:nvSpPr>
+        <p:spPr>
+          <a:xfrm>
+            <a:off x="640080" y="868680"/>
+            <a:ext cx="1325880" cy="411480"/>
+          </a:xfrm>
+          <a:prstGeom prst="rect">
+            <a:avLst/>
+          </a:prstGeom>
+          <a:noFill/>
+          <a:ln/>
+        </p:spPr>
+        <p:txBody>
+          <a:bodyPr wrap="square" lIns="0" tIns="0" rIns="0" bIns="0" rtlCol="0" anchor="ctr"/>
+          <a:lstStyle/>
+          <a:p>
+            <a:pPr algn="ctr" indent="0" marL="0">
+              <a:buNone/>
+            </a:pPr>
+            <a:r>
+              <a:rPr lang="en-US" sz="1000" b="1" spc="400" kern="0" dirty="0">
+                <a:solidFill>
+                  <a:srgbClr val="92400E"/>
+                </a:solidFill>
+                <a:latin typeface="Calibri" pitchFamily="34" charset="0"/>
+                <a:ea typeface="Calibri" pitchFamily="34" charset="-122"/>
+                <a:cs typeface="Calibri" pitchFamily="34" charset="-120"/>
+              </a:rPr>
+              <a:t>CHALLENGE 02</a:t>
+            </a:r>
+            <a:endParaRPr lang="en-US" sz="1000" dirty="0"/>
+          </a:p>
+        </p:txBody>
+      </p:sp>
+      <p:sp>
+        <p:nvSpPr>
+          <p:cNvPr id="7" name="Text 5"/>
+          <p:cNvSpPr/>
+          <p:nvPr/>
+        </p:nvSpPr>
+        <p:spPr>
+          <a:xfrm>
+            <a:off x="640080" y="1417320"/>
+            <a:ext cx="10881360" cy="640080"/>
           </a:xfrm>
           <a:prstGeom prst="rect">
             <a:avLst/>
@@ -4037,7 +4464,7 @@
                 <a:ea typeface="Georgia" pitchFamily="34" charset="-122"/>
                 <a:cs typeface="Georgia" pitchFamily="34" charset="-120"/>
               </a:rPr>
-              <a:t>Two defences, not one.</a:t>
+              <a:t>Cores are dangerously thin.</a:t>
             </a:r>
             <a:endParaRPr lang="en-US" sz="2800" dirty="0"/>
           </a:p>
@@ -4045,14 +4472,14 @@
       </p:sp>
       <p:sp>
         <p:nvSpPr>
-          <p:cNvPr id="6" name="Text 4"/>
-          <p:cNvSpPr/>
-          <p:nvPr/>
-        </p:nvSpPr>
-        <p:spPr>
-          <a:xfrm>
-            <a:off x="640080" y="1463040"/>
-            <a:ext cx="10881360" cy="411480"/>
+          <p:cNvPr id="8" name="Text 6"/>
+          <p:cNvSpPr/>
+          <p:nvPr/>
+        </p:nvSpPr>
+        <p:spPr>
+          <a:xfrm>
+            <a:off x="640080" y="2286000"/>
+            <a:ext cx="5029200" cy="1371600"/>
           </a:xfrm>
           <a:prstGeom prst="rect">
             <a:avLst/>
@@ -4068,7 +4495,85 @@
               <a:buNone/>
             </a:pPr>
             <a:r>
-              <a:rPr lang="en-US" sz="1400" i="1" dirty="0">
+              <a:rPr lang="en-US" sz="11000" b="1" dirty="0">
+                <a:solidFill>
+                  <a:srgbClr val="F59E0B"/>
+                </a:solidFill>
+                <a:latin typeface="Georgia" pitchFamily="34" charset="0"/>
+                <a:ea typeface="Georgia" pitchFamily="34" charset="-122"/>
+                <a:cs typeface="Georgia" pitchFamily="34" charset="-120"/>
+              </a:rPr>
+              <a:t>46%</a:t>
+            </a:r>
+            <a:endParaRPr lang="en-US" sz="11000" dirty="0"/>
+          </a:p>
+        </p:txBody>
+      </p:sp>
+      <p:sp>
+        <p:nvSpPr>
+          <p:cNvPr id="9" name="Text 7"/>
+          <p:cNvSpPr/>
+          <p:nvPr/>
+        </p:nvSpPr>
+        <p:spPr>
+          <a:xfrm>
+            <a:off x="640080" y="3749040"/>
+            <a:ext cx="5029200" cy="457200"/>
+          </a:xfrm>
+          <a:prstGeom prst="rect">
+            <a:avLst/>
+          </a:prstGeom>
+          <a:noFill/>
+          <a:ln/>
+        </p:spPr>
+        <p:txBody>
+          <a:bodyPr wrap="square" lIns="0" tIns="0" rIns="0" bIns="0" rtlCol="0" anchor="t"/>
+          <a:lstStyle/>
+          <a:p>
+            <a:pPr algn="l" indent="0" marL="0">
+              <a:buNone/>
+            </a:pPr>
+            <a:r>
+              <a:rPr lang="en-US" sz="1600" b="1" dirty="0">
+                <a:solidFill>
+                  <a:srgbClr val="1E293B"/>
+                </a:solidFill>
+                <a:latin typeface="Calibri" pitchFamily="34" charset="0"/>
+                <a:ea typeface="Calibri" pitchFamily="34" charset="-122"/>
+                <a:cs typeface="Calibri" pitchFamily="34" charset="-120"/>
+              </a:rPr>
+              <a:t>of repositories have bus factor 1.</a:t>
+            </a:r>
+            <a:endParaRPr lang="en-US" sz="1600" dirty="0"/>
+          </a:p>
+        </p:txBody>
+      </p:sp>
+      <p:sp>
+        <p:nvSpPr>
+          <p:cNvPr id="10" name="Text 8"/>
+          <p:cNvSpPr/>
+          <p:nvPr/>
+        </p:nvSpPr>
+        <p:spPr>
+          <a:xfrm>
+            <a:off x="640080" y="4160520"/>
+            <a:ext cx="5029200" cy="640080"/>
+          </a:xfrm>
+          <a:prstGeom prst="rect">
+            <a:avLst/>
+          </a:prstGeom>
+          <a:noFill/>
+          <a:ln/>
+        </p:spPr>
+        <p:txBody>
+          <a:bodyPr wrap="square" lIns="0" tIns="0" rIns="0" bIns="0" rtlCol="0" anchor="t"/>
+          <a:lstStyle/>
+          <a:p>
+            <a:pPr algn="l" indent="0" marL="0">
+              <a:buNone/>
+            </a:pPr>
+            <a:r>
+              <a:rPr lang="en-US" sz="1300" i="1" dirty="0">
                 <a:solidFill>
                   <a:srgbClr val="64748B"/>
                 </a:solidFill>
@@ -4076,22 +4581,22 @@
                 <a:ea typeface="Calibri" pitchFamily="34" charset="-122"/>
                 <a:cs typeface="Calibri" pitchFamily="34" charset="-120"/>
               </a:rPr>
-              <a:t>How we build studies that survive coverage problems.</a:t>
-            </a:r>
-            <a:endParaRPr lang="en-US" sz="1400" dirty="0"/>
-          </a:p>
-        </p:txBody>
-      </p:sp>
-      <p:sp>
-        <p:nvSpPr>
-          <p:cNvPr id="7" name="Shape 5"/>
-          <p:cNvSpPr/>
-          <p:nvPr/>
-        </p:nvSpPr>
-        <p:spPr>
-          <a:xfrm>
-            <a:off x="640080" y="2194560"/>
-            <a:ext cx="5166360" cy="4206240"/>
+              <a:t>A single developer accounts for ≥50% of project commits.</a:t>
+            </a:r>
+            <a:endParaRPr lang="en-US" sz="1300" dirty="0"/>
+          </a:p>
+        </p:txBody>
+      </p:sp>
+      <p:sp>
+        <p:nvSpPr>
+          <p:cNvPr id="11" name="Shape 9"/>
+          <p:cNvSpPr/>
+          <p:nvPr/>
+        </p:nvSpPr>
+        <p:spPr>
+          <a:xfrm>
+            <a:off x="6400800" y="2286000"/>
+            <a:ext cx="5120640" cy="1188720"/>
           </a:xfrm>
           <a:prstGeom prst="rect">
             <a:avLst/>
@@ -4114,29 +4619,9 @@
           </a:effectLst>
         </p:spPr>
       </p:sp>
-      <p:sp>
-        <p:nvSpPr>
-          <p:cNvPr id="8" name="Shape 6"/>
-          <p:cNvSpPr/>
-          <p:nvPr/>
-        </p:nvSpPr>
-        <p:spPr>
-          <a:xfrm>
-            <a:off x="640080" y="2194560"/>
-            <a:ext cx="91440" cy="4206240"/>
-          </a:xfrm>
-          <a:prstGeom prst="rect">
-            <a:avLst/>
-          </a:prstGeom>
-          <a:solidFill>
-            <a:srgbClr val="0D9488"/>
-          </a:solidFill>
-          <a:ln/>
-        </p:spPr>
-      </p:sp>
       <p:pic>
         <p:nvPicPr>
-          <p:cNvPr id="9" name="Image 0" descr="preencoded.png">    </p:cNvPr>
+          <p:cNvPr id="12" name="Image 0" descr="preencoded.png">    </p:cNvPr>
           <p:cNvPicPr>
             <a:picLocks noChangeAspect="1"/>
           </p:cNvPicPr>
@@ -4150,7 +4635,7 @@
         </p:blipFill>
         <p:spPr>
           <a:xfrm>
-            <a:off x="1005840" y="2423160"/>
+            <a:off x="6583680" y="2606040"/>
             <a:ext cx="502920" cy="502920"/>
           </a:xfrm>
           <a:prstGeom prst="rect">
@@ -4160,14 +4645,14 @@
       </p:pic>
       <p:sp>
         <p:nvSpPr>
-          <p:cNvPr id="10" name="Text 7"/>
-          <p:cNvSpPr/>
-          <p:nvPr/>
-        </p:nvSpPr>
-        <p:spPr>
-          <a:xfrm>
-            <a:off x="1645920" y="2468880"/>
-            <a:ext cx="3657600" cy="274320"/>
+          <p:cNvPr id="13" name="Text 10"/>
+          <p:cNvSpPr/>
+          <p:nvPr/>
+        </p:nvSpPr>
+        <p:spPr>
+          <a:xfrm>
+            <a:off x="7223760" y="2377440"/>
+            <a:ext cx="4206240" cy="594360"/>
           </a:xfrm>
           <a:prstGeom prst="rect">
             <a:avLst/>
@@ -4183,166 +4668,19 @@
               <a:buNone/>
             </a:pPr>
             <a:r>
-              <a:rPr lang="en-US" sz="1000" b="1" spc="400" kern="0" dirty="0">
+              <a:rPr lang="en-US" sz="2800" b="1" dirty="0">
                 <a:solidFill>
                   <a:srgbClr val="0D9488"/>
-                </a:solidFill>
-                <a:latin typeface="Calibri" pitchFamily="34" charset="0"/>
-                <a:ea typeface="Calibri" pitchFamily="34" charset="-122"/>
-                <a:cs typeface="Calibri" pitchFamily="34" charset="-120"/>
-              </a:rPr>
-              <a:t>ENGINEERING</a:t>
-            </a:r>
-            <a:endParaRPr lang="en-US" sz="1000" dirty="0"/>
-          </a:p>
-        </p:txBody>
-      </p:sp>
-      <p:sp>
-        <p:nvSpPr>
-          <p:cNvPr id="11" name="Text 8"/>
-          <p:cNvSpPr/>
-          <p:nvPr/>
-        </p:nvSpPr>
-        <p:spPr>
-          <a:xfrm>
-            <a:off x="1005840" y="3108960"/>
-            <a:ext cx="4572000" cy="640080"/>
-          </a:xfrm>
-          <a:prstGeom prst="rect">
-            <a:avLst/>
-          </a:prstGeom>
-          <a:noFill/>
-          <a:ln/>
-        </p:spPr>
-        <p:txBody>
-          <a:bodyPr wrap="square" lIns="0" tIns="0" rIns="0" bIns="0" rtlCol="0" anchor="t"/>
-          <a:lstStyle/>
-          <a:p>
-            <a:pPr algn="l" indent="0" marL="0">
-              <a:buNone/>
-            </a:pPr>
-            <a:r>
-              <a:rPr lang="en-US" sz="1900" b="1" dirty="0">
-                <a:solidFill>
-                  <a:srgbClr val="1E293B"/>
                 </a:solidFill>
                 <a:latin typeface="Georgia" pitchFamily="34" charset="0"/>
                 <a:ea typeface="Georgia" pitchFamily="34" charset="-122"/>
                 <a:cs typeface="Georgia" pitchFamily="34" charset="-120"/>
               </a:rPr>
-              <a:t>Triangulate from independent sources</a:t>
-            </a:r>
-            <a:endParaRPr lang="en-US" sz="1900" dirty="0"/>
-          </a:p>
-        </p:txBody>
-      </p:sp>
-      <p:sp>
-        <p:nvSpPr>
-          <p:cNvPr id="12" name="Text 9"/>
-          <p:cNvSpPr/>
-          <p:nvPr/>
-        </p:nvSpPr>
-        <p:spPr>
-          <a:xfrm>
-            <a:off x="1005840" y="3886200"/>
-            <a:ext cx="4572000" cy="1737360"/>
-          </a:xfrm>
-          <a:prstGeom prst="rect">
-            <a:avLst/>
-          </a:prstGeom>
-          <a:noFill/>
-          <a:ln/>
-        </p:spPr>
-        <p:txBody>
-          <a:bodyPr wrap="square" rtlCol="0" anchor="t"/>
-          <a:lstStyle/>
-          <a:p>
-            <a:pPr algn="l" marL="342900" indent="-342900">
-              <a:spcAft>
-                <a:spcPts val="600"/>
-              </a:spcAft>
-              <a:buSzPct val="100000"/>
-              <a:buChar char="•"/>
-            </a:pPr>
-            <a:r>
-              <a:rPr lang="en-US" sz="1300" dirty="0">
-                <a:solidFill>
-                  <a:srgbClr val="1E293B"/>
-                </a:solidFill>
-                <a:latin typeface="Calibri" pitchFamily="34" charset="0"/>
-                <a:ea typeface="Calibri" pitchFamily="34" charset="-122"/>
-                <a:cs typeface="Calibri" pitchFamily="34" charset="-120"/>
-              </a:rPr>
-              <a:t>GraphQL bulk-fetch as fallback to /stats/* timeouts</a:t>
-            </a:r>
-            <a:endParaRPr lang="en-US" sz="1300" dirty="0"/>
-          </a:p>
-          <a:p>
-            <a:pPr algn="l" marL="342900" indent="-342900">
-              <a:spcAft>
-                <a:spcPts val="600"/>
-              </a:spcAft>
-              <a:buSzPct val="100000"/>
-              <a:buChar char="•"/>
-            </a:pPr>
-            <a:r>
-              <a:rPr lang="en-US" sz="1300" dirty="0">
-                <a:solidFill>
-                  <a:srgbClr val="1E293B"/>
-                </a:solidFill>
-                <a:latin typeface="Calibri" pitchFamily="34" charset="0"/>
-                <a:ea typeface="Calibri" pitchFamily="34" charset="-122"/>
-                <a:cs typeface="Calibri" pitchFamily="34" charset="-120"/>
-              </a:rPr>
-              <a:t>Exponential backoff + warm-up pre-pass</a:t>
-            </a:r>
-            <a:endParaRPr lang="en-US" sz="1300" dirty="0"/>
-          </a:p>
-          <a:p>
-            <a:pPr algn="l" marL="342900" indent="-342900">
-              <a:spcAft>
-                <a:spcPts val="600"/>
-              </a:spcAft>
-              <a:buSzPct val="100000"/>
-              <a:buChar char="•"/>
-            </a:pPr>
-            <a:r>
-              <a:rPr lang="en-US" sz="1300" dirty="0">
-                <a:solidFill>
-                  <a:srgbClr val="1E293B"/>
-                </a:solidFill>
-                <a:latin typeface="Calibri" pitchFamily="34" charset="0"/>
-                <a:ea typeface="Calibri" pitchFamily="34" charset="-122"/>
-                <a:cs typeface="Calibri" pitchFamily="34" charset="-120"/>
-              </a:rPr>
-              <a:t>Per-metric coverage reported as first-class output</a:t>
-            </a:r>
-            <a:endParaRPr lang="en-US" sz="1300" dirty="0"/>
-          </a:p>
-        </p:txBody>
-      </p:sp>
-      <p:sp>
-        <p:nvSpPr>
-          <p:cNvPr id="13" name="Shape 10"/>
-          <p:cNvSpPr/>
-          <p:nvPr/>
-        </p:nvSpPr>
-        <p:spPr>
-          <a:xfrm>
-            <a:off x="1005840" y="5715000"/>
-            <a:ext cx="4572000" cy="0"/>
-          </a:xfrm>
-          <a:prstGeom prst="line">
-            <a:avLst/>
-          </a:prstGeom>
-          <a:noFill/>
-          <a:ln w="9525">
-            <a:solidFill>
-              <a:srgbClr val="E2E8F0"/>
-            </a:solidFill>
-            <a:prstDash val="solid"/>
-          </a:ln>
-        </p:spPr>
+              <a:t>2</a:t>
+            </a:r>
+            <a:endParaRPr lang="en-US" sz="2800" dirty="0"/>
+          </a:p>
+        </p:txBody>
       </p:sp>
       <p:sp>
         <p:nvSpPr>
@@ -4352,8 +4690,8 @@
         </p:nvSpPr>
         <p:spPr>
           <a:xfrm>
-            <a:off x="1005840" y="5806440"/>
-            <a:ext cx="4572000" cy="457200"/>
+            <a:off x="7223760" y="2999232"/>
+            <a:ext cx="4206240" cy="365760"/>
           </a:xfrm>
           <a:prstGeom prst="rect">
             <a:avLst/>
@@ -4369,15 +4707,15 @@
               <a:buNone/>
             </a:pPr>
             <a:r>
-              <a:rPr lang="en-US" sz="1200" b="1" i="1" dirty="0">
-                <a:solidFill>
-                  <a:srgbClr val="0D9488"/>
-                </a:solidFill>
-                <a:latin typeface="Calibri" pitchFamily="34" charset="0"/>
-                <a:ea typeface="Calibri" pitchFamily="34" charset="-122"/>
-                <a:cs typeface="Calibri" pitchFamily="34" charset="-120"/>
-              </a:rPr>
-              <a:t>Result: burstiness coverage 5/37 → 37/37</a:t>
+              <a:rPr lang="en-US" sz="1200" dirty="0">
+                <a:solidFill>
+                  <a:srgbClr val="64748B"/>
+                </a:solidFill>
+                <a:latin typeface="Calibri" pitchFamily="34" charset="0"/>
+                <a:ea typeface="Calibri" pitchFamily="34" charset="-122"/>
+                <a:cs typeface="Calibri" pitchFamily="34" charset="-120"/>
+              </a:rPr>
+              <a:t>median bus factor</a:t>
             </a:r>
             <a:endParaRPr lang="en-US" sz="1200" dirty="0"/>
           </a:p>
@@ -4391,8 +4729,8 @@
         </p:nvSpPr>
         <p:spPr>
           <a:xfrm>
-            <a:off x="6355080" y="2194560"/>
-            <a:ext cx="5166360" cy="4206240"/>
+            <a:off x="6400800" y="3657600"/>
+            <a:ext cx="5120640" cy="1188720"/>
           </a:xfrm>
           <a:prstGeom prst="rect">
             <a:avLst/>
@@ -4415,29 +4753,9 @@
           </a:effectLst>
         </p:spPr>
       </p:sp>
-      <p:sp>
-        <p:nvSpPr>
-          <p:cNvPr id="16" name="Shape 13"/>
-          <p:cNvSpPr/>
-          <p:nvPr/>
-        </p:nvSpPr>
-        <p:spPr>
-          <a:xfrm>
-            <a:off x="6355080" y="2194560"/>
-            <a:ext cx="91440" cy="4206240"/>
-          </a:xfrm>
-          <a:prstGeom prst="rect">
-            <a:avLst/>
-          </a:prstGeom>
-          <a:solidFill>
-            <a:srgbClr val="0D9488"/>
-          </a:solidFill>
-          <a:ln/>
-        </p:spPr>
-      </p:sp>
       <p:pic>
         <p:nvPicPr>
-          <p:cNvPr id="17" name="Image 1" descr="preencoded.png">    </p:cNvPr>
+          <p:cNvPr id="16" name="Image 1" descr="preencoded.png">    </p:cNvPr>
           <p:cNvPicPr>
             <a:picLocks noChangeAspect="1"/>
           </p:cNvPicPr>
@@ -4451,7 +4769,7 @@
         </p:blipFill>
         <p:spPr>
           <a:xfrm>
-            <a:off x="6720840" y="2423160"/>
+            <a:off x="6583680" y="3977640"/>
             <a:ext cx="502920" cy="502920"/>
           </a:xfrm>
           <a:prstGeom prst="rect">
@@ -4461,14 +4779,14 @@
       </p:pic>
       <p:sp>
         <p:nvSpPr>
-          <p:cNvPr id="18" name="Text 14"/>
-          <p:cNvSpPr/>
-          <p:nvPr/>
-        </p:nvSpPr>
-        <p:spPr>
-          <a:xfrm>
-            <a:off x="7360920" y="2468880"/>
-            <a:ext cx="3657600" cy="274320"/>
+          <p:cNvPr id="17" name="Text 13"/>
+          <p:cNvSpPr/>
+          <p:nvPr/>
+        </p:nvSpPr>
+        <p:spPr>
+          <a:xfrm>
+            <a:off x="7223760" y="3749040"/>
+            <a:ext cx="4206240" cy="594360"/>
           </a:xfrm>
           <a:prstGeom prst="rect">
             <a:avLst/>
@@ -4484,177 +4802,125 @@
               <a:buNone/>
             </a:pPr>
             <a:r>
-              <a:rPr lang="en-US" sz="1000" b="1" spc="400" kern="0" dirty="0">
+              <a:rPr lang="en-US" sz="2800" b="1" dirty="0">
                 <a:solidFill>
                   <a:srgbClr val="0D9488"/>
-                </a:solidFill>
-                <a:latin typeface="Calibri" pitchFamily="34" charset="0"/>
-                <a:ea typeface="Calibri" pitchFamily="34" charset="-122"/>
-                <a:cs typeface="Calibri" pitchFamily="34" charset="-120"/>
-              </a:rPr>
-              <a:t>STATISTICS</a:t>
-            </a:r>
-            <a:endParaRPr lang="en-US" sz="1000" dirty="0"/>
-          </a:p>
-        </p:txBody>
-      </p:sp>
-      <p:sp>
-        <p:nvSpPr>
-          <p:cNvPr id="19" name="Text 15"/>
-          <p:cNvSpPr/>
-          <p:nvPr/>
-        </p:nvSpPr>
-        <p:spPr>
-          <a:xfrm>
-            <a:off x="6720840" y="3108960"/>
-            <a:ext cx="4572000" cy="640080"/>
-          </a:xfrm>
-          <a:prstGeom prst="rect">
-            <a:avLst/>
-          </a:prstGeom>
-          <a:noFill/>
-          <a:ln/>
-        </p:spPr>
-        <p:txBody>
-          <a:bodyPr wrap="square" lIns="0" tIns="0" rIns="0" bIns="0" rtlCol="0" anchor="t"/>
-          <a:lstStyle/>
-          <a:p>
-            <a:pPr algn="l" indent="0" marL="0">
-              <a:buNone/>
-            </a:pPr>
-            <a:r>
-              <a:rPr lang="en-US" sz="1900" b="1" dirty="0">
-                <a:solidFill>
-                  <a:srgbClr val="1E293B"/>
                 </a:solidFill>
                 <a:latin typeface="Georgia" pitchFamily="34" charset="0"/>
                 <a:ea typeface="Georgia" pitchFamily="34" charset="-122"/>
                 <a:cs typeface="Georgia" pitchFamily="34" charset="-120"/>
               </a:rPr>
-              <a:t>Use paired-design metrics</a:t>
-            </a:r>
-            <a:endParaRPr lang="en-US" sz="1900" dirty="0"/>
-          </a:p>
-        </p:txBody>
-      </p:sp>
-      <p:sp>
-        <p:nvSpPr>
-          <p:cNvPr id="20" name="Text 16"/>
-          <p:cNvSpPr/>
-          <p:nvPr/>
-        </p:nvSpPr>
-        <p:spPr>
-          <a:xfrm>
-            <a:off x="6720840" y="3886200"/>
-            <a:ext cx="4572000" cy="1737360"/>
-          </a:xfrm>
-          <a:prstGeom prst="rect">
-            <a:avLst/>
-          </a:prstGeom>
-          <a:noFill/>
-          <a:ln/>
-        </p:spPr>
-        <p:txBody>
-          <a:bodyPr wrap="square" rtlCol="0" anchor="t"/>
-          <a:lstStyle/>
-          <a:p>
-            <a:pPr algn="l" marL="342900" indent="-342900">
-              <a:spcAft>
-                <a:spcPts val="600"/>
-              </a:spcAft>
-              <a:buSzPct val="100000"/>
-              <a:buChar char="•"/>
-            </a:pPr>
-            <a:r>
-              <a:rPr lang="en-US" sz="1300" dirty="0">
-                <a:solidFill>
-                  <a:srgbClr val="1E293B"/>
-                </a:solidFill>
-                <a:latin typeface="Calibri" pitchFamily="34" charset="0"/>
-                <a:ea typeface="Calibri" pitchFamily="34" charset="-122"/>
-                <a:cs typeface="Calibri" pitchFamily="34" charset="-120"/>
-              </a:rPr>
-              <a:t>Within-repository Wilcoxon tests bypass coverage entirely</a:t>
-            </a:r>
-            <a:endParaRPr lang="en-US" sz="1300" dirty="0"/>
-          </a:p>
-          <a:p>
-            <a:pPr algn="l" marL="342900" indent="-342900">
-              <a:spcAft>
-                <a:spcPts val="600"/>
-              </a:spcAft>
-              <a:buSzPct val="100000"/>
-              <a:buChar char="•"/>
-            </a:pPr>
-            <a:r>
-              <a:rPr lang="en-US" sz="1300" dirty="0">
-                <a:solidFill>
-                  <a:srgbClr val="1E293B"/>
-                </a:solidFill>
-                <a:latin typeface="Calibri" pitchFamily="34" charset="0"/>
-                <a:ea typeface="Calibri" pitchFamily="34" charset="-122"/>
-                <a:cs typeface="Calibri" pitchFamily="34" charset="-120"/>
-              </a:rPr>
-              <a:t>Each pair is its own control — no joined-subset bias</a:t>
-            </a:r>
-            <a:endParaRPr lang="en-US" sz="1300" dirty="0"/>
-          </a:p>
-          <a:p>
-            <a:pPr algn="l" marL="342900" indent="-342900">
-              <a:spcAft>
-                <a:spcPts val="600"/>
-              </a:spcAft>
-              <a:buSzPct val="100000"/>
-              <a:buChar char="•"/>
-            </a:pPr>
-            <a:r>
-              <a:rPr lang="en-US" sz="1300" dirty="0">
-                <a:solidFill>
-                  <a:srgbClr val="1E293B"/>
-                </a:solidFill>
-                <a:latin typeface="Calibri" pitchFamily="34" charset="0"/>
-                <a:ea typeface="Calibri" pitchFamily="34" charset="-122"/>
-                <a:cs typeface="Calibri" pitchFamily="34" charset="-120"/>
-              </a:rPr>
-              <a:t>Robust at n=37 with large effect sizes</a:t>
-            </a:r>
-            <a:endParaRPr lang="en-US" sz="1300" dirty="0"/>
-          </a:p>
-        </p:txBody>
-      </p:sp>
-      <p:sp>
-        <p:nvSpPr>
-          <p:cNvPr id="21" name="Shape 17"/>
-          <p:cNvSpPr/>
-          <p:nvPr/>
-        </p:nvSpPr>
-        <p:spPr>
-          <a:xfrm>
-            <a:off x="6720840" y="5715000"/>
-            <a:ext cx="4572000" cy="0"/>
-          </a:xfrm>
-          <a:prstGeom prst="line">
-            <a:avLst/>
-          </a:prstGeom>
-          <a:noFill/>
-          <a:ln w="9525">
+              <a:t>96.6%</a:t>
+            </a:r>
+            <a:endParaRPr lang="en-US" sz="2800" dirty="0"/>
+          </a:p>
+        </p:txBody>
+      </p:sp>
+      <p:sp>
+        <p:nvSpPr>
+          <p:cNvPr id="18" name="Text 14"/>
+          <p:cNvSpPr/>
+          <p:nvPr/>
+        </p:nvSpPr>
+        <p:spPr>
+          <a:xfrm>
+            <a:off x="7223760" y="4370832"/>
+            <a:ext cx="4206240" cy="365760"/>
+          </a:xfrm>
+          <a:prstGeom prst="rect">
+            <a:avLst/>
+          </a:prstGeom>
+          <a:noFill/>
+          <a:ln/>
+        </p:spPr>
+        <p:txBody>
+          <a:bodyPr wrap="square" lIns="0" tIns="0" rIns="0" bIns="0" rtlCol="0" anchor="t"/>
+          <a:lstStyle/>
+          <a:p>
+            <a:pPr algn="l" indent="0" marL="0">
+              <a:buNone/>
+            </a:pPr>
+            <a:r>
+              <a:rPr lang="en-US" sz="1200" dirty="0">
+                <a:solidFill>
+                  <a:srgbClr val="64748B"/>
+                </a:solidFill>
+                <a:latin typeface="Calibri" pitchFamily="34" charset="0"/>
+                <a:ea typeface="Calibri" pitchFamily="34" charset="-122"/>
+                <a:cs typeface="Calibri" pitchFamily="34" charset="-120"/>
+              </a:rPr>
+              <a:t>median per-repo elephant-week share</a:t>
+            </a:r>
+            <a:endParaRPr lang="en-US" sz="1200" dirty="0"/>
+          </a:p>
+        </p:txBody>
+      </p:sp>
+      <p:sp>
+        <p:nvSpPr>
+          <p:cNvPr id="19" name="Shape 15"/>
+          <p:cNvSpPr/>
+          <p:nvPr/>
+        </p:nvSpPr>
+        <p:spPr>
+          <a:xfrm>
+            <a:off x="6400800" y="5029200"/>
+            <a:ext cx="5120640" cy="1188720"/>
+          </a:xfrm>
+          <a:prstGeom prst="rect">
+            <a:avLst/>
+          </a:prstGeom>
+          <a:solidFill>
+            <a:srgbClr val="FFFFFF"/>
+          </a:solidFill>
+          <a:ln w="12700">
             <a:solidFill>
               <a:srgbClr val="E2E8F0"/>
             </a:solidFill>
             <a:prstDash val="solid"/>
           </a:ln>
-        </p:spPr>
-      </p:sp>
-      <p:sp>
-        <p:nvSpPr>
-          <p:cNvPr id="22" name="Text 18"/>
-          <p:cNvSpPr/>
-          <p:nvPr/>
-        </p:nvSpPr>
-        <p:spPr>
-          <a:xfrm>
-            <a:off x="6720840" y="5806440"/>
-            <a:ext cx="4572000" cy="457200"/>
+          <a:effectLst>
+            <a:outerShdw sx="100000" sy="100000" kx="0" ky="0" algn="bl" rotWithShape="0" blurRad="152400" dist="38100" dir="5400000">
+              <a:srgbClr val="0F172A">
+                <a:alpha val="6000"/>
+              </a:srgbClr>
+            </a:outerShdw>
+          </a:effectLst>
+        </p:spPr>
+      </p:sp>
+      <p:pic>
+        <p:nvPicPr>
+          <p:cNvPr id="20" name="Image 2" descr="preencoded.png">    </p:cNvPr>
+          <p:cNvPicPr>
+            <a:picLocks noChangeAspect="1"/>
+          </p:cNvPicPr>
+          <p:nvPr/>
+        </p:nvPicPr>
+        <p:blipFill>
+          <a:blip r:embed="rId3"/>
+          <a:stretch>
+            <a:fillRect/>
+          </a:stretch>
+        </p:blipFill>
+        <p:spPr>
+          <a:xfrm>
+            <a:off x="6583680" y="5349240"/>
+            <a:ext cx="502920" cy="502920"/>
+          </a:xfrm>
+          <a:prstGeom prst="rect">
+            <a:avLst/>
+          </a:prstGeom>
+        </p:spPr>
+      </p:pic>
+      <p:sp>
+        <p:nvSpPr>
+          <p:cNvPr id="21" name="Text 16"/>
+          <p:cNvSpPr/>
+          <p:nvPr/>
+        </p:nvSpPr>
+        <p:spPr>
+          <a:xfrm>
+            <a:off x="7223760" y="5120640"/>
+            <a:ext cx="4206240" cy="594360"/>
           </a:xfrm>
           <a:prstGeom prst="rect">
             <a:avLst/>
@@ -4670,17 +4936,95 @@
               <a:buNone/>
             </a:pPr>
             <a:r>
-              <a:rPr lang="en-US" sz="1200" b="1" i="1" dirty="0">
+              <a:rPr lang="en-US" sz="2800" b="1" dirty="0">
                 <a:solidFill>
                   <a:srgbClr val="0D9488"/>
                 </a:solidFill>
-                <a:latin typeface="Calibri" pitchFamily="34" charset="0"/>
-                <a:ea typeface="Calibri" pitchFamily="34" charset="-122"/>
-                <a:cs typeface="Calibri" pitchFamily="34" charset="-120"/>
-              </a:rPr>
-              <a:t>Result: two well-powered findings (next slide)</a:t>
+                <a:latin typeface="Georgia" pitchFamily="34" charset="0"/>
+                <a:ea typeface="Georgia" pitchFamily="34" charset="-122"/>
+                <a:cs typeface="Georgia" pitchFamily="34" charset="-120"/>
+              </a:rPr>
+              <a:t>p=7×10⁻⁶</a:t>
+            </a:r>
+            <a:endParaRPr lang="en-US" sz="2800" dirty="0"/>
+          </a:p>
+        </p:txBody>
+      </p:sp>
+      <p:sp>
+        <p:nvSpPr>
+          <p:cNvPr id="22" name="Text 17"/>
+          <p:cNvSpPr/>
+          <p:nvPr/>
+        </p:nvSpPr>
+        <p:spPr>
+          <a:xfrm>
+            <a:off x="7223760" y="5742432"/>
+            <a:ext cx="4206240" cy="365760"/>
+          </a:xfrm>
+          <a:prstGeom prst="rect">
+            <a:avLst/>
+          </a:prstGeom>
+          <a:noFill/>
+          <a:ln/>
+        </p:spPr>
+        <p:txBody>
+          <a:bodyPr wrap="square" lIns="0" tIns="0" rIns="0" bIns="0" rtlCol="0" anchor="t"/>
+          <a:lstStyle/>
+          <a:p>
+            <a:pPr algn="l" indent="0" marL="0">
+              <a:buNone/>
+            </a:pPr>
+            <a:r>
+              <a:rPr lang="en-US" sz="1200" dirty="0">
+                <a:solidFill>
+                  <a:srgbClr val="64748B"/>
+                </a:solidFill>
+                <a:latin typeface="Calibri" pitchFamily="34" charset="0"/>
+                <a:ea typeface="Calibri" pitchFamily="34" charset="-122"/>
+                <a:cs typeface="Calibri" pitchFamily="34" charset="-120"/>
+              </a:rPr>
+              <a:t>bots inflate HHI (Wilcoxon paired, n=37)</a:t>
             </a:r>
             <a:endParaRPr lang="en-US" sz="1200" dirty="0"/>
+          </a:p>
+        </p:txBody>
+      </p:sp>
+      <p:sp>
+        <p:nvSpPr>
+          <p:cNvPr id="23" name="Text 18"/>
+          <p:cNvSpPr/>
+          <p:nvPr/>
+        </p:nvSpPr>
+        <p:spPr>
+          <a:xfrm>
+            <a:off x="640080" y="6035040"/>
+            <a:ext cx="10881360" cy="457200"/>
+          </a:xfrm>
+          <a:prstGeom prst="rect">
+            <a:avLst/>
+          </a:prstGeom>
+          <a:noFill/>
+          <a:ln/>
+        </p:spPr>
+        <p:txBody>
+          <a:bodyPr wrap="square" lIns="0" tIns="0" rIns="0" bIns="0" rtlCol="0" anchor="t"/>
+          <a:lstStyle/>
+          <a:p>
+            <a:pPr algn="ctr" indent="0" marL="0">
+              <a:buNone/>
+            </a:pPr>
+            <a:r>
+              <a:rPr lang="en-US" sz="1600" i="1" dirty="0">
+                <a:solidFill>
+                  <a:srgbClr val="1E293B"/>
+                </a:solidFill>
+                <a:latin typeface="Georgia" pitchFamily="34" charset="0"/>
+                <a:ea typeface="Georgia" pitchFamily="34" charset="-122"/>
+                <a:cs typeface="Georgia" pitchFamily="34" charset="-120"/>
+              </a:rPr>
+              <a:t>For half the panel, almost every active week is dominated by a single contributor.</a:t>
+            </a:r>
+            <a:endParaRPr lang="en-US" sz="1600" dirty="0"/>
           </a:p>
         </p:txBody>
       </p:sp>
@@ -4769,7 +5113,7 @@
                 <a:ea typeface="Calibri" pitchFamily="34" charset="-122"/>
                 <a:cs typeface="Calibri" pitchFamily="34" charset="-120"/>
               </a:rPr>
-              <a:t>06 / 08</a:t>
+              <a:t>06 / 09</a:t>
             </a:r>
             <a:endParaRPr lang="en-US" sz="1000" dirty="0"/>
           </a:p>
@@ -4783,8 +5127,8 @@
         </p:nvSpPr>
         <p:spPr>
           <a:xfrm>
-            <a:off x="8503920" y="502920"/>
-            <a:ext cx="3383280" cy="274320"/>
+            <a:off x="7589520" y="502920"/>
+            <a:ext cx="4297680" cy="274320"/>
           </a:xfrm>
           <a:prstGeom prst="rect">
             <a:avLst/>
@@ -4808,7 +5152,7 @@
                 <a:ea typeface="Calibri" pitchFamily="34" charset="-122"/>
                 <a:cs typeface="Calibri" pitchFamily="34" charset="-120"/>
               </a:rPr>
-              <a:t>EVIDENCE</a:t>
+              <a:t>EFFORT VS ACTIVITY</a:t>
             </a:r>
             <a:endParaRPr lang="en-US" sz="900" dirty="0"/>
           </a:p>
@@ -4816,13 +5160,77 @@
       </p:sp>
       <p:sp>
         <p:nvSpPr>
-          <p:cNvPr id="5" name="Text 3"/>
-          <p:cNvSpPr/>
-          <p:nvPr/>
-        </p:nvSpPr>
-        <p:spPr>
-          <a:xfrm>
-            <a:off x="640080" y="914400"/>
+          <p:cNvPr id="5" name="Shape 3"/>
+          <p:cNvSpPr/>
+          <p:nvPr/>
+        </p:nvSpPr>
+        <p:spPr>
+          <a:xfrm>
+            <a:off x="640080" y="868680"/>
+            <a:ext cx="1325880" cy="411480"/>
+          </a:xfrm>
+          <a:prstGeom prst="rect">
+            <a:avLst/>
+          </a:prstGeom>
+          <a:solidFill>
+            <a:srgbClr val="FEF3C7"/>
+          </a:solidFill>
+          <a:ln w="12700">
+            <a:solidFill>
+              <a:srgbClr val="F59E0B"/>
+            </a:solidFill>
+            <a:prstDash val="solid"/>
+          </a:ln>
+        </p:spPr>
+      </p:sp>
+      <p:sp>
+        <p:nvSpPr>
+          <p:cNvPr id="6" name="Text 4"/>
+          <p:cNvSpPr/>
+          <p:nvPr/>
+        </p:nvSpPr>
+        <p:spPr>
+          <a:xfrm>
+            <a:off x="640080" y="868680"/>
+            <a:ext cx="1325880" cy="411480"/>
+          </a:xfrm>
+          <a:prstGeom prst="rect">
+            <a:avLst/>
+          </a:prstGeom>
+          <a:noFill/>
+          <a:ln/>
+        </p:spPr>
+        <p:txBody>
+          <a:bodyPr wrap="square" lIns="0" tIns="0" rIns="0" bIns="0" rtlCol="0" anchor="ctr"/>
+          <a:lstStyle/>
+          <a:p>
+            <a:pPr algn="ctr" indent="0" marL="0">
+              <a:buNone/>
+            </a:pPr>
+            <a:r>
+              <a:rPr lang="en-US" sz="1000" b="1" spc="400" kern="0" dirty="0">
+                <a:solidFill>
+                  <a:srgbClr val="92400E"/>
+                </a:solidFill>
+                <a:latin typeface="Calibri" pitchFamily="34" charset="0"/>
+                <a:ea typeface="Calibri" pitchFamily="34" charset="-122"/>
+                <a:cs typeface="Calibri" pitchFamily="34" charset="-120"/>
+              </a:rPr>
+              <a:t>CHALLENGE 03</a:t>
+            </a:r>
+            <a:endParaRPr lang="en-US" sz="1000" dirty="0"/>
+          </a:p>
+        </p:txBody>
+      </p:sp>
+      <p:sp>
+        <p:nvSpPr>
+          <p:cNvPr id="7" name="Text 5"/>
+          <p:cNvSpPr/>
+          <p:nvPr/>
+        </p:nvSpPr>
+        <p:spPr>
+          <a:xfrm>
+            <a:off x="640080" y="1417320"/>
             <a:ext cx="10881360" cy="640080"/>
           </a:xfrm>
           <a:prstGeom prst="rect">
@@ -4847,7 +5255,7 @@
                 <a:ea typeface="Georgia" pitchFamily="34" charset="-122"/>
                 <a:cs typeface="Georgia" pitchFamily="34" charset="-120"/>
               </a:rPr>
-              <a:t>Two paired-design findings that ARE robust</a:t>
+              <a:t>Counting commits hides how concentrated effort actually is.</a:t>
             </a:r>
             <a:endParaRPr lang="en-US" sz="2800" dirty="0"/>
           </a:p>
@@ -4855,14 +5263,14 @@
       </p:sp>
       <p:sp>
         <p:nvSpPr>
-          <p:cNvPr id="6" name="Text 4"/>
-          <p:cNvSpPr/>
-          <p:nvPr/>
-        </p:nvSpPr>
-        <p:spPr>
-          <a:xfrm>
-            <a:off x="640080" y="1554480"/>
-            <a:ext cx="10881360" cy="365760"/>
+          <p:cNvPr id="8" name="Text 6"/>
+          <p:cNvSpPr/>
+          <p:nvPr/>
+        </p:nvSpPr>
+        <p:spPr>
+          <a:xfrm>
+            <a:off x="640080" y="2286000"/>
+            <a:ext cx="5029200" cy="274320"/>
           </a:xfrm>
           <a:prstGeom prst="rect">
             <a:avLst/>
@@ -4878,82 +5286,94 @@
               <a:buNone/>
             </a:pPr>
             <a:r>
-              <a:rPr lang="en-US" sz="1400" i="1" dirty="0">
-                <a:solidFill>
-                  <a:srgbClr val="64748B"/>
-                </a:solidFill>
-                <a:latin typeface="Calibri" pitchFamily="34" charset="0"/>
-                <a:ea typeface="Calibri" pitchFamily="34" charset="-122"/>
-                <a:cs typeface="Calibri" pitchFamily="34" charset="-120"/>
-              </a:rPr>
-              <a:t>Each repository is its own control. Per-metric coverage doesn't enter the test.</a:t>
-            </a:r>
-            <a:endParaRPr lang="en-US" sz="1400" dirty="0"/>
-          </a:p>
-        </p:txBody>
-      </p:sp>
-      <p:sp>
-        <p:nvSpPr>
-          <p:cNvPr id="7" name="Shape 5"/>
-          <p:cNvSpPr/>
-          <p:nvPr/>
-        </p:nvSpPr>
-        <p:spPr>
-          <a:xfrm>
-            <a:off x="640080" y="2194560"/>
-            <a:ext cx="5166360" cy="4206240"/>
+              <a:rPr lang="en-US" sz="1000" b="1" spc="400" kern="0" dirty="0">
+                <a:solidFill>
+                  <a:srgbClr val="0D9488"/>
+                </a:solidFill>
+                <a:latin typeface="Calibri" pitchFamily="34" charset="0"/>
+                <a:ea typeface="Calibri" pitchFamily="34" charset="-122"/>
+                <a:cs typeface="Calibri" pitchFamily="34" charset="-120"/>
+              </a:rPr>
+              <a:t>THE TEST</a:t>
+            </a:r>
+            <a:endParaRPr lang="en-US" sz="1000" dirty="0"/>
+          </a:p>
+        </p:txBody>
+      </p:sp>
+      <p:sp>
+        <p:nvSpPr>
+          <p:cNvPr id="9" name="Text 7"/>
+          <p:cNvSpPr/>
+          <p:nvPr/>
+        </p:nvSpPr>
+        <p:spPr>
+          <a:xfrm>
+            <a:off x="640080" y="2606040"/>
+            <a:ext cx="5029200" cy="1463040"/>
+          </a:xfrm>
+          <a:prstGeom prst="rect">
+            <a:avLst/>
+          </a:prstGeom>
+          <a:noFill/>
+          <a:ln/>
+        </p:spPr>
+        <p:txBody>
+          <a:bodyPr wrap="square" lIns="0" tIns="0" rIns="0" bIns="0" rtlCol="0" anchor="t"/>
+          <a:lstStyle/>
+          <a:p>
+            <a:pPr algn="l" indent="0" marL="0">
+              <a:buNone/>
+            </a:pPr>
+            <a:r>
+              <a:rPr lang="en-US" sz="1300" dirty="0">
+                <a:solidFill>
+                  <a:srgbClr val="1E293B"/>
+                </a:solidFill>
+                <a:latin typeface="Calibri" pitchFamily="34" charset="0"/>
+                <a:ea typeface="Calibri" pitchFamily="34" charset="-122"/>
+                <a:cs typeface="Calibri" pitchFamily="34" charset="-120"/>
+              </a:rPr>
+              <a:t>Per repo, two Ginis: commits-per-contributor (activity) and lines-changed-per-contributor (effort). Paired Wilcoxon across the 37 repos — within-repository design, robust to coverage problems.</a:t>
+            </a:r>
+            <a:endParaRPr lang="en-US" sz="1300" dirty="0"/>
+          </a:p>
+        </p:txBody>
+      </p:sp>
+      <p:sp>
+        <p:nvSpPr>
+          <p:cNvPr id="10" name="Shape 8"/>
+          <p:cNvSpPr/>
+          <p:nvPr/>
+        </p:nvSpPr>
+        <p:spPr>
+          <a:xfrm>
+            <a:off x="640080" y="4297680"/>
+            <a:ext cx="5029200" cy="2011680"/>
           </a:xfrm>
           <a:prstGeom prst="rect">
             <a:avLst/>
           </a:prstGeom>
           <a:solidFill>
-            <a:srgbClr val="FFFFFF"/>
+            <a:srgbClr val="D1FAE5"/>
           </a:solidFill>
-          <a:ln w="12700">
+          <a:ln w="19050">
             <a:solidFill>
-              <a:srgbClr val="E2E8F0"/>
+              <a:srgbClr val="10B981"/>
             </a:solidFill>
             <a:prstDash val="solid"/>
           </a:ln>
-          <a:effectLst>
-            <a:outerShdw sx="100000" sy="100000" kx="0" ky="0" algn="bl" rotWithShape="0" blurRad="152400" dist="38100" dir="5400000">
-              <a:srgbClr val="0F172A">
-                <a:alpha val="6000"/>
-              </a:srgbClr>
-            </a:outerShdw>
-          </a:effectLst>
-        </p:spPr>
-      </p:sp>
-      <p:sp>
-        <p:nvSpPr>
-          <p:cNvPr id="8" name="Shape 6"/>
-          <p:cNvSpPr/>
-          <p:nvPr/>
-        </p:nvSpPr>
-        <p:spPr>
-          <a:xfrm>
-            <a:off x="640080" y="2194560"/>
-            <a:ext cx="5166360" cy="91440"/>
-          </a:xfrm>
-          <a:prstGeom prst="rect">
-            <a:avLst/>
-          </a:prstGeom>
-          <a:solidFill>
-            <a:srgbClr val="10B981"/>
-          </a:solidFill>
-          <a:ln/>
-        </p:spPr>
-      </p:sp>
-      <p:sp>
-        <p:nvSpPr>
-          <p:cNvPr id="9" name="Text 7"/>
-          <p:cNvSpPr/>
-          <p:nvPr/>
-        </p:nvSpPr>
-        <p:spPr>
-          <a:xfrm>
-            <a:off x="1005840" y="2468880"/>
-            <a:ext cx="4572000" cy="411480"/>
+        </p:spPr>
+      </p:sp>
+      <p:sp>
+        <p:nvSpPr>
+          <p:cNvPr id="11" name="Text 9"/>
+          <p:cNvSpPr/>
+          <p:nvPr/>
+        </p:nvSpPr>
+        <p:spPr>
+          <a:xfrm>
+            <a:off x="868680" y="4434840"/>
+            <a:ext cx="4572000" cy="274320"/>
           </a:xfrm>
           <a:prstGeom prst="rect">
             <a:avLst/>
@@ -4969,30 +5389,69 @@
               <a:buNone/>
             </a:pPr>
             <a:r>
-              <a:rPr lang="en-US" sz="1600" b="1" dirty="0">
-                <a:solidFill>
-                  <a:srgbClr val="1E293B"/>
+              <a:rPr lang="en-US" sz="1000" b="1" spc="400" kern="0" dirty="0">
+                <a:solidFill>
+                  <a:srgbClr val="065F46"/>
+                </a:solidFill>
+                <a:latin typeface="Calibri" pitchFamily="34" charset="0"/>
+                <a:ea typeface="Calibri" pitchFamily="34" charset="-122"/>
+                <a:cs typeface="Calibri" pitchFamily="34" charset="-120"/>
+              </a:rPr>
+              <a:t>RESULT</a:t>
+            </a:r>
+            <a:endParaRPr lang="en-US" sz="1000" dirty="0"/>
+          </a:p>
+        </p:txBody>
+      </p:sp>
+      <p:sp>
+        <p:nvSpPr>
+          <p:cNvPr id="12" name="Text 10"/>
+          <p:cNvSpPr/>
+          <p:nvPr/>
+        </p:nvSpPr>
+        <p:spPr>
+          <a:xfrm>
+            <a:off x="868680" y="4754880"/>
+            <a:ext cx="4572000" cy="822960"/>
+          </a:xfrm>
+          <a:prstGeom prst="rect">
+            <a:avLst/>
+          </a:prstGeom>
+          <a:noFill/>
+          <a:ln/>
+        </p:spPr>
+        <p:txBody>
+          <a:bodyPr wrap="square" lIns="0" tIns="0" rIns="0" bIns="0" rtlCol="0" anchor="t"/>
+          <a:lstStyle/>
+          <a:p>
+            <a:pPr algn="l" indent="0" marL="0">
+              <a:buNone/>
+            </a:pPr>
+            <a:r>
+              <a:rPr lang="en-US" sz="4000" b="1" dirty="0">
+                <a:solidFill>
+                  <a:srgbClr val="047857"/>
                 </a:solidFill>
                 <a:latin typeface="Georgia" pitchFamily="34" charset="0"/>
                 <a:ea typeface="Georgia" pitchFamily="34" charset="-122"/>
                 <a:cs typeface="Georgia" pitchFamily="34" charset="-120"/>
               </a:rPr>
-              <a:t>Bot filtering matters — selectively</a:t>
-            </a:r>
-            <a:endParaRPr lang="en-US" sz="1600" dirty="0"/>
-          </a:p>
-        </p:txBody>
-      </p:sp>
-      <p:sp>
-        <p:nvSpPr>
-          <p:cNvPr id="10" name="Text 8"/>
-          <p:cNvSpPr/>
-          <p:nvPr/>
-        </p:nvSpPr>
-        <p:spPr>
-          <a:xfrm>
-            <a:off x="1005840" y="3017520"/>
-            <a:ext cx="4572000" cy="914400"/>
+              <a:t>p = 4.8 × 10⁻⁵</a:t>
+            </a:r>
+            <a:endParaRPr lang="en-US" sz="4000" dirty="0"/>
+          </a:p>
+        </p:txBody>
+      </p:sp>
+      <p:sp>
+        <p:nvSpPr>
+          <p:cNvPr id="13" name="Text 11"/>
+          <p:cNvSpPr/>
+          <p:nvPr/>
+        </p:nvSpPr>
+        <p:spPr>
+          <a:xfrm>
+            <a:off x="868680" y="5577840"/>
+            <a:ext cx="4572000" cy="685800"/>
           </a:xfrm>
           <a:prstGeom prst="rect">
             <a:avLst/>
@@ -5008,30 +5467,54 @@
               <a:buNone/>
             </a:pPr>
             <a:r>
-              <a:rPr lang="en-US" sz="3600" b="1" dirty="0">
-                <a:solidFill>
-                  <a:srgbClr val="10B981"/>
-                </a:solidFill>
-                <a:latin typeface="Georgia" pitchFamily="34" charset="0"/>
-                <a:ea typeface="Georgia" pitchFamily="34" charset="-122"/>
-                <a:cs typeface="Georgia" pitchFamily="34" charset="-120"/>
-              </a:rPr>
-              <a:t>p = 7 × 10⁻⁶</a:t>
-            </a:r>
-            <a:endParaRPr lang="en-US" sz="3600" dirty="0"/>
-          </a:p>
-        </p:txBody>
-      </p:sp>
-      <p:sp>
-        <p:nvSpPr>
-          <p:cNvPr id="11" name="Text 9"/>
-          <p:cNvSpPr/>
-          <p:nvPr/>
-        </p:nvSpPr>
-        <p:spPr>
-          <a:xfrm>
-            <a:off x="1005840" y="3977640"/>
-            <a:ext cx="4572000" cy="365760"/>
+              <a:rPr lang="en-US" sz="1200" dirty="0">
+                <a:solidFill>
+                  <a:srgbClr val="065F46"/>
+                </a:solidFill>
+                <a:latin typeface="Calibri" pitchFamily="34" charset="0"/>
+                <a:ea typeface="Calibri" pitchFamily="34" charset="-122"/>
+                <a:cs typeface="Calibri" pitchFamily="34" charset="-120"/>
+              </a:rPr>
+              <a:t>Effort-Gini exceeds commit-Gini in 27 of 37 repositories (Wilcoxon W = 53.0). Mean Δ = +0.052.</a:t>
+            </a:r>
+            <a:endParaRPr lang="en-US" sz="1200" dirty="0"/>
+          </a:p>
+        </p:txBody>
+      </p:sp>
+      <p:pic>
+        <p:nvPicPr>
+          <p:cNvPr id="14" name="Image 0" descr="../figures/fig2_effort_gini.png">    </p:cNvPr>
+          <p:cNvPicPr>
+            <a:picLocks noChangeAspect="1"/>
+          </p:cNvPicPr>
+          <p:nvPr/>
+        </p:nvPicPr>
+        <p:blipFill>
+          <a:blip r:embed="rId1"/>
+          <a:stretch>
+            <a:fillRect/>
+          </a:stretch>
+        </p:blipFill>
+        <p:spPr>
+          <a:xfrm>
+            <a:off x="6035040" y="2194560"/>
+            <a:ext cx="5669280" cy="3657600"/>
+          </a:xfrm>
+          <a:prstGeom prst="rect">
+            <a:avLst/>
+          </a:prstGeom>
+        </p:spPr>
+      </p:pic>
+      <p:sp>
+        <p:nvSpPr>
+          <p:cNvPr id="15" name="Text 12"/>
+          <p:cNvSpPr/>
+          <p:nvPr/>
+        </p:nvSpPr>
+        <p:spPr>
+          <a:xfrm>
+            <a:off x="6035040" y="5943600"/>
+            <a:ext cx="5669280" cy="640080"/>
           </a:xfrm>
           <a:prstGeom prst="rect">
             <a:avLst/>
@@ -5055,470 +5538,7 @@
                 <a:ea typeface="Calibri" pitchFamily="34" charset="-122"/>
                 <a:cs typeface="Calibri" pitchFamily="34" charset="-120"/>
               </a:rPr>
-              <a:t>Wilcoxon signed-rank, HHI with-vs-without bots</a:t>
-            </a:r>
-            <a:endParaRPr lang="en-US" sz="1100" dirty="0"/>
-          </a:p>
-        </p:txBody>
-      </p:sp>
-      <p:sp>
-        <p:nvSpPr>
-          <p:cNvPr id="12" name="Text 10"/>
-          <p:cNvSpPr/>
-          <p:nvPr/>
-        </p:nvSpPr>
-        <p:spPr>
-          <a:xfrm>
-            <a:off x="1005840" y="4389120"/>
-            <a:ext cx="4572000" cy="1371600"/>
-          </a:xfrm>
-          <a:prstGeom prst="rect">
-            <a:avLst/>
-          </a:prstGeom>
-          <a:noFill/>
-          <a:ln/>
-        </p:spPr>
-        <p:txBody>
-          <a:bodyPr wrap="square" rtlCol="0" anchor="t"/>
-          <a:lstStyle/>
-          <a:p>
-            <a:pPr algn="l" marL="342900" indent="-342900">
-              <a:spcAft>
-                <a:spcPts val="400"/>
-              </a:spcAft>
-              <a:buSzPct val="100000"/>
-              <a:buChar char="•"/>
-            </a:pPr>
-            <a:r>
-              <a:rPr lang="en-US" sz="1200" dirty="0">
-                <a:solidFill>
-                  <a:srgbClr val="1E293B"/>
-                </a:solidFill>
-                <a:latin typeface="Calibri" pitchFamily="34" charset="0"/>
-                <a:ea typeface="Calibri" pitchFamily="34" charset="-122"/>
-                <a:cs typeface="Calibri" pitchFamily="34" charset="-120"/>
-              </a:rPr>
-              <a:t>27 of 37 repositories change for HHI</a:t>
-            </a:r>
-            <a:endParaRPr lang="en-US" sz="1200" dirty="0"/>
-          </a:p>
-          <a:p>
-            <a:pPr algn="l" marL="342900" indent="-342900">
-              <a:spcAft>
-                <a:spcPts val="400"/>
-              </a:spcAft>
-              <a:buSzPct val="100000"/>
-              <a:buChar char="•"/>
-            </a:pPr>
-            <a:r>
-              <a:rPr lang="en-US" sz="1200" dirty="0">
-                <a:solidFill>
-                  <a:srgbClr val="1E293B"/>
-                </a:solidFill>
-                <a:latin typeface="Calibri" pitchFamily="34" charset="0"/>
-                <a:ea typeface="Calibri" pitchFamily="34" charset="-122"/>
-                <a:cs typeface="Calibri" pitchFamily="34" charset="-120"/>
-              </a:rPr>
-              <a:t>Only 4 of 37 change for bus factor</a:t>
-            </a:r>
-            <a:endParaRPr lang="en-US" sz="1200" dirty="0"/>
-          </a:p>
-          <a:p>
-            <a:pPr algn="l" marL="342900" indent="-342900">
-              <a:spcAft>
-                <a:spcPts val="400"/>
-              </a:spcAft>
-              <a:buSzPct val="100000"/>
-              <a:buChar char="•"/>
-            </a:pPr>
-            <a:r>
-              <a:rPr lang="en-US" sz="1200" dirty="0">
-                <a:solidFill>
-                  <a:srgbClr val="1E293B"/>
-                </a:solidFill>
-                <a:latin typeface="Calibri" pitchFamily="34" charset="0"/>
-                <a:ea typeface="Calibri" pitchFamily="34" charset="-122"/>
-                <a:cs typeface="Calibri" pitchFamily="34" charset="-120"/>
-              </a:rPr>
-              <a:t>Elephant factor: no repository changes</a:t>
-            </a:r>
-            <a:endParaRPr lang="en-US" sz="1200" dirty="0"/>
-          </a:p>
-        </p:txBody>
-      </p:sp>
-      <p:sp>
-        <p:nvSpPr>
-          <p:cNvPr id="13" name="Shape 11"/>
-          <p:cNvSpPr/>
-          <p:nvPr/>
-        </p:nvSpPr>
-        <p:spPr>
-          <a:xfrm>
-            <a:off x="1005840" y="5806440"/>
-            <a:ext cx="4572000" cy="0"/>
-          </a:xfrm>
-          <a:prstGeom prst="line">
-            <a:avLst/>
-          </a:prstGeom>
-          <a:noFill/>
-          <a:ln w="9525">
-            <a:solidFill>
-              <a:srgbClr val="E2E8F0"/>
-            </a:solidFill>
-            <a:prstDash val="solid"/>
-          </a:ln>
-        </p:spPr>
-      </p:sp>
-      <p:sp>
-        <p:nvSpPr>
-          <p:cNvPr id="14" name="Text 12"/>
-          <p:cNvSpPr/>
-          <p:nvPr/>
-        </p:nvSpPr>
-        <p:spPr>
-          <a:xfrm>
-            <a:off x="1005840" y="5897880"/>
-            <a:ext cx="4572000" cy="457200"/>
-          </a:xfrm>
-          <a:prstGeom prst="rect">
-            <a:avLst/>
-          </a:prstGeom>
-          <a:noFill/>
-          <a:ln/>
-        </p:spPr>
-        <p:txBody>
-          <a:bodyPr wrap="square" lIns="0" tIns="0" rIns="0" bIns="0" rtlCol="0" anchor="t"/>
-          <a:lstStyle/>
-          <a:p>
-            <a:pPr algn="l" indent="0" marL="0">
-              <a:buNone/>
-            </a:pPr>
-            <a:r>
-              <a:rPr lang="en-US" sz="1100" i="1" dirty="0">
-                <a:solidFill>
-                  <a:srgbClr val="0D9488"/>
-                </a:solidFill>
-                <a:latin typeface="Calibri" pitchFamily="34" charset="0"/>
-                <a:ea typeface="Calibri" pitchFamily="34" charset="-122"/>
-                <a:cs typeface="Calibri" pitchFamily="34" charset="-120"/>
-              </a:rPr>
-              <a:t>Recommendation: filter bots for HHI; include them for bus factor.</a:t>
-            </a:r>
-            <a:endParaRPr lang="en-US" sz="1100" dirty="0"/>
-          </a:p>
-        </p:txBody>
-      </p:sp>
-      <p:sp>
-        <p:nvSpPr>
-          <p:cNvPr id="15" name="Shape 13"/>
-          <p:cNvSpPr/>
-          <p:nvPr/>
-        </p:nvSpPr>
-        <p:spPr>
-          <a:xfrm>
-            <a:off x="6355080" y="2194560"/>
-            <a:ext cx="5166360" cy="4206240"/>
-          </a:xfrm>
-          <a:prstGeom prst="rect">
-            <a:avLst/>
-          </a:prstGeom>
-          <a:solidFill>
-            <a:srgbClr val="FFFFFF"/>
-          </a:solidFill>
-          <a:ln w="12700">
-            <a:solidFill>
-              <a:srgbClr val="E2E8F0"/>
-            </a:solidFill>
-            <a:prstDash val="solid"/>
-          </a:ln>
-          <a:effectLst>
-            <a:outerShdw sx="100000" sy="100000" kx="0" ky="0" algn="bl" rotWithShape="0" blurRad="152400" dist="38100" dir="5400000">
-              <a:srgbClr val="0F172A">
-                <a:alpha val="6000"/>
-              </a:srgbClr>
-            </a:outerShdw>
-          </a:effectLst>
-        </p:spPr>
-      </p:sp>
-      <p:sp>
-        <p:nvSpPr>
-          <p:cNvPr id="16" name="Shape 14"/>
-          <p:cNvSpPr/>
-          <p:nvPr/>
-        </p:nvSpPr>
-        <p:spPr>
-          <a:xfrm>
-            <a:off x="6355080" y="2194560"/>
-            <a:ext cx="5166360" cy="91440"/>
-          </a:xfrm>
-          <a:prstGeom prst="rect">
-            <a:avLst/>
-          </a:prstGeom>
-          <a:solidFill>
-            <a:srgbClr val="10B981"/>
-          </a:solidFill>
-          <a:ln/>
-        </p:spPr>
-      </p:sp>
-      <p:sp>
-        <p:nvSpPr>
-          <p:cNvPr id="17" name="Text 15"/>
-          <p:cNvSpPr/>
-          <p:nvPr/>
-        </p:nvSpPr>
-        <p:spPr>
-          <a:xfrm>
-            <a:off x="6720840" y="2468880"/>
-            <a:ext cx="4572000" cy="411480"/>
-          </a:xfrm>
-          <a:prstGeom prst="rect">
-            <a:avLst/>
-          </a:prstGeom>
-          <a:noFill/>
-          <a:ln/>
-        </p:spPr>
-        <p:txBody>
-          <a:bodyPr wrap="square" lIns="0" tIns="0" rIns="0" bIns="0" rtlCol="0" anchor="t"/>
-          <a:lstStyle/>
-          <a:p>
-            <a:pPr algn="l" indent="0" marL="0">
-              <a:buNone/>
-            </a:pPr>
-            <a:r>
-              <a:rPr lang="en-US" sz="1600" b="1" dirty="0">
-                <a:solidFill>
-                  <a:srgbClr val="1E293B"/>
-                </a:solidFill>
-                <a:latin typeface="Georgia" pitchFamily="34" charset="0"/>
-                <a:ea typeface="Georgia" pitchFamily="34" charset="-122"/>
-                <a:cs typeface="Georgia" pitchFamily="34" charset="-120"/>
-              </a:rPr>
-              <a:t>Effort &gt; activity, by construction</a:t>
-            </a:r>
-            <a:endParaRPr lang="en-US" sz="1600" dirty="0"/>
-          </a:p>
-        </p:txBody>
-      </p:sp>
-      <p:sp>
-        <p:nvSpPr>
-          <p:cNvPr id="18" name="Text 16"/>
-          <p:cNvSpPr/>
-          <p:nvPr/>
-        </p:nvSpPr>
-        <p:spPr>
-          <a:xfrm>
-            <a:off x="6720840" y="3017520"/>
-            <a:ext cx="4572000" cy="914400"/>
-          </a:xfrm>
-          <a:prstGeom prst="rect">
-            <a:avLst/>
-          </a:prstGeom>
-          <a:noFill/>
-          <a:ln/>
-        </p:spPr>
-        <p:txBody>
-          <a:bodyPr wrap="square" lIns="0" tIns="0" rIns="0" bIns="0" rtlCol="0" anchor="t"/>
-          <a:lstStyle/>
-          <a:p>
-            <a:pPr algn="l" indent="0" marL="0">
-              <a:buNone/>
-            </a:pPr>
-            <a:r>
-              <a:rPr lang="en-US" sz="3600" b="1" dirty="0">
-                <a:solidFill>
-                  <a:srgbClr val="10B981"/>
-                </a:solidFill>
-                <a:latin typeface="Georgia" pitchFamily="34" charset="0"/>
-                <a:ea typeface="Georgia" pitchFamily="34" charset="-122"/>
-                <a:cs typeface="Georgia" pitchFamily="34" charset="-120"/>
-              </a:rPr>
-              <a:t>p = 4.8 × 10⁻⁵</a:t>
-            </a:r>
-            <a:endParaRPr lang="en-US" sz="3600" dirty="0"/>
-          </a:p>
-        </p:txBody>
-      </p:sp>
-      <p:sp>
-        <p:nvSpPr>
-          <p:cNvPr id="19" name="Text 17"/>
-          <p:cNvSpPr/>
-          <p:nvPr/>
-        </p:nvSpPr>
-        <p:spPr>
-          <a:xfrm>
-            <a:off x="6720840" y="3977640"/>
-            <a:ext cx="4572000" cy="365760"/>
-          </a:xfrm>
-          <a:prstGeom prst="rect">
-            <a:avLst/>
-          </a:prstGeom>
-          <a:noFill/>
-          <a:ln/>
-        </p:spPr>
-        <p:txBody>
-          <a:bodyPr wrap="square" lIns="0" tIns="0" rIns="0" bIns="0" rtlCol="0" anchor="t"/>
-          <a:lstStyle/>
-          <a:p>
-            <a:pPr algn="l" indent="0" marL="0">
-              <a:buNone/>
-            </a:pPr>
-            <a:r>
-              <a:rPr lang="en-US" sz="1100" i="1" dirty="0">
-                <a:solidFill>
-                  <a:srgbClr val="64748B"/>
-                </a:solidFill>
-                <a:latin typeface="Calibri" pitchFamily="34" charset="0"/>
-                <a:ea typeface="Calibri" pitchFamily="34" charset="-122"/>
-                <a:cs typeface="Calibri" pitchFamily="34" charset="-120"/>
-              </a:rPr>
-              <a:t>Wilcoxon signed-rank, line-Gini vs commit-Gini</a:t>
-            </a:r>
-            <a:endParaRPr lang="en-US" sz="1100" dirty="0"/>
-          </a:p>
-        </p:txBody>
-      </p:sp>
-      <p:sp>
-        <p:nvSpPr>
-          <p:cNvPr id="20" name="Text 18"/>
-          <p:cNvSpPr/>
-          <p:nvPr/>
-        </p:nvSpPr>
-        <p:spPr>
-          <a:xfrm>
-            <a:off x="6720840" y="4389120"/>
-            <a:ext cx="4572000" cy="1371600"/>
-          </a:xfrm>
-          <a:prstGeom prst="rect">
-            <a:avLst/>
-          </a:prstGeom>
-          <a:noFill/>
-          <a:ln/>
-        </p:spPr>
-        <p:txBody>
-          <a:bodyPr wrap="square" rtlCol="0" anchor="t"/>
-          <a:lstStyle/>
-          <a:p>
-            <a:pPr algn="l" marL="342900" indent="-342900">
-              <a:spcAft>
-                <a:spcPts val="400"/>
-              </a:spcAft>
-              <a:buSzPct val="100000"/>
-              <a:buChar char="•"/>
-            </a:pPr>
-            <a:r>
-              <a:rPr lang="en-US" sz="1200" dirty="0">
-                <a:solidFill>
-                  <a:srgbClr val="1E293B"/>
-                </a:solidFill>
-                <a:latin typeface="Calibri" pitchFamily="34" charset="0"/>
-                <a:ea typeface="Calibri" pitchFamily="34" charset="-122"/>
-                <a:cs typeface="Calibri" pitchFamily="34" charset="-120"/>
-              </a:rPr>
-              <a:t>Line-Gini exceeds commit-Gini in 27 of 37 repos</a:t>
-            </a:r>
-            <a:endParaRPr lang="en-US" sz="1200" dirty="0"/>
-          </a:p>
-          <a:p>
-            <a:pPr algn="l" marL="342900" indent="-342900">
-              <a:spcAft>
-                <a:spcPts val="400"/>
-              </a:spcAft>
-              <a:buSzPct val="100000"/>
-              <a:buChar char="•"/>
-            </a:pPr>
-            <a:r>
-              <a:rPr lang="en-US" sz="1200" dirty="0">
-                <a:solidFill>
-                  <a:srgbClr val="1E293B"/>
-                </a:solidFill>
-                <a:latin typeface="Calibri" pitchFamily="34" charset="0"/>
-                <a:ea typeface="Calibri" pitchFamily="34" charset="-122"/>
-                <a:cs typeface="Calibri" pitchFamily="34" charset="-120"/>
-              </a:rPr>
-              <a:t>Mean Δ = +0.052 (sign test p = 1.6 × 10⁻⁴)</a:t>
-            </a:r>
-            <a:endParaRPr lang="en-US" sz="1200" dirty="0"/>
-          </a:p>
-          <a:p>
-            <a:pPr algn="l" marL="342900" indent="-342900">
-              <a:spcAft>
-                <a:spcPts val="400"/>
-              </a:spcAft>
-              <a:buSzPct val="100000"/>
-              <a:buChar char="•"/>
-            </a:pPr>
-            <a:r>
-              <a:rPr lang="en-US" sz="1200" dirty="0">
-                <a:solidFill>
-                  <a:srgbClr val="1E293B"/>
-                </a:solidFill>
-                <a:latin typeface="Calibri" pitchFamily="34" charset="0"/>
-                <a:ea typeface="Calibri" pitchFamily="34" charset="-122"/>
-                <a:cs typeface="Calibri" pitchFamily="34" charset="-120"/>
-              </a:rPr>
-              <a:t>Commit counts systematically under-estimate effort concentration</a:t>
-            </a:r>
-            <a:endParaRPr lang="en-US" sz="1200" dirty="0"/>
-          </a:p>
-        </p:txBody>
-      </p:sp>
-      <p:sp>
-        <p:nvSpPr>
-          <p:cNvPr id="21" name="Shape 19"/>
-          <p:cNvSpPr/>
-          <p:nvPr/>
-        </p:nvSpPr>
-        <p:spPr>
-          <a:xfrm>
-            <a:off x="6720840" y="5806440"/>
-            <a:ext cx="4572000" cy="0"/>
-          </a:xfrm>
-          <a:prstGeom prst="line">
-            <a:avLst/>
-          </a:prstGeom>
-          <a:noFill/>
-          <a:ln w="9525">
-            <a:solidFill>
-              <a:srgbClr val="E2E8F0"/>
-            </a:solidFill>
-            <a:prstDash val="solid"/>
-          </a:ln>
-        </p:spPr>
-      </p:sp>
-      <p:sp>
-        <p:nvSpPr>
-          <p:cNvPr id="22" name="Text 20"/>
-          <p:cNvSpPr/>
-          <p:nvPr/>
-        </p:nvSpPr>
-        <p:spPr>
-          <a:xfrm>
-            <a:off x="6720840" y="5897880"/>
-            <a:ext cx="4572000" cy="457200"/>
-          </a:xfrm>
-          <a:prstGeom prst="rect">
-            <a:avLst/>
-          </a:prstGeom>
-          <a:noFill/>
-          <a:ln/>
-        </p:spPr>
-        <p:txBody>
-          <a:bodyPr wrap="square" lIns="0" tIns="0" rIns="0" bIns="0" rtlCol="0" anchor="t"/>
-          <a:lstStyle/>
-          <a:p>
-            <a:pPr algn="l" indent="0" marL="0">
-              <a:buNone/>
-            </a:pPr>
-            <a:r>
-              <a:rPr lang="en-US" sz="1100" i="1" dirty="0">
-                <a:solidFill>
-                  <a:srgbClr val="0D9488"/>
-                </a:solidFill>
-                <a:latin typeface="Calibri" pitchFamily="34" charset="0"/>
-                <a:ea typeface="Calibri" pitchFamily="34" charset="-122"/>
-                <a:cs typeface="Calibri" pitchFamily="34" charset="-120"/>
-              </a:rPr>
-              <a:t>Implication: lines-changed should accompany commit-count health metrics.</a:t>
+              <a:t>At flagship scale the line-Gini saturates near 1 while the commit-Gini stays at 0.76–0.95 — large refactor commits dominate effort even when commit counts look balanced.</a:t>
             </a:r>
             <a:endParaRPr lang="en-US" sz="1100" dirty="0"/>
           </a:p>
@@ -5609,7 +5629,7 @@
                 <a:ea typeface="Calibri" pitchFamily="34" charset="-122"/>
                 <a:cs typeface="Calibri" pitchFamily="34" charset="-120"/>
               </a:rPr>
-              <a:t>07 / 08</a:t>
+              <a:t>07 / 09</a:t>
             </a:r>
             <a:endParaRPr lang="en-US" sz="1000" dirty="0"/>
           </a:p>
@@ -5623,8 +5643,8 @@
         </p:nvSpPr>
         <p:spPr>
           <a:xfrm>
-            <a:off x="8503920" y="502920"/>
-            <a:ext cx="3383280" cy="274320"/>
+            <a:off x="7589520" y="502920"/>
+            <a:ext cx="4297680" cy="274320"/>
           </a:xfrm>
           <a:prstGeom prst="rect">
             <a:avLst/>
@@ -5648,7 +5668,7 @@
                 <a:ea typeface="Calibri" pitchFamily="34" charset="-122"/>
                 <a:cs typeface="Calibri" pitchFamily="34" charset="-120"/>
               </a:rPr>
-              <a:t>WHAT WE OFFER</a:t>
+              <a:t>BACKLOGS · SURVIVAL</a:t>
             </a:r>
             <a:endParaRPr lang="en-US" sz="900" dirty="0"/>
           </a:p>
@@ -5656,13 +5676,141 @@
       </p:sp>
       <p:sp>
         <p:nvSpPr>
-          <p:cNvPr id="5" name="Text 3"/>
-          <p:cNvSpPr/>
-          <p:nvPr/>
-        </p:nvSpPr>
-        <p:spPr>
-          <a:xfrm>
-            <a:off x="640080" y="914400"/>
+          <p:cNvPr id="5" name="Shape 3"/>
+          <p:cNvSpPr/>
+          <p:nvPr/>
+        </p:nvSpPr>
+        <p:spPr>
+          <a:xfrm>
+            <a:off x="640080" y="868680"/>
+            <a:ext cx="1325880" cy="411480"/>
+          </a:xfrm>
+          <a:prstGeom prst="rect">
+            <a:avLst/>
+          </a:prstGeom>
+          <a:solidFill>
+            <a:srgbClr val="FEF3C7"/>
+          </a:solidFill>
+          <a:ln w="12700">
+            <a:solidFill>
+              <a:srgbClr val="F59E0B"/>
+            </a:solidFill>
+            <a:prstDash val="solid"/>
+          </a:ln>
+        </p:spPr>
+      </p:sp>
+      <p:sp>
+        <p:nvSpPr>
+          <p:cNvPr id="6" name="Text 4"/>
+          <p:cNvSpPr/>
+          <p:nvPr/>
+        </p:nvSpPr>
+        <p:spPr>
+          <a:xfrm>
+            <a:off x="640080" y="868680"/>
+            <a:ext cx="1325880" cy="411480"/>
+          </a:xfrm>
+          <a:prstGeom prst="rect">
+            <a:avLst/>
+          </a:prstGeom>
+          <a:noFill/>
+          <a:ln/>
+        </p:spPr>
+        <p:txBody>
+          <a:bodyPr wrap="square" lIns="0" tIns="0" rIns="0" bIns="0" rtlCol="0" anchor="ctr"/>
+          <a:lstStyle/>
+          <a:p>
+            <a:pPr algn="ctr" indent="0" marL="0">
+              <a:buNone/>
+            </a:pPr>
+            <a:r>
+              <a:rPr lang="en-US" sz="1000" b="1" spc="400" kern="0" dirty="0">
+                <a:solidFill>
+                  <a:srgbClr val="92400E"/>
+                </a:solidFill>
+                <a:latin typeface="Calibri" pitchFamily="34" charset="0"/>
+                <a:ea typeface="Calibri" pitchFamily="34" charset="-122"/>
+                <a:cs typeface="Calibri" pitchFamily="34" charset="-120"/>
+              </a:rPr>
+              <a:t>CHALLENGE 04</a:t>
+            </a:r>
+            <a:endParaRPr lang="en-US" sz="1000" dirty="0"/>
+          </a:p>
+        </p:txBody>
+      </p:sp>
+      <p:sp>
+        <p:nvSpPr>
+          <p:cNvPr id="7" name="Shape 5"/>
+          <p:cNvSpPr/>
+          <p:nvPr/>
+        </p:nvSpPr>
+        <p:spPr>
+          <a:xfrm>
+            <a:off x="2057400" y="868680"/>
+            <a:ext cx="1325880" cy="411480"/>
+          </a:xfrm>
+          <a:prstGeom prst="rect">
+            <a:avLst/>
+          </a:prstGeom>
+          <a:solidFill>
+            <a:srgbClr val="FEF3C7"/>
+          </a:solidFill>
+          <a:ln w="12700">
+            <a:solidFill>
+              <a:srgbClr val="F59E0B"/>
+            </a:solidFill>
+            <a:prstDash val="solid"/>
+          </a:ln>
+        </p:spPr>
+      </p:sp>
+      <p:sp>
+        <p:nvSpPr>
+          <p:cNvPr id="8" name="Text 6"/>
+          <p:cNvSpPr/>
+          <p:nvPr/>
+        </p:nvSpPr>
+        <p:spPr>
+          <a:xfrm>
+            <a:off x="2057400" y="868680"/>
+            <a:ext cx="1325880" cy="411480"/>
+          </a:xfrm>
+          <a:prstGeom prst="rect">
+            <a:avLst/>
+          </a:prstGeom>
+          <a:noFill/>
+          <a:ln/>
+        </p:spPr>
+        <p:txBody>
+          <a:bodyPr wrap="square" lIns="0" tIns="0" rIns="0" bIns="0" rtlCol="0" anchor="ctr"/>
+          <a:lstStyle/>
+          <a:p>
+            <a:pPr algn="ctr" indent="0" marL="0">
+              <a:buNone/>
+            </a:pPr>
+            <a:r>
+              <a:rPr lang="en-US" sz="1000" b="1" spc="400" kern="0" dirty="0">
+                <a:solidFill>
+                  <a:srgbClr val="92400E"/>
+                </a:solidFill>
+                <a:latin typeface="Calibri" pitchFamily="34" charset="0"/>
+                <a:ea typeface="Calibri" pitchFamily="34" charset="-122"/>
+                <a:cs typeface="Calibri" pitchFamily="34" charset="-120"/>
+              </a:rPr>
+              <a:t>CHALLENGE 05</a:t>
+            </a:r>
+            <a:endParaRPr lang="en-US" sz="1000" dirty="0"/>
+          </a:p>
+        </p:txBody>
+      </p:sp>
+      <p:sp>
+        <p:nvSpPr>
+          <p:cNvPr id="9" name="Text 7"/>
+          <p:cNvSpPr/>
+          <p:nvPr/>
+        </p:nvSpPr>
+        <p:spPr>
+          <a:xfrm>
+            <a:off x="640080" y="1417320"/>
             <a:ext cx="10881360" cy="640080"/>
           </a:xfrm>
           <a:prstGeom prst="rect">
@@ -5687,7 +5835,7 @@
                 <a:ea typeface="Georgia" pitchFamily="34" charset="-122"/>
                 <a:cs typeface="Georgia" pitchFamily="34" charset="-120"/>
               </a:rPr>
-              <a:t>What this paper offers colleagues</a:t>
+              <a:t>Backlogs accumulate. Survivors intensify.</a:t>
             </a:r>
             <a:endParaRPr lang="en-US" sz="2800" dirty="0"/>
           </a:p>
@@ -5695,53 +5843,14 @@
       </p:sp>
       <p:sp>
         <p:nvSpPr>
-          <p:cNvPr id="6" name="Text 4"/>
-          <p:cNvSpPr/>
-          <p:nvPr/>
-        </p:nvSpPr>
-        <p:spPr>
-          <a:xfrm>
-            <a:off x="640080" y="1554480"/>
-            <a:ext cx="10881360" cy="365760"/>
-          </a:xfrm>
-          <a:prstGeom prst="rect">
-            <a:avLst/>
-          </a:prstGeom>
-          <a:noFill/>
-          <a:ln/>
-        </p:spPr>
-        <p:txBody>
-          <a:bodyPr wrap="square" lIns="0" tIns="0" rIns="0" bIns="0" rtlCol="0" anchor="t"/>
-          <a:lstStyle/>
-          <a:p>
-            <a:pPr algn="l" indent="0" marL="0">
-              <a:buNone/>
-            </a:pPr>
-            <a:r>
-              <a:rPr lang="en-US" sz="1400" i="1" dirty="0">
-                <a:solidFill>
-                  <a:srgbClr val="64748B"/>
-                </a:solidFill>
-                <a:latin typeface="Calibri" pitchFamily="34" charset="0"/>
-                <a:ea typeface="Calibri" pitchFamily="34" charset="-122"/>
-                <a:cs typeface="Calibri" pitchFamily="34" charset="-120"/>
-              </a:rPr>
-              <a:t>Reusable artefacts, a quantitative case study, and a research direction.</a:t>
-            </a:r>
-            <a:endParaRPr lang="en-US" sz="1400" dirty="0"/>
-          </a:p>
-        </p:txBody>
-      </p:sp>
-      <p:sp>
-        <p:nvSpPr>
-          <p:cNvPr id="7" name="Shape 5"/>
-          <p:cNvSpPr/>
-          <p:nvPr/>
-        </p:nvSpPr>
-        <p:spPr>
-          <a:xfrm>
-            <a:off x="640080" y="2194560"/>
-            <a:ext cx="3611880" cy="3200400"/>
+          <p:cNvPr id="10" name="Shape 8"/>
+          <p:cNvSpPr/>
+          <p:nvPr/>
+        </p:nvSpPr>
+        <p:spPr>
+          <a:xfrm>
+            <a:off x="640080" y="2286000"/>
+            <a:ext cx="5212080" cy="4114800"/>
           </a:xfrm>
           <a:prstGeom prst="rect">
             <a:avLst/>
@@ -5766,27 +5875,27 @@
       </p:sp>
       <p:sp>
         <p:nvSpPr>
-          <p:cNvPr id="8" name="Shape 6"/>
-          <p:cNvSpPr/>
-          <p:nvPr/>
-        </p:nvSpPr>
-        <p:spPr>
-          <a:xfrm>
-            <a:off x="914400" y="2423160"/>
-            <a:ext cx="868680" cy="868680"/>
-          </a:xfrm>
-          <a:prstGeom prst="ellipse">
+          <p:cNvPr id="11" name="Shape 9"/>
+          <p:cNvSpPr/>
+          <p:nvPr/>
+        </p:nvSpPr>
+        <p:spPr>
+          <a:xfrm>
+            <a:off x="640080" y="2286000"/>
+            <a:ext cx="91440" cy="4114800"/>
+          </a:xfrm>
+          <a:prstGeom prst="rect">
             <a:avLst/>
           </a:prstGeom>
           <a:solidFill>
-            <a:srgbClr val="CCFBF1"/>
+            <a:srgbClr val="F59E0B"/>
           </a:solidFill>
           <a:ln/>
         </p:spPr>
       </p:sp>
       <p:pic>
         <p:nvPicPr>
-          <p:cNvPr id="9" name="Image 0" descr="preencoded.png">    </p:cNvPr>
+          <p:cNvPr id="12" name="Image 0" descr="preencoded.png">    </p:cNvPr>
           <p:cNvPicPr>
             <a:picLocks noChangeAspect="1"/>
           </p:cNvPicPr>
@@ -5800,7 +5909,7 @@
         </p:blipFill>
         <p:spPr>
           <a:xfrm>
-            <a:off x="1097280" y="2587752"/>
+            <a:off x="914400" y="2514600"/>
             <a:ext cx="502920" cy="502920"/>
           </a:xfrm>
           <a:prstGeom prst="rect">
@@ -5810,14 +5919,14 @@
       </p:pic>
       <p:sp>
         <p:nvSpPr>
-          <p:cNvPr id="10" name="Text 7"/>
-          <p:cNvSpPr/>
-          <p:nvPr/>
-        </p:nvSpPr>
-        <p:spPr>
-          <a:xfrm>
-            <a:off x="914400" y="3474720"/>
-            <a:ext cx="3108960" cy="548640"/>
+          <p:cNvPr id="13" name="Text 10"/>
+          <p:cNvSpPr/>
+          <p:nvPr/>
+        </p:nvSpPr>
+        <p:spPr>
+          <a:xfrm>
+            <a:off x="1554480" y="2606040"/>
+            <a:ext cx="4114800" cy="320040"/>
           </a:xfrm>
           <a:prstGeom prst="rect">
             <a:avLst/>
@@ -5833,30 +5942,69 @@
               <a:buNone/>
             </a:pPr>
             <a:r>
-              <a:rPr lang="en-US" sz="1700" b="1" dirty="0">
-                <a:solidFill>
-                  <a:srgbClr val="1E293B"/>
+              <a:rPr lang="en-US" sz="1100" b="1" spc="400" kern="0" dirty="0">
+                <a:solidFill>
+                  <a:srgbClr val="F59E0B"/>
+                </a:solidFill>
+                <a:latin typeface="Calibri" pitchFamily="34" charset="0"/>
+                <a:ea typeface="Calibri" pitchFamily="34" charset="-122"/>
+                <a:cs typeface="Calibri" pitchFamily="34" charset="-120"/>
+              </a:rPr>
+              <a:t>BACKLOGS</a:t>
+            </a:r>
+            <a:endParaRPr lang="en-US" sz="1100" dirty="0"/>
+          </a:p>
+        </p:txBody>
+      </p:sp>
+      <p:sp>
+        <p:nvSpPr>
+          <p:cNvPr id="14" name="Text 11"/>
+          <p:cNvSpPr/>
+          <p:nvPr/>
+        </p:nvSpPr>
+        <p:spPr>
+          <a:xfrm>
+            <a:off x="914400" y="3200400"/>
+            <a:ext cx="4572000" cy="822960"/>
+          </a:xfrm>
+          <a:prstGeom prst="rect">
+            <a:avLst/>
+          </a:prstGeom>
+          <a:noFill/>
+          <a:ln/>
+        </p:spPr>
+        <p:txBody>
+          <a:bodyPr wrap="square" lIns="0" tIns="0" rIns="0" bIns="0" rtlCol="0" anchor="t"/>
+          <a:lstStyle/>
+          <a:p>
+            <a:pPr algn="l" indent="0" marL="0">
+              <a:buNone/>
+            </a:pPr>
+            <a:r>
+              <a:rPr lang="en-US" sz="4800" b="1" dirty="0">
+                <a:solidFill>
+                  <a:srgbClr val="F59E0B"/>
                 </a:solidFill>
                 <a:latin typeface="Georgia" pitchFamily="34" charset="0"/>
                 <a:ea typeface="Georgia" pitchFamily="34" charset="-122"/>
                 <a:cs typeface="Georgia" pitchFamily="34" charset="-120"/>
               </a:rPr>
-              <a:t>An open toolchain</a:t>
-            </a:r>
-            <a:endParaRPr lang="en-US" sz="1700" dirty="0"/>
-          </a:p>
-        </p:txBody>
-      </p:sp>
-      <p:sp>
-        <p:nvSpPr>
-          <p:cNvPr id="11" name="Text 8"/>
+              <a:t>0.98</a:t>
+            </a:r>
+            <a:endParaRPr lang="en-US" sz="4800" dirty="0"/>
+          </a:p>
+        </p:txBody>
+      </p:sp>
+      <p:sp>
+        <p:nvSpPr>
+          <p:cNvPr id="15" name="Text 12"/>
           <p:cNvSpPr/>
           <p:nvPr/>
         </p:nvSpPr>
         <p:spPr>
           <a:xfrm>
             <a:off x="914400" y="4069080"/>
-            <a:ext cx="3108960" cy="1280160"/>
+            <a:ext cx="4572000" cy="365760"/>
           </a:xfrm>
           <a:prstGeom prst="rect">
             <a:avLst/>
@@ -5872,7 +6020,147 @@
               <a:buNone/>
             </a:pPr>
             <a:r>
-              <a:rPr lang="en-US" sz="1200" dirty="0">
+              <a:rPr lang="en-US" sz="1300" dirty="0">
+                <a:solidFill>
+                  <a:srgbClr val="1E293B"/>
+                </a:solidFill>
+                <a:latin typeface="Calibri" pitchFamily="34" charset="0"/>
+                <a:ea typeface="Calibri" pitchFamily="34" charset="-122"/>
+                <a:cs typeface="Calibri" pitchFamily="34" charset="-120"/>
+              </a:rPr>
+              <a:t>median stale-issue ratio (n=26 repos with open issues).</a:t>
+            </a:r>
+            <a:endParaRPr lang="en-US" sz="1300" dirty="0"/>
+          </a:p>
+        </p:txBody>
+      </p:sp>
+      <p:sp>
+        <p:nvSpPr>
+          <p:cNvPr id="16" name="Shape 13"/>
+          <p:cNvSpPr/>
+          <p:nvPr/>
+        </p:nvSpPr>
+        <p:spPr>
+          <a:xfrm>
+            <a:off x="914400" y="4526280"/>
+            <a:ext cx="4480560" cy="0"/>
+          </a:xfrm>
+          <a:prstGeom prst="line">
+            <a:avLst/>
+          </a:prstGeom>
+          <a:noFill/>
+          <a:ln w="6350">
+            <a:solidFill>
+              <a:srgbClr val="E2E8F0"/>
+            </a:solidFill>
+            <a:prstDash val="solid"/>
+          </a:ln>
+        </p:spPr>
+      </p:sp>
+      <p:sp>
+        <p:nvSpPr>
+          <p:cNvPr id="17" name="Text 14"/>
+          <p:cNvSpPr/>
+          <p:nvPr/>
+        </p:nvSpPr>
+        <p:spPr>
+          <a:xfrm>
+            <a:off x="914400" y="4663440"/>
+            <a:ext cx="4572000" cy="320040"/>
+          </a:xfrm>
+          <a:prstGeom prst="rect">
+            <a:avLst/>
+          </a:prstGeom>
+          <a:noFill/>
+          <a:ln/>
+        </p:spPr>
+        <p:txBody>
+          <a:bodyPr wrap="square" lIns="0" tIns="0" rIns="0" bIns="0" rtlCol="0" anchor="t"/>
+          <a:lstStyle/>
+          <a:p>
+            <a:pPr algn="l" indent="0" marL="0">
+              <a:buNone/>
+            </a:pPr>
+            <a:r>
+              <a:rPr lang="en-US" sz="1100" b="1" spc="200" kern="0" dirty="0">
+                <a:solidFill>
+                  <a:srgbClr val="0D9488"/>
+                </a:solidFill>
+                <a:latin typeface="Calibri" pitchFamily="34" charset="0"/>
+                <a:ea typeface="Calibri" pitchFamily="34" charset="-122"/>
+                <a:cs typeface="Calibri" pitchFamily="34" charset="-120"/>
+              </a:rPr>
+              <a:t>AND  no release discipline:</a:t>
+            </a:r>
+            <a:endParaRPr lang="en-US" sz="1100" dirty="0"/>
+          </a:p>
+        </p:txBody>
+      </p:sp>
+      <p:sp>
+        <p:nvSpPr>
+          <p:cNvPr id="18" name="Text 15"/>
+          <p:cNvSpPr/>
+          <p:nvPr/>
+        </p:nvSpPr>
+        <p:spPr>
+          <a:xfrm>
+            <a:off x="914400" y="4983480"/>
+            <a:ext cx="4754880" cy="411480"/>
+          </a:xfrm>
+          <a:prstGeom prst="rect">
+            <a:avLst/>
+          </a:prstGeom>
+          <a:noFill/>
+          <a:ln/>
+        </p:spPr>
+        <p:txBody>
+          <a:bodyPr wrap="square" lIns="0" tIns="0" rIns="0" bIns="0" rtlCol="0" anchor="t"/>
+          <a:lstStyle/>
+          <a:p>
+            <a:pPr algn="l" indent="0" marL="0">
+              <a:buNone/>
+            </a:pPr>
+            <a:r>
+              <a:rPr lang="en-US" sz="1400" b="1" dirty="0">
+                <a:solidFill>
+                  <a:srgbClr val="1E293B"/>
+                </a:solidFill>
+                <a:latin typeface="Calibri" pitchFamily="34" charset="0"/>
+                <a:ea typeface="Calibri" pitchFamily="34" charset="-122"/>
+                <a:cs typeface="Calibri" pitchFamily="34" charset="-120"/>
+              </a:rPr>
+              <a:t>20 of 37 repositories (54%) have never tagged a release.</a:t>
+            </a:r>
+            <a:endParaRPr lang="en-US" sz="1400" dirty="0"/>
+          </a:p>
+        </p:txBody>
+      </p:sp>
+      <p:sp>
+        <p:nvSpPr>
+          <p:cNvPr id="19" name="Text 16"/>
+          <p:cNvSpPr/>
+          <p:nvPr/>
+        </p:nvSpPr>
+        <p:spPr>
+          <a:xfrm>
+            <a:off x="914400" y="5440680"/>
+            <a:ext cx="4754880" cy="868680"/>
+          </a:xfrm>
+          <a:prstGeom prst="rect">
+            <a:avLst/>
+          </a:prstGeom>
+          <a:noFill/>
+          <a:ln/>
+        </p:spPr>
+        <p:txBody>
+          <a:bodyPr wrap="square" lIns="0" tIns="0" rIns="0" bIns="0" rtlCol="0" anchor="t"/>
+          <a:lstStyle/>
+          <a:p>
+            <a:pPr algn="l" indent="0" marL="0">
+              <a:buNone/>
+            </a:pPr>
+            <a:r>
+              <a:rPr lang="en-US" sz="1200" i="1" dirty="0">
                 <a:solidFill>
                   <a:srgbClr val="64748B"/>
                 </a:solidFill>
@@ -5880,7 +6168,7 @@
                 <a:ea typeface="Calibri" pitchFamily="34" charset="-122"/>
                 <a:cs typeface="Calibri" pitchFamily="34" charset="-120"/>
               </a:rPr>
-              <a:t>Python crawler with the triangulation built in. Per-metric coverage reporting. MIT-licensed, Zenodo-archived.</a:t>
+              <a:t>Including five projects more than 9 years old — a 15-year-old FOI platform, an 11-year-old polling-station service.</a:t>
             </a:r>
             <a:endParaRPr lang="en-US" sz="1200" dirty="0"/>
           </a:p>
@@ -5888,14 +6176,14 @@
       </p:sp>
       <p:sp>
         <p:nvSpPr>
-          <p:cNvPr id="12" name="Shape 9"/>
-          <p:cNvSpPr/>
-          <p:nvPr/>
-        </p:nvSpPr>
-        <p:spPr>
-          <a:xfrm>
-            <a:off x="4480560" y="2194560"/>
-            <a:ext cx="3611880" cy="3200400"/>
+          <p:cNvPr id="20" name="Shape 17"/>
+          <p:cNvSpPr/>
+          <p:nvPr/>
+        </p:nvSpPr>
+        <p:spPr>
+          <a:xfrm>
+            <a:off x="6309360" y="2286000"/>
+            <a:ext cx="5212080" cy="4114800"/>
           </a:xfrm>
           <a:prstGeom prst="rect">
             <a:avLst/>
@@ -5920,27 +6208,27 @@
       </p:sp>
       <p:sp>
         <p:nvSpPr>
-          <p:cNvPr id="13" name="Shape 10"/>
-          <p:cNvSpPr/>
-          <p:nvPr/>
-        </p:nvSpPr>
-        <p:spPr>
-          <a:xfrm>
-            <a:off x="4754880" y="2423160"/>
-            <a:ext cx="868680" cy="868680"/>
-          </a:xfrm>
-          <a:prstGeom prst="ellipse">
+          <p:cNvPr id="21" name="Shape 18"/>
+          <p:cNvSpPr/>
+          <p:nvPr/>
+        </p:nvSpPr>
+        <p:spPr>
+          <a:xfrm>
+            <a:off x="6309360" y="2286000"/>
+            <a:ext cx="91440" cy="4114800"/>
+          </a:xfrm>
+          <a:prstGeom prst="rect">
             <a:avLst/>
           </a:prstGeom>
           <a:solidFill>
-            <a:srgbClr val="CCFBF1"/>
+            <a:srgbClr val="0D9488"/>
           </a:solidFill>
           <a:ln/>
         </p:spPr>
       </p:sp>
       <p:pic>
         <p:nvPicPr>
-          <p:cNvPr id="14" name="Image 1" descr="preencoded.png">    </p:cNvPr>
+          <p:cNvPr id="22" name="Image 1" descr="preencoded.png">    </p:cNvPr>
           <p:cNvPicPr>
             <a:picLocks noChangeAspect="1"/>
           </p:cNvPicPr>
@@ -5954,7 +6242,7 @@
         </p:blipFill>
         <p:spPr>
           <a:xfrm>
-            <a:off x="4937760" y="2587752"/>
+            <a:off x="6583680" y="2514600"/>
             <a:ext cx="502920" cy="502920"/>
           </a:xfrm>
           <a:prstGeom prst="rect">
@@ -5964,14 +6252,14 @@
       </p:pic>
       <p:sp>
         <p:nvSpPr>
-          <p:cNvPr id="15" name="Text 11"/>
-          <p:cNvSpPr/>
-          <p:nvPr/>
-        </p:nvSpPr>
-        <p:spPr>
-          <a:xfrm>
-            <a:off x="4754880" y="3474720"/>
-            <a:ext cx="3108960" cy="548640"/>
+          <p:cNvPr id="23" name="Text 19"/>
+          <p:cNvSpPr/>
+          <p:nvPr/>
+        </p:nvSpPr>
+        <p:spPr>
+          <a:xfrm>
+            <a:off x="7223760" y="2606040"/>
+            <a:ext cx="4114800" cy="320040"/>
           </a:xfrm>
           <a:prstGeom prst="rect">
             <a:avLst/>
@@ -5987,114 +6275,23 @@
               <a:buNone/>
             </a:pPr>
             <a:r>
-              <a:rPr lang="en-US" sz="1700" b="1" dirty="0">
-                <a:solidFill>
-                  <a:srgbClr val="1E293B"/>
-                </a:solidFill>
-                <a:latin typeface="Georgia" pitchFamily="34" charset="0"/>
-                <a:ea typeface="Georgia" pitchFamily="34" charset="-122"/>
-                <a:cs typeface="Georgia" pitchFamily="34" charset="-120"/>
-              </a:rPr>
-              <a:t>A measurement-bias case study</a:t>
-            </a:r>
-            <a:endParaRPr lang="en-US" sz="1700" dirty="0"/>
-          </a:p>
-        </p:txBody>
-      </p:sp>
-      <p:sp>
-        <p:nvSpPr>
-          <p:cNvPr id="16" name="Text 12"/>
-          <p:cNvSpPr/>
-          <p:nvPr/>
-        </p:nvSpPr>
-        <p:spPr>
-          <a:xfrm>
-            <a:off x="4754880" y="4069080"/>
-            <a:ext cx="3108960" cy="1280160"/>
-          </a:xfrm>
-          <a:prstGeom prst="rect">
-            <a:avLst/>
-          </a:prstGeom>
-          <a:noFill/>
-          <a:ln/>
-        </p:spPr>
-        <p:txBody>
-          <a:bodyPr wrap="square" lIns="0" tIns="0" rIns="0" bIns="0" rtlCol="0" anchor="t"/>
-          <a:lstStyle/>
-          <a:p>
-            <a:pPr algn="l" indent="0" marL="0">
-              <a:buNone/>
-            </a:pPr>
-            <a:r>
-              <a:rPr lang="en-US" sz="1200" dirty="0">
-                <a:solidFill>
-                  <a:srgbClr val="64748B"/>
-                </a:solidFill>
-                <a:latin typeface="Calibri" pitchFamily="34" charset="0"/>
-                <a:ea typeface="Calibri" pitchFamily="34" charset="-122"/>
-                <a:cs typeface="Calibri" pitchFamily="34" charset="-120"/>
-              </a:rPr>
-              <a:t>Quantitative decomposition of how a coverage bias produces an apparently 'robust' published correlation.</a:t>
-            </a:r>
-            <a:endParaRPr lang="en-US" sz="1200" dirty="0"/>
-          </a:p>
-        </p:txBody>
-      </p:sp>
-      <p:sp>
-        <p:nvSpPr>
-          <p:cNvPr id="17" name="Shape 13"/>
-          <p:cNvSpPr/>
-          <p:nvPr/>
-        </p:nvSpPr>
-        <p:spPr>
-          <a:xfrm>
-            <a:off x="8321040" y="2194560"/>
-            <a:ext cx="3611880" cy="3200400"/>
-          </a:xfrm>
-          <a:prstGeom prst="rect">
-            <a:avLst/>
-          </a:prstGeom>
-          <a:solidFill>
-            <a:srgbClr val="FFFFFF"/>
-          </a:solidFill>
-          <a:ln w="12700">
-            <a:solidFill>
-              <a:srgbClr val="E2E8F0"/>
-            </a:solidFill>
-            <a:prstDash val="solid"/>
-          </a:ln>
-          <a:effectLst>
-            <a:outerShdw sx="100000" sy="100000" kx="0" ky="0" algn="bl" rotWithShape="0" blurRad="152400" dist="38100" dir="5400000">
-              <a:srgbClr val="0F172A">
-                <a:alpha val="6000"/>
-              </a:srgbClr>
-            </a:outerShdw>
-          </a:effectLst>
-        </p:spPr>
-      </p:sp>
-      <p:sp>
-        <p:nvSpPr>
-          <p:cNvPr id="18" name="Shape 14"/>
-          <p:cNvSpPr/>
-          <p:nvPr/>
-        </p:nvSpPr>
-        <p:spPr>
-          <a:xfrm>
-            <a:off x="8595360" y="2423160"/>
-            <a:ext cx="868680" cy="868680"/>
-          </a:xfrm>
-          <a:prstGeom prst="ellipse">
-            <a:avLst/>
-          </a:prstGeom>
-          <a:solidFill>
-            <a:srgbClr val="CCFBF1"/>
-          </a:solidFill>
-          <a:ln/>
-        </p:spPr>
+              <a:rPr lang="en-US" sz="1100" b="1" spc="400" kern="0" dirty="0">
+                <a:solidFill>
+                  <a:srgbClr val="0D9488"/>
+                </a:solidFill>
+                <a:latin typeface="Calibri" pitchFamily="34" charset="0"/>
+                <a:ea typeface="Calibri" pitchFamily="34" charset="-122"/>
+                <a:cs typeface="Calibri" pitchFamily="34" charset="-120"/>
+              </a:rPr>
+              <a:t>THE SURVIVOR PARADOX</a:t>
+            </a:r>
+            <a:endParaRPr lang="en-US" sz="1100" dirty="0"/>
+          </a:p>
+        </p:txBody>
       </p:sp>
       <p:pic>
         <p:nvPicPr>
-          <p:cNvPr id="19" name="Image 2" descr="preencoded.png">    </p:cNvPr>
+          <p:cNvPr id="24" name="Image 2" descr="../figures/fig_activity_vs_age.png">    </p:cNvPr>
           <p:cNvPicPr>
             <a:picLocks noChangeAspect="1"/>
           </p:cNvPicPr>
@@ -6108,8 +6305,8 @@
         </p:blipFill>
         <p:spPr>
           <a:xfrm>
-            <a:off x="8778240" y="2587752"/>
-            <a:ext cx="502920" cy="502920"/>
+            <a:off x="6583680" y="3154680"/>
+            <a:ext cx="4754880" cy="2286000"/>
           </a:xfrm>
           <a:prstGeom prst="rect">
             <a:avLst/>
@@ -6118,14 +6315,14 @@
       </p:pic>
       <p:sp>
         <p:nvSpPr>
-          <p:cNvPr id="20" name="Text 15"/>
-          <p:cNvSpPr/>
-          <p:nvPr/>
-        </p:nvSpPr>
-        <p:spPr>
-          <a:xfrm>
-            <a:off x="8595360" y="3474720"/>
-            <a:ext cx="3108960" cy="548640"/>
+          <p:cNvPr id="25" name="Text 20"/>
+          <p:cNvSpPr/>
+          <p:nvPr/>
+        </p:nvSpPr>
+        <p:spPr>
+          <a:xfrm>
+            <a:off x="6583680" y="5532120"/>
+            <a:ext cx="4754880" cy="822960"/>
           </a:xfrm>
           <a:prstGeom prst="rect">
             <a:avLst/>
@@ -6141,46 +6338,7 @@
               <a:buNone/>
             </a:pPr>
             <a:r>
-              <a:rPr lang="en-US" sz="1700" b="1" dirty="0">
-                <a:solidFill>
-                  <a:srgbClr val="1E293B"/>
-                </a:solidFill>
-                <a:latin typeface="Georgia" pitchFamily="34" charset="0"/>
-                <a:ea typeface="Georgia" pitchFamily="34" charset="-122"/>
-                <a:cs typeface="Georgia" pitchFamily="34" charset="-120"/>
-              </a:rPr>
-              <a:t>A research direction</a:t>
-            </a:r>
-            <a:endParaRPr lang="en-US" sz="1700" dirty="0"/>
-          </a:p>
-        </p:txBody>
-      </p:sp>
-      <p:sp>
-        <p:nvSpPr>
-          <p:cNvPr id="21" name="Text 16"/>
-          <p:cNvSpPr/>
-          <p:nvPr/>
-        </p:nvSpPr>
-        <p:spPr>
-          <a:xfrm>
-            <a:off x="8595360" y="4069080"/>
-            <a:ext cx="3108960" cy="1280160"/>
-          </a:xfrm>
-          <a:prstGeom prst="rect">
-            <a:avLst/>
-          </a:prstGeom>
-          <a:noFill/>
-          <a:ln/>
-        </p:spPr>
-        <p:txBody>
-          <a:bodyPr wrap="square" lIns="0" tIns="0" rIns="0" bIns="0" rtlCol="0" anchor="t"/>
-          <a:lstStyle/>
-          <a:p>
-            <a:pPr algn="l" indent="0" marL="0">
-              <a:buNone/>
-            </a:pPr>
-            <a:r>
-              <a:rPr lang="en-US" sz="1200" dirty="0">
+              <a:rPr lang="en-US" sz="1100" i="1" dirty="0">
                 <a:solidFill>
                   <a:srgbClr val="64748B"/>
                 </a:solidFill>
@@ -6188,82 +6346,9 @@
                 <a:ea typeface="Calibri" pitchFamily="34" charset="-122"/>
                 <a:cs typeface="Calibri" pitchFamily="34" charset="-120"/>
               </a:rPr>
-              <a:t>Systematic coverage-bias audit of CHAOSS-aligned metrics. Candidate intervention designs for civic-tech sustainability.</a:t>
-            </a:r>
-            <a:endParaRPr lang="en-US" sz="1200" dirty="0"/>
-          </a:p>
-        </p:txBody>
-      </p:sp>
-      <p:sp>
-        <p:nvSpPr>
-          <p:cNvPr id="22" name="Shape 17"/>
-          <p:cNvSpPr/>
-          <p:nvPr/>
-        </p:nvSpPr>
-        <p:spPr>
-          <a:xfrm>
-            <a:off x="640080" y="5715000"/>
-            <a:ext cx="10881360" cy="777240"/>
-          </a:xfrm>
-          <a:prstGeom prst="rect">
-            <a:avLst/>
-          </a:prstGeom>
-          <a:solidFill>
-            <a:srgbClr val="0F172A"/>
-          </a:solidFill>
-          <a:ln/>
-        </p:spPr>
-      </p:sp>
-      <p:sp>
-        <p:nvSpPr>
-          <p:cNvPr id="23" name="Text 18"/>
-          <p:cNvSpPr/>
-          <p:nvPr/>
-        </p:nvSpPr>
-        <p:spPr>
-          <a:xfrm>
-            <a:off x="868680" y="5715000"/>
-            <a:ext cx="10424160" cy="777240"/>
-          </a:xfrm>
-          <a:prstGeom prst="rect">
-            <a:avLst/>
-          </a:prstGeom>
-          <a:noFill/>
-          <a:ln/>
-        </p:spPr>
-        <p:txBody>
-          <a:bodyPr wrap="square" lIns="0" tIns="0" rIns="0" bIns="0" rtlCol="0" anchor="ctr"/>
-          <a:lstStyle/>
-          <a:p>
-            <a:pPr algn="l" indent="0" marL="0">
-              <a:buNone/>
-            </a:pPr>
-            <a:r>
-              <a:rPr lang="en-US" sz="1300" b="1" dirty="0">
-                <a:solidFill>
-                  <a:srgbClr val="14B8A6"/>
-                </a:solidFill>
-                <a:latin typeface="Calibri" pitchFamily="34" charset="0"/>
-                <a:ea typeface="Calibri" pitchFamily="34" charset="-122"/>
-                <a:cs typeface="Calibri" pitchFamily="34" charset="-120"/>
-              </a:rPr>
-              <a:t>Where I'd love your input:  </a:t>
-            </a:r>
-            <a:pPr algn="l" indent="0" marL="0">
-              <a:buNone/>
-            </a:pPr>
-            <a:r>
-              <a:rPr lang="en-US" sz="1300" dirty="0">
-                <a:solidFill>
-                  <a:srgbClr val="FFFFFF"/>
-                </a:solidFill>
-                <a:latin typeface="Calibri" pitchFamily="34" charset="0"/>
-                <a:ea typeface="Calibri" pitchFamily="34" charset="-122"/>
-                <a:cs typeface="Calibri" pitchFamily="34" charset="-120"/>
-              </a:rPr>
-              <a:t>framing of the bias story · recent (2023–25) OSS-health refs · candidate metrics for the audit · second-coder for IRR</a:t>
-            </a:r>
-            <a:endParaRPr lang="en-US" sz="1300" dirty="0"/>
+              <a:t>Median weekly commits rise with project age — but the projects that died aren't in this sample. Survivor bias, not health.</a:t>
+            </a:r>
+            <a:endParaRPr lang="en-US" sz="1100" dirty="0"/>
           </a:p>
         </p:txBody>
       </p:sp>
@@ -6278,6 +6363,522 @@
 <file path=ppt/slides/slide8.xml><?xml version="1.0" encoding="utf-8"?>
 <p:sld xmlns:a="http://schemas.openxmlformats.org/drawingml/2006/main" xmlns:r="http://schemas.openxmlformats.org/officeDocument/2006/relationships" xmlns:p="http://schemas.openxmlformats.org/presentationml/2006/main">
   <p:cSld name="Slide 8">
+    <p:bg>
+      <p:bgPr>
+        <a:solidFill>
+          <a:srgbClr val="F8FAFC"/>
+        </a:solidFill>
+      </p:bgPr>
+    </p:bg>
+    <p:spTree>
+      <p:nvGrpSpPr>
+        <p:cNvPr id="1" name=""/>
+        <p:cNvGrpSpPr/>
+        <p:nvPr/>
+      </p:nvGrpSpPr>
+      <p:grpSpPr>
+        <a:xfrm>
+          <a:off x="0" y="0"/>
+          <a:ext cx="0" cy="0"/>
+          <a:chOff x="0" y="0"/>
+          <a:chExt cx="0" cy="0"/>
+        </a:xfrm>
+      </p:grpSpPr>
+      <p:sp>
+        <p:nvSpPr>
+          <p:cNvPr id="2" name="Shape 0"/>
+          <p:cNvSpPr/>
+          <p:nvPr/>
+        </p:nvSpPr>
+        <p:spPr>
+          <a:xfrm>
+            <a:off x="0" y="0"/>
+            <a:ext cx="320040" cy="1097280"/>
+          </a:xfrm>
+          <a:prstGeom prst="rect">
+            <a:avLst/>
+          </a:prstGeom>
+          <a:solidFill>
+            <a:srgbClr val="0D9488"/>
+          </a:solidFill>
+          <a:ln/>
+        </p:spPr>
+      </p:sp>
+      <p:sp>
+        <p:nvSpPr>
+          <p:cNvPr id="3" name="Text 1"/>
+          <p:cNvSpPr/>
+          <p:nvPr/>
+        </p:nvSpPr>
+        <p:spPr>
+          <a:xfrm>
+            <a:off x="10789920" y="274320"/>
+            <a:ext cx="1097280" cy="274320"/>
+          </a:xfrm>
+          <a:prstGeom prst="rect">
+            <a:avLst/>
+          </a:prstGeom>
+          <a:noFill/>
+          <a:ln/>
+        </p:spPr>
+        <p:txBody>
+          <a:bodyPr wrap="square" lIns="0" tIns="0" rIns="0" bIns="0" rtlCol="0" anchor="t"/>
+          <a:lstStyle/>
+          <a:p>
+            <a:pPr algn="r" indent="0" marL="0">
+              <a:buNone/>
+            </a:pPr>
+            <a:r>
+              <a:rPr lang="en-US" sz="1000" spc="200" kern="0" dirty="0">
+                <a:solidFill>
+                  <a:srgbClr val="64748B"/>
+                </a:solidFill>
+                <a:latin typeface="Calibri" pitchFamily="34" charset="0"/>
+                <a:ea typeface="Calibri" pitchFamily="34" charset="-122"/>
+                <a:cs typeface="Calibri" pitchFamily="34" charset="-120"/>
+              </a:rPr>
+              <a:t>08 / 09</a:t>
+            </a:r>
+            <a:endParaRPr lang="en-US" sz="1000" dirty="0"/>
+          </a:p>
+        </p:txBody>
+      </p:sp>
+      <p:sp>
+        <p:nvSpPr>
+          <p:cNvPr id="4" name="Text 2"/>
+          <p:cNvSpPr/>
+          <p:nvPr/>
+        </p:nvSpPr>
+        <p:spPr>
+          <a:xfrm>
+            <a:off x="7589520" y="502920"/>
+            <a:ext cx="4297680" cy="274320"/>
+          </a:xfrm>
+          <a:prstGeom prst="rect">
+            <a:avLst/>
+          </a:prstGeom>
+          <a:noFill/>
+          <a:ln/>
+        </p:spPr>
+        <p:txBody>
+          <a:bodyPr wrap="square" lIns="0" tIns="0" rIns="0" bIns="0" rtlCol="0" anchor="t"/>
+          <a:lstStyle/>
+          <a:p>
+            <a:pPr algn="r" indent="0" marL="0">
+              <a:buNone/>
+            </a:pPr>
+            <a:r>
+              <a:rPr lang="en-US" sz="900" b="1" spc="400" kern="0" dirty="0">
+                <a:solidFill>
+                  <a:srgbClr val="0D9488"/>
+                </a:solidFill>
+                <a:latin typeface="Calibri" pitchFamily="34" charset="0"/>
+                <a:ea typeface="Calibri" pitchFamily="34" charset="-122"/>
+                <a:cs typeface="Calibri" pitchFamily="34" charset="-120"/>
+              </a:rPr>
+              <a:t>CROSS-PROJECT ECOSYSTEM</a:t>
+            </a:r>
+            <a:endParaRPr lang="en-US" sz="900" dirty="0"/>
+          </a:p>
+        </p:txBody>
+      </p:sp>
+      <p:sp>
+        <p:nvSpPr>
+          <p:cNvPr id="5" name="Shape 3"/>
+          <p:cNvSpPr/>
+          <p:nvPr/>
+        </p:nvSpPr>
+        <p:spPr>
+          <a:xfrm>
+            <a:off x="640080" y="868680"/>
+            <a:ext cx="1325880" cy="411480"/>
+          </a:xfrm>
+          <a:prstGeom prst="rect">
+            <a:avLst/>
+          </a:prstGeom>
+          <a:solidFill>
+            <a:srgbClr val="FEF3C7"/>
+          </a:solidFill>
+          <a:ln w="12700">
+            <a:solidFill>
+              <a:srgbClr val="F59E0B"/>
+            </a:solidFill>
+            <a:prstDash val="solid"/>
+          </a:ln>
+        </p:spPr>
+      </p:sp>
+      <p:sp>
+        <p:nvSpPr>
+          <p:cNvPr id="6" name="Text 4"/>
+          <p:cNvSpPr/>
+          <p:nvPr/>
+        </p:nvSpPr>
+        <p:spPr>
+          <a:xfrm>
+            <a:off x="640080" y="868680"/>
+            <a:ext cx="1325880" cy="411480"/>
+          </a:xfrm>
+          <a:prstGeom prst="rect">
+            <a:avLst/>
+          </a:prstGeom>
+          <a:noFill/>
+          <a:ln/>
+        </p:spPr>
+        <p:txBody>
+          <a:bodyPr wrap="square" lIns="0" tIns="0" rIns="0" bIns="0" rtlCol="0" anchor="ctr"/>
+          <a:lstStyle/>
+          <a:p>
+            <a:pPr algn="ctr" indent="0" marL="0">
+              <a:buNone/>
+            </a:pPr>
+            <a:r>
+              <a:rPr lang="en-US" sz="1000" b="1" spc="400" kern="0" dirty="0">
+                <a:solidFill>
+                  <a:srgbClr val="92400E"/>
+                </a:solidFill>
+                <a:latin typeface="Calibri" pitchFamily="34" charset="0"/>
+                <a:ea typeface="Calibri" pitchFamily="34" charset="-122"/>
+                <a:cs typeface="Calibri" pitchFamily="34" charset="-120"/>
+              </a:rPr>
+              <a:t>CHALLENGE 06</a:t>
+            </a:r>
+            <a:endParaRPr lang="en-US" sz="1000" dirty="0"/>
+          </a:p>
+        </p:txBody>
+      </p:sp>
+      <p:sp>
+        <p:nvSpPr>
+          <p:cNvPr id="7" name="Text 5"/>
+          <p:cNvSpPr/>
+          <p:nvPr/>
+        </p:nvSpPr>
+        <p:spPr>
+          <a:xfrm>
+            <a:off x="640080" y="1417320"/>
+            <a:ext cx="10881360" cy="640080"/>
+          </a:xfrm>
+          <a:prstGeom prst="rect">
+            <a:avLst/>
+          </a:prstGeom>
+          <a:noFill/>
+          <a:ln/>
+        </p:spPr>
+        <p:txBody>
+          <a:bodyPr wrap="square" lIns="0" tIns="0" rIns="0" bIns="0" rtlCol="0" anchor="t"/>
+          <a:lstStyle/>
+          <a:p>
+            <a:pPr algn="l" indent="0" marL="0">
+              <a:buNone/>
+            </a:pPr>
+            <a:r>
+              <a:rPr lang="en-US" sz="2800" b="1" dirty="0">
+                <a:solidFill>
+                  <a:srgbClr val="1E293B"/>
+                </a:solidFill>
+                <a:latin typeface="Georgia" pitchFamily="34" charset="0"/>
+                <a:ea typeface="Georgia" pitchFamily="34" charset="-122"/>
+                <a:cs typeface="Georgia" pitchFamily="34" charset="-120"/>
+              </a:rPr>
+              <a:t>Cross-project work happens inside umbrella networks.</a:t>
+            </a:r>
+            <a:endParaRPr lang="en-US" sz="2800" dirty="0"/>
+          </a:p>
+        </p:txBody>
+      </p:sp>
+      <p:sp>
+        <p:nvSpPr>
+          <p:cNvPr id="8" name="Text 6"/>
+          <p:cNvSpPr/>
+          <p:nvPr/>
+        </p:nvSpPr>
+        <p:spPr>
+          <a:xfrm>
+            <a:off x="640080" y="2286000"/>
+            <a:ext cx="5029200" cy="1280160"/>
+          </a:xfrm>
+          <a:prstGeom prst="rect">
+            <a:avLst/>
+          </a:prstGeom>
+          <a:noFill/>
+          <a:ln/>
+        </p:spPr>
+        <p:txBody>
+          <a:bodyPr wrap="square" lIns="0" tIns="0" rIns="0" bIns="0" rtlCol="0" anchor="t"/>
+          <a:lstStyle/>
+          <a:p>
+            <a:pPr algn="l" indent="0" marL="0">
+              <a:buNone/>
+            </a:pPr>
+            <a:r>
+              <a:rPr lang="en-US" sz="11000" b="1" dirty="0">
+                <a:solidFill>
+                  <a:srgbClr val="F59E0B"/>
+                </a:solidFill>
+                <a:latin typeface="Georgia" pitchFamily="34" charset="0"/>
+                <a:ea typeface="Georgia" pitchFamily="34" charset="-122"/>
+                <a:cs typeface="Georgia" pitchFamily="34" charset="-120"/>
+              </a:rPr>
+              <a:t>12.3%</a:t>
+            </a:r>
+            <a:endParaRPr lang="en-US" sz="11000" dirty="0"/>
+          </a:p>
+        </p:txBody>
+      </p:sp>
+      <p:sp>
+        <p:nvSpPr>
+          <p:cNvPr id="9" name="Text 7"/>
+          <p:cNvSpPr/>
+          <p:nvPr/>
+        </p:nvSpPr>
+        <p:spPr>
+          <a:xfrm>
+            <a:off x="640080" y="3657600"/>
+            <a:ext cx="5029200" cy="411480"/>
+          </a:xfrm>
+          <a:prstGeom prst="rect">
+            <a:avLst/>
+          </a:prstGeom>
+          <a:noFill/>
+          <a:ln/>
+        </p:spPr>
+        <p:txBody>
+          <a:bodyPr wrap="square" lIns="0" tIns="0" rIns="0" bIns="0" rtlCol="0" anchor="t"/>
+          <a:lstStyle/>
+          <a:p>
+            <a:pPr algn="l" indent="0" marL="0">
+              <a:buNone/>
+            </a:pPr>
+            <a:r>
+              <a:rPr lang="en-US" sz="1500" b="1" dirty="0">
+                <a:solidFill>
+                  <a:srgbClr val="1E293B"/>
+                </a:solidFill>
+                <a:latin typeface="Calibri" pitchFamily="34" charset="0"/>
+                <a:ea typeface="Calibri" pitchFamily="34" charset="-122"/>
+                <a:cs typeface="Calibri" pitchFamily="34" charset="-120"/>
+              </a:rPr>
+              <a:t>of contributors are active in ≥ 2 panel projects.</a:t>
+            </a:r>
+            <a:endParaRPr lang="en-US" sz="1500" dirty="0"/>
+          </a:p>
+        </p:txBody>
+      </p:sp>
+      <p:sp>
+        <p:nvSpPr>
+          <p:cNvPr id="10" name="Text 8"/>
+          <p:cNvSpPr/>
+          <p:nvPr/>
+        </p:nvSpPr>
+        <p:spPr>
+          <a:xfrm>
+            <a:off x="640080" y="4069080"/>
+            <a:ext cx="5029200" cy="365760"/>
+          </a:xfrm>
+          <a:prstGeom prst="rect">
+            <a:avLst/>
+          </a:prstGeom>
+          <a:noFill/>
+          <a:ln/>
+        </p:spPr>
+        <p:txBody>
+          <a:bodyPr wrap="square" lIns="0" tIns="0" rIns="0" bIns="0" rtlCol="0" anchor="t"/>
+          <a:lstStyle/>
+          <a:p>
+            <a:pPr algn="l" indent="0" marL="0">
+              <a:buNone/>
+            </a:pPr>
+            <a:r>
+              <a:rPr lang="en-US" sz="1200" i="1" dirty="0">
+                <a:solidFill>
+                  <a:srgbClr val="64748B"/>
+                </a:solidFill>
+                <a:latin typeface="Calibri" pitchFamily="34" charset="0"/>
+                <a:ea typeface="Calibri" pitchFamily="34" charset="-122"/>
+                <a:cs typeface="Calibri" pitchFamily="34" charset="-120"/>
+              </a:rPr>
+              <a:t>63 of 511 total contributors (59 of 498 humans).</a:t>
+            </a:r>
+            <a:endParaRPr lang="en-US" sz="1200" dirty="0"/>
+          </a:p>
+        </p:txBody>
+      </p:sp>
+      <p:sp>
+        <p:nvSpPr>
+          <p:cNvPr id="11" name="Shape 9"/>
+          <p:cNvSpPr/>
+          <p:nvPr/>
+        </p:nvSpPr>
+        <p:spPr>
+          <a:xfrm>
+            <a:off x="640080" y="4663440"/>
+            <a:ext cx="5029200" cy="1737360"/>
+          </a:xfrm>
+          <a:prstGeom prst="rect">
+            <a:avLst/>
+          </a:prstGeom>
+          <a:solidFill>
+            <a:srgbClr val="CCFBF1"/>
+          </a:solidFill>
+          <a:ln w="12700">
+            <a:solidFill>
+              <a:srgbClr val="0D9488"/>
+            </a:solidFill>
+            <a:prstDash val="solid"/>
+          </a:ln>
+        </p:spPr>
+      </p:sp>
+      <p:sp>
+        <p:nvSpPr>
+          <p:cNvPr id="12" name="Text 10"/>
+          <p:cNvSpPr/>
+          <p:nvPr/>
+        </p:nvSpPr>
+        <p:spPr>
+          <a:xfrm>
+            <a:off x="822960" y="4800600"/>
+            <a:ext cx="4663440" cy="274320"/>
+          </a:xfrm>
+          <a:prstGeom prst="rect">
+            <a:avLst/>
+          </a:prstGeom>
+          <a:noFill/>
+          <a:ln/>
+        </p:spPr>
+        <p:txBody>
+          <a:bodyPr wrap="square" lIns="0" tIns="0" rIns="0" bIns="0" rtlCol="0" anchor="t"/>
+          <a:lstStyle/>
+          <a:p>
+            <a:pPr algn="l" indent="0" marL="0">
+              <a:buNone/>
+            </a:pPr>
+            <a:r>
+              <a:rPr lang="en-US" sz="1000" b="1" spc="400" kern="0" dirty="0">
+                <a:solidFill>
+                  <a:srgbClr val="065F46"/>
+                </a:solidFill>
+                <a:latin typeface="Calibri" pitchFamily="34" charset="0"/>
+                <a:ea typeface="Calibri" pitchFamily="34" charset="-122"/>
+                <a:cs typeface="Calibri" pitchFamily="34" charset="-120"/>
+              </a:rPr>
+              <a:t>WHO THE CIVIC-TECH CONTRIBUTOR CLASS IS</a:t>
+            </a:r>
+            <a:endParaRPr lang="en-US" sz="1000" dirty="0"/>
+          </a:p>
+        </p:txBody>
+      </p:sp>
+      <p:sp>
+        <p:nvSpPr>
+          <p:cNvPr id="13" name="Text 11"/>
+          <p:cNvSpPr/>
+          <p:nvPr/>
+        </p:nvSpPr>
+        <p:spPr>
+          <a:xfrm>
+            <a:off x="822960" y="5120640"/>
+            <a:ext cx="4663440" cy="1188720"/>
+          </a:xfrm>
+          <a:prstGeom prst="rect">
+            <a:avLst/>
+          </a:prstGeom>
+          <a:noFill/>
+          <a:ln/>
+        </p:spPr>
+        <p:txBody>
+          <a:bodyPr wrap="square" lIns="0" tIns="0" rIns="0" bIns="0" rtlCol="0" anchor="t"/>
+          <a:lstStyle/>
+          <a:p>
+            <a:pPr algn="l" indent="0" marL="0">
+              <a:buNone/>
+            </a:pPr>
+            <a:r>
+              <a:rPr lang="en-US" sz="1200" dirty="0">
+                <a:solidFill>
+                  <a:srgbClr val="065F46"/>
+                </a:solidFill>
+                <a:latin typeface="Calibri" pitchFamily="34" charset="0"/>
+                <a:ea typeface="Calibri" pitchFamily="34" charset="-122"/>
+                <a:cs typeface="Calibri" pitchFamily="34" charset="-120"/>
+              </a:rPr>
+              <a:t>Code for Africa supplies the four most-cross-project humans. Code for America and Democracy Club contribute others. The ecosystem that exists is organisational, not topic-wide.</a:t>
+            </a:r>
+            <a:endParaRPr lang="en-US" sz="1200" dirty="0"/>
+          </a:p>
+        </p:txBody>
+      </p:sp>
+      <p:pic>
+        <p:nvPicPr>
+          <p:cNvPr id="14" name="Image 0" descr="../figures/fig_cross_project.png">    </p:cNvPr>
+          <p:cNvPicPr>
+            <a:picLocks noChangeAspect="1"/>
+          </p:cNvPicPr>
+          <p:nvPr/>
+        </p:nvPicPr>
+        <p:blipFill>
+          <a:blip r:embed="rId1"/>
+          <a:stretch>
+            <a:fillRect/>
+          </a:stretch>
+        </p:blipFill>
+        <p:spPr>
+          <a:xfrm>
+            <a:off x="6035040" y="2194560"/>
+            <a:ext cx="5669280" cy="4114800"/>
+          </a:xfrm>
+          <a:prstGeom prst="rect">
+            <a:avLst/>
+          </a:prstGeom>
+        </p:spPr>
+      </p:pic>
+      <p:sp>
+        <p:nvSpPr>
+          <p:cNvPr id="15" name="Text 12"/>
+          <p:cNvSpPr/>
+          <p:nvPr/>
+        </p:nvSpPr>
+        <p:spPr>
+          <a:xfrm>
+            <a:off x="6035040" y="6355080"/>
+            <a:ext cx="5669280" cy="365760"/>
+          </a:xfrm>
+          <a:prstGeom prst="rect">
+            <a:avLst/>
+          </a:prstGeom>
+          <a:noFill/>
+          <a:ln/>
+        </p:spPr>
+        <p:txBody>
+          <a:bodyPr wrap="square" lIns="0" tIns="0" rIns="0" bIns="0" rtlCol="0" anchor="t"/>
+          <a:lstStyle/>
+          <a:p>
+            <a:pPr algn="l" indent="0" marL="0">
+              <a:buNone/>
+            </a:pPr>
+            <a:r>
+              <a:rPr lang="en-US" sz="1100" i="1" dirty="0">
+                <a:solidFill>
+                  <a:srgbClr val="64748B"/>
+                </a:solidFill>
+                <a:latin typeface="Calibri" pitchFamily="34" charset="0"/>
+                <a:ea typeface="Calibri" pitchFamily="34" charset="-122"/>
+                <a:cs typeface="Calibri" pitchFamily="34" charset="-120"/>
+              </a:rPr>
+              <a:t>Implication: sustainability programmes that aim to grow a broader cross-cutting contributor class need to provide cross-umbrella programming explicitly — there isn't one already.</a:t>
+            </a:r>
+            <a:endParaRPr lang="en-US" sz="1100" dirty="0"/>
+          </a:p>
+        </p:txBody>
+      </p:sp>
+    </p:spTree>
+  </p:cSld>
+  <p:clrMapOvr>
+    <a:masterClrMapping/>
+  </p:clrMapOvr>
+</p:sld>
+</file>
+
+<file path=ppt/slides/slide9.xml><?xml version="1.0" encoding="utf-8"?>
+<p:sld xmlns:a="http://schemas.openxmlformats.org/drawingml/2006/main" xmlns:r="http://schemas.openxmlformats.org/officeDocument/2006/relationships" xmlns:p="http://schemas.openxmlformats.org/presentationml/2006/main">
+  <p:cSld name="Slide 9">
     <p:bg>
       <p:bgPr>
         <a:solidFill>
@@ -6352,7 +6953,7 @@
                 <a:ea typeface="Calibri" pitchFamily="34" charset="-122"/>
                 <a:cs typeface="Calibri" pitchFamily="34" charset="-120"/>
               </a:rPr>
-              <a:t>08 / 08</a:t>
+              <a:t>09 / 09</a:t>
             </a:r>
             <a:endParaRPr lang="en-US" sz="1000" dirty="0"/>
           </a:p>
@@ -6366,8 +6967,8 @@
         </p:nvSpPr>
         <p:spPr>
           <a:xfrm>
-            <a:off x="8503920" y="502920"/>
-            <a:ext cx="3383280" cy="274320"/>
+            <a:off x="7589520" y="502920"/>
+            <a:ext cx="4297680" cy="274320"/>
           </a:xfrm>
           <a:prstGeom prst="rect">
             <a:avLst/>
@@ -6391,7 +6992,7 @@
                 <a:ea typeface="Calibri" pitchFamily="34" charset="-122"/>
                 <a:cs typeface="Calibri" pitchFamily="34" charset="-120"/>
               </a:rPr>
-              <a:t>WHERE WE ARE</a:t>
+              <a:t>WHAT'S NEXT</a:t>
             </a:r>
             <a:endParaRPr lang="en-US" sz="900" dirty="0"/>
           </a:p>
@@ -6422,7 +7023,7 @@
               <a:buNone/>
             </a:pPr>
             <a:r>
-              <a:rPr lang="en-US" sz="3200" b="1" dirty="0">
+              <a:rPr lang="en-US" sz="3000" b="1" dirty="0">
                 <a:solidFill>
                   <a:srgbClr val="FFFFFF"/>
                 </a:solidFill>
@@ -6430,9 +7031,9 @@
                 <a:ea typeface="Georgia" pitchFamily="34" charset="-122"/>
                 <a:cs typeface="Georgia" pitchFamily="34" charset="-120"/>
               </a:rPr>
-              <a:t>Where we are + what's next</a:t>
-            </a:r>
-            <a:endParaRPr lang="en-US" sz="3200" dirty="0"/>
+              <a:t>Three axes for the longer-term programme.</a:t>
+            </a:r>
+            <a:endParaRPr lang="en-US" sz="3000" dirty="0"/>
           </a:p>
         </p:txBody>
       </p:sp>
@@ -6483,16 +7084,18 @@
         </p:nvSpPr>
         <p:spPr>
           <a:xfrm>
-            <a:off x="822960" y="2743200"/>
-            <a:ext cx="10515600" cy="0"/>
-          </a:xfrm>
-          <a:prstGeom prst="line">
-            <a:avLst/>
-          </a:prstGeom>
-          <a:noFill/>
-          <a:ln w="25400">
+            <a:off x="640080" y="2286000"/>
+            <a:ext cx="3611880" cy="3017520"/>
+          </a:xfrm>
+          <a:prstGeom prst="rect">
+            <a:avLst/>
+          </a:prstGeom>
+          <a:solidFill>
+            <a:srgbClr val="1E293B"/>
+          </a:solidFill>
+          <a:ln w="12700">
             <a:solidFill>
-              <a:srgbClr val="334155"/>
+              <a:srgbClr val="0D9488"/>
             </a:solidFill>
             <a:prstDash val="solid"/>
           </a:ln>
@@ -6506,18 +7109,155 @@
         </p:nvSpPr>
         <p:spPr>
           <a:xfrm>
-            <a:off x="713232" y="2633472"/>
-            <a:ext cx="219456" cy="219456"/>
-          </a:xfrm>
-          <a:prstGeom prst="ellipse">
+            <a:off x="640080" y="2286000"/>
+            <a:ext cx="3611880" cy="91440"/>
+          </a:xfrm>
+          <a:prstGeom prst="rect">
             <a:avLst/>
           </a:prstGeom>
           <a:solidFill>
-            <a:srgbClr val="F59E0B"/>
+            <a:srgbClr val="0D9488"/>
           </a:solidFill>
-          <a:ln w="25400">
+          <a:ln/>
+        </p:spPr>
+      </p:sp>
+      <p:sp>
+        <p:nvSpPr>
+          <p:cNvPr id="9" name="Text 7"/>
+          <p:cNvSpPr/>
+          <p:nvPr/>
+        </p:nvSpPr>
+        <p:spPr>
+          <a:xfrm>
+            <a:off x="914400" y="2514600"/>
+            <a:ext cx="1371600" cy="640080"/>
+          </a:xfrm>
+          <a:prstGeom prst="rect">
+            <a:avLst/>
+          </a:prstGeom>
+          <a:noFill/>
+          <a:ln/>
+        </p:spPr>
+        <p:txBody>
+          <a:bodyPr wrap="square" lIns="0" tIns="0" rIns="0" bIns="0" rtlCol="0" anchor="t"/>
+          <a:lstStyle/>
+          <a:p>
+            <a:pPr algn="l" indent="0" marL="0">
+              <a:buNone/>
+            </a:pPr>
+            <a:r>
+              <a:rPr lang="en-US" sz="3600" b="1" dirty="0">
+                <a:solidFill>
+                  <a:srgbClr val="14B8A6"/>
+                </a:solidFill>
+                <a:latin typeface="Georgia" pitchFamily="34" charset="0"/>
+                <a:ea typeface="Georgia" pitchFamily="34" charset="-122"/>
+                <a:cs typeface="Georgia" pitchFamily="34" charset="-120"/>
+              </a:rPr>
+              <a:t>L1</a:t>
+            </a:r>
+            <a:endParaRPr lang="en-US" sz="3600" dirty="0"/>
+          </a:p>
+        </p:txBody>
+      </p:sp>
+      <p:sp>
+        <p:nvSpPr>
+          <p:cNvPr id="10" name="Text 8"/>
+          <p:cNvSpPr/>
+          <p:nvPr/>
+        </p:nvSpPr>
+        <p:spPr>
+          <a:xfrm>
+            <a:off x="914400" y="3246120"/>
+            <a:ext cx="3108960" cy="457200"/>
+          </a:xfrm>
+          <a:prstGeom prst="rect">
+            <a:avLst/>
+          </a:prstGeom>
+          <a:noFill/>
+          <a:ln/>
+        </p:spPr>
+        <p:txBody>
+          <a:bodyPr wrap="square" lIns="0" tIns="0" rIns="0" bIns="0" rtlCol="0" anchor="t"/>
+          <a:lstStyle/>
+          <a:p>
+            <a:pPr algn="l" indent="0" marL="0">
+              <a:buNone/>
+            </a:pPr>
+            <a:r>
+              <a:rPr lang="en-US" sz="1600" b="1" dirty="0">
+                <a:solidFill>
+                  <a:srgbClr val="FFFFFF"/>
+                </a:solidFill>
+                <a:latin typeface="Georgia" pitchFamily="34" charset="0"/>
+                <a:ea typeface="Georgia" pitchFamily="34" charset="-122"/>
+                <a:cs typeface="Georgia" pitchFamily="34" charset="-120"/>
+              </a:rPr>
+              <a:t>Longitudinal tracking</a:t>
+            </a:r>
+            <a:endParaRPr lang="en-US" sz="1600" dirty="0"/>
+          </a:p>
+        </p:txBody>
+      </p:sp>
+      <p:sp>
+        <p:nvSpPr>
+          <p:cNvPr id="11" name="Text 9"/>
+          <p:cNvSpPr/>
+          <p:nvPr/>
+        </p:nvSpPr>
+        <p:spPr>
+          <a:xfrm>
+            <a:off x="914400" y="3794760"/>
+            <a:ext cx="3108960" cy="1463040"/>
+          </a:xfrm>
+          <a:prstGeom prst="rect">
+            <a:avLst/>
+          </a:prstGeom>
+          <a:noFill/>
+          <a:ln/>
+        </p:spPr>
+        <p:txBody>
+          <a:bodyPr wrap="square" lIns="0" tIns="0" rIns="0" bIns="0" rtlCol="0" anchor="t"/>
+          <a:lstStyle/>
+          <a:p>
+            <a:pPr algn="l" indent="0" marL="0">
+              <a:buNone/>
+            </a:pPr>
+            <a:r>
+              <a:rPr lang="en-US" sz="1200" dirty="0">
+                <a:solidFill>
+                  <a:srgbClr val="94A3B8"/>
+                </a:solidFill>
+                <a:latin typeface="Calibri" pitchFamily="34" charset="0"/>
+                <a:ea typeface="Calibri" pitchFamily="34" charset="-122"/>
+                <a:cs typeface="Calibri" pitchFamily="34" charset="-120"/>
+              </a:rPr>
+              <a:t>Quarterly recrawls of the 37-repo panel over 24 months. Change-over-time on the six challenges. Event-study designs around governance changes.</a:t>
+            </a:r>
+            <a:endParaRPr lang="en-US" sz="1200" dirty="0"/>
+          </a:p>
+        </p:txBody>
+      </p:sp>
+      <p:sp>
+        <p:nvSpPr>
+          <p:cNvPr id="12" name="Shape 10"/>
+          <p:cNvSpPr/>
+          <p:nvPr/>
+        </p:nvSpPr>
+        <p:spPr>
+          <a:xfrm>
+            <a:off x="4480560" y="2286000"/>
+            <a:ext cx="3611880" cy="3017520"/>
+          </a:xfrm>
+          <a:prstGeom prst="rect">
+            <a:avLst/>
+          </a:prstGeom>
+          <a:solidFill>
+            <a:srgbClr val="1E293B"/>
+          </a:solidFill>
+          <a:ln w="12700">
             <a:solidFill>
-              <a:srgbClr val="0F172A"/>
+              <a:srgbClr val="0D9488"/>
             </a:solidFill>
             <a:prstDash val="solid"/>
           </a:ln>
@@ -6525,141 +7265,161 @@
       </p:sp>
       <p:sp>
         <p:nvSpPr>
-          <p:cNvPr id="9" name="Text 7"/>
-          <p:cNvSpPr/>
-          <p:nvPr/>
-        </p:nvSpPr>
-        <p:spPr>
-          <a:xfrm>
-            <a:off x="-548640" y="1874520"/>
-            <a:ext cx="2743200" cy="274320"/>
-          </a:xfrm>
-          <a:prstGeom prst="rect">
-            <a:avLst/>
-          </a:prstGeom>
-          <a:noFill/>
-          <a:ln/>
-        </p:spPr>
-        <p:txBody>
-          <a:bodyPr wrap="square" lIns="0" tIns="0" rIns="0" bIns="0" rtlCol="0" anchor="t"/>
-          <a:lstStyle/>
-          <a:p>
-            <a:pPr algn="ctr" indent="0" marL="0">
-              <a:buNone/>
-            </a:pPr>
-            <a:r>
-              <a:rPr lang="en-US" sz="1000" b="1" spc="300" kern="0" dirty="0">
-                <a:solidFill>
-                  <a:srgbClr val="F59E0B"/>
-                </a:solidFill>
-                <a:latin typeface="Calibri" pitchFamily="34" charset="0"/>
-                <a:ea typeface="Calibri" pitchFamily="34" charset="-122"/>
-                <a:cs typeface="Calibri" pitchFamily="34" charset="-120"/>
-              </a:rPr>
-              <a:t>AUTUMN 2025</a:t>
-            </a:r>
-            <a:endParaRPr lang="en-US" sz="1000" dirty="0"/>
-          </a:p>
-        </p:txBody>
-      </p:sp>
-      <p:sp>
-        <p:nvSpPr>
-          <p:cNvPr id="10" name="Text 8"/>
-          <p:cNvSpPr/>
-          <p:nvPr/>
-        </p:nvSpPr>
-        <p:spPr>
-          <a:xfrm>
-            <a:off x="-548640" y="2194560"/>
-            <a:ext cx="2743200" cy="320040"/>
-          </a:xfrm>
-          <a:prstGeom prst="rect">
-            <a:avLst/>
-          </a:prstGeom>
-          <a:noFill/>
-          <a:ln/>
-        </p:spPr>
-        <p:txBody>
-          <a:bodyPr wrap="square" lIns="0" tIns="0" rIns="0" bIns="0" rtlCol="0" anchor="t"/>
-          <a:lstStyle/>
-          <a:p>
-            <a:pPr algn="ctr" indent="0" marL="0">
-              <a:buNone/>
-            </a:pPr>
-            <a:r>
-              <a:rPr lang="en-US" sz="1400" b="1" dirty="0">
-                <a:solidFill>
-                  <a:srgbClr val="FFFFFF"/>
+          <p:cNvPr id="13" name="Shape 11"/>
+          <p:cNvSpPr/>
+          <p:nvPr/>
+        </p:nvSpPr>
+        <p:spPr>
+          <a:xfrm>
+            <a:off x="4480560" y="2286000"/>
+            <a:ext cx="3611880" cy="91440"/>
+          </a:xfrm>
+          <a:prstGeom prst="rect">
+            <a:avLst/>
+          </a:prstGeom>
+          <a:solidFill>
+            <a:srgbClr val="0D9488"/>
+          </a:solidFill>
+          <a:ln/>
+        </p:spPr>
+      </p:sp>
+      <p:sp>
+        <p:nvSpPr>
+          <p:cNvPr id="14" name="Text 12"/>
+          <p:cNvSpPr/>
+          <p:nvPr/>
+        </p:nvSpPr>
+        <p:spPr>
+          <a:xfrm>
+            <a:off x="4754880" y="2514600"/>
+            <a:ext cx="1371600" cy="640080"/>
+          </a:xfrm>
+          <a:prstGeom prst="rect">
+            <a:avLst/>
+          </a:prstGeom>
+          <a:noFill/>
+          <a:ln/>
+        </p:spPr>
+        <p:txBody>
+          <a:bodyPr wrap="square" lIns="0" tIns="0" rIns="0" bIns="0" rtlCol="0" anchor="t"/>
+          <a:lstStyle/>
+          <a:p>
+            <a:pPr algn="l" indent="0" marL="0">
+              <a:buNone/>
+            </a:pPr>
+            <a:r>
+              <a:rPr lang="en-US" sz="3600" b="1" dirty="0">
+                <a:solidFill>
+                  <a:srgbClr val="14B8A6"/>
                 </a:solidFill>
                 <a:latin typeface="Georgia" pitchFamily="34" charset="0"/>
                 <a:ea typeface="Georgia" pitchFamily="34" charset="-122"/>
                 <a:cs typeface="Georgia" pitchFamily="34" charset="-120"/>
               </a:rPr>
-              <a:t>Pilot phase</a:t>
-            </a:r>
-            <a:endParaRPr lang="en-US" sz="1400" dirty="0"/>
-          </a:p>
-        </p:txBody>
-      </p:sp>
-      <p:sp>
-        <p:nvSpPr>
-          <p:cNvPr id="11" name="Text 9"/>
-          <p:cNvSpPr/>
-          <p:nvPr/>
-        </p:nvSpPr>
-        <p:spPr>
-          <a:xfrm>
-            <a:off x="-548640" y="3017520"/>
-            <a:ext cx="2743200" cy="1097280"/>
-          </a:xfrm>
-          <a:prstGeom prst="rect">
-            <a:avLst/>
-          </a:prstGeom>
-          <a:noFill/>
-          <a:ln/>
-        </p:spPr>
-        <p:txBody>
-          <a:bodyPr wrap="square" lIns="0" tIns="0" rIns="0" bIns="0" rtlCol="0" anchor="t"/>
-          <a:lstStyle/>
-          <a:p>
-            <a:pPr algn="ctr" indent="0" marL="0">
-              <a:buNone/>
-            </a:pPr>
-            <a:r>
-              <a:rPr lang="en-US" sz="1100" dirty="0">
-                <a:solidFill>
-                  <a:srgbClr val="CBD5E1"/>
-                </a:solidFill>
-                <a:latin typeface="Calibri" pitchFamily="34" charset="0"/>
-                <a:ea typeface="Calibri" pitchFamily="34" charset="-122"/>
-                <a:cs typeface="Calibri" pitchFamily="34" charset="-120"/>
-              </a:rPr>
-              <a:t>n = 29 crawl. Apparent FDR-significant finding.</a:t>
-            </a:r>
-            <a:endParaRPr lang="en-US" sz="1100" dirty="0"/>
-          </a:p>
-        </p:txBody>
-      </p:sp>
-      <p:sp>
-        <p:nvSpPr>
-          <p:cNvPr id="12" name="Shape 10"/>
-          <p:cNvSpPr/>
-          <p:nvPr/>
-        </p:nvSpPr>
-        <p:spPr>
-          <a:xfrm>
-            <a:off x="4183380" y="2633472"/>
-            <a:ext cx="219456" cy="219456"/>
-          </a:xfrm>
-          <a:prstGeom prst="ellipse">
+              <a:t>L2</a:t>
+            </a:r>
+            <a:endParaRPr lang="en-US" sz="3600" dirty="0"/>
+          </a:p>
+        </p:txBody>
+      </p:sp>
+      <p:sp>
+        <p:nvSpPr>
+          <p:cNvPr id="15" name="Text 13"/>
+          <p:cNvSpPr/>
+          <p:nvPr/>
+        </p:nvSpPr>
+        <p:spPr>
+          <a:xfrm>
+            <a:off x="4754880" y="3246120"/>
+            <a:ext cx="3108960" cy="457200"/>
+          </a:xfrm>
+          <a:prstGeom prst="rect">
+            <a:avLst/>
+          </a:prstGeom>
+          <a:noFill/>
+          <a:ln/>
+        </p:spPr>
+        <p:txBody>
+          <a:bodyPr wrap="square" lIns="0" tIns="0" rIns="0" bIns="0" rtlCol="0" anchor="t"/>
+          <a:lstStyle/>
+          <a:p>
+            <a:pPr algn="l" indent="0" marL="0">
+              <a:buNone/>
+            </a:pPr>
+            <a:r>
+              <a:rPr lang="en-US" sz="1600" b="1" dirty="0">
+                <a:solidFill>
+                  <a:srgbClr val="FFFFFF"/>
+                </a:solidFill>
+                <a:latin typeface="Georgia" pitchFamily="34" charset="0"/>
+                <a:ea typeface="Georgia" pitchFamily="34" charset="-122"/>
+                <a:cs typeface="Georgia" pitchFamily="34" charset="-120"/>
+              </a:rPr>
+              <a:t>Replication &amp; extension</a:t>
+            </a:r>
+            <a:endParaRPr lang="en-US" sz="1600" dirty="0"/>
+          </a:p>
+        </p:txBody>
+      </p:sp>
+      <p:sp>
+        <p:nvSpPr>
+          <p:cNvPr id="16" name="Text 14"/>
+          <p:cNvSpPr/>
+          <p:nvPr/>
+        </p:nvSpPr>
+        <p:spPr>
+          <a:xfrm>
+            <a:off x="4754880" y="3794760"/>
+            <a:ext cx="3108960" cy="1463040"/>
+          </a:xfrm>
+          <a:prstGeom prst="rect">
+            <a:avLst/>
+          </a:prstGeom>
+          <a:noFill/>
+          <a:ln/>
+        </p:spPr>
+        <p:txBody>
+          <a:bodyPr wrap="square" lIns="0" tIns="0" rIns="0" bIns="0" rtlCol="0" anchor="t"/>
+          <a:lstStyle/>
+          <a:p>
+            <a:pPr algn="l" indent="0" marL="0">
+              <a:buNone/>
+            </a:pPr>
+            <a:r>
+              <a:rPr lang="en-US" sz="1200" dirty="0">
+                <a:solidFill>
+                  <a:srgbClr val="94A3B8"/>
+                </a:solidFill>
+                <a:latin typeface="Calibri" pitchFamily="34" charset="0"/>
+                <a:ea typeface="Calibri" pitchFamily="34" charset="-122"/>
+                <a:cs typeface="Calibri" pitchFamily="34" charset="-120"/>
+              </a:rPr>
+              <a:t>Non-GitHub hosts (GitLab, Codeberg, self-hosted Gitea). Larger civic-tech population (target n ≥ 100). Cross-platform consistency checks.</a:t>
+            </a:r>
+            <a:endParaRPr lang="en-US" sz="1200" dirty="0"/>
+          </a:p>
+        </p:txBody>
+      </p:sp>
+      <p:sp>
+        <p:nvSpPr>
+          <p:cNvPr id="17" name="Shape 15"/>
+          <p:cNvSpPr/>
+          <p:nvPr/>
+        </p:nvSpPr>
+        <p:spPr>
+          <a:xfrm>
+            <a:off x="8321040" y="2286000"/>
+            <a:ext cx="3611880" cy="3017520"/>
+          </a:xfrm>
+          <a:prstGeom prst="rect">
             <a:avLst/>
           </a:prstGeom>
           <a:solidFill>
-            <a:srgbClr val="10B981"/>
+            <a:srgbClr val="1E293B"/>
           </a:solidFill>
-          <a:ln w="25400">
+          <a:ln w="12700">
             <a:solidFill>
-              <a:srgbClr val="0F172A"/>
+              <a:srgbClr val="0D9488"/>
             </a:solidFill>
             <a:prstDash val="solid"/>
           </a:ln>
@@ -6667,211 +7427,89 @@
       </p:sp>
       <p:sp>
         <p:nvSpPr>
-          <p:cNvPr id="13" name="Text 11"/>
-          <p:cNvSpPr/>
-          <p:nvPr/>
-        </p:nvSpPr>
-        <p:spPr>
-          <a:xfrm>
-            <a:off x="2921508" y="1874520"/>
-            <a:ext cx="2743200" cy="274320"/>
-          </a:xfrm>
-          <a:prstGeom prst="rect">
-            <a:avLst/>
-          </a:prstGeom>
-          <a:noFill/>
-          <a:ln/>
-        </p:spPr>
-        <p:txBody>
-          <a:bodyPr wrap="square" lIns="0" tIns="0" rIns="0" bIns="0" rtlCol="0" anchor="t"/>
-          <a:lstStyle/>
-          <a:p>
-            <a:pPr algn="ctr" indent="0" marL="0">
-              <a:buNone/>
-            </a:pPr>
-            <a:r>
-              <a:rPr lang="en-US" sz="1000" b="1" spc="300" kern="0" dirty="0">
-                <a:solidFill>
-                  <a:srgbClr val="10B981"/>
-                </a:solidFill>
-                <a:latin typeface="Calibri" pitchFamily="34" charset="0"/>
-                <a:ea typeface="Calibri" pitchFamily="34" charset="-122"/>
-                <a:cs typeface="Calibri" pitchFamily="34" charset="-120"/>
-              </a:rPr>
-              <a:t>SPRING 2026</a:t>
-            </a:r>
-            <a:endParaRPr lang="en-US" sz="1000" dirty="0"/>
-          </a:p>
-        </p:txBody>
-      </p:sp>
-      <p:sp>
-        <p:nvSpPr>
-          <p:cNvPr id="14" name="Text 12"/>
-          <p:cNvSpPr/>
-          <p:nvPr/>
-        </p:nvSpPr>
-        <p:spPr>
-          <a:xfrm>
-            <a:off x="2921508" y="2194560"/>
-            <a:ext cx="2743200" cy="320040"/>
-          </a:xfrm>
-          <a:prstGeom prst="rect">
-            <a:avLst/>
-          </a:prstGeom>
-          <a:noFill/>
-          <a:ln/>
-        </p:spPr>
-        <p:txBody>
-          <a:bodyPr wrap="square" lIns="0" tIns="0" rIns="0" bIns="0" rtlCol="0" anchor="t"/>
-          <a:lstStyle/>
-          <a:p>
-            <a:pPr algn="ctr" indent="0" marL="0">
-              <a:buNone/>
-            </a:pPr>
-            <a:r>
-              <a:rPr lang="en-US" sz="1400" b="1" dirty="0">
-                <a:solidFill>
-                  <a:srgbClr val="FFFFFF"/>
+          <p:cNvPr id="18" name="Shape 16"/>
+          <p:cNvSpPr/>
+          <p:nvPr/>
+        </p:nvSpPr>
+        <p:spPr>
+          <a:xfrm>
+            <a:off x="8321040" y="2286000"/>
+            <a:ext cx="3611880" cy="91440"/>
+          </a:xfrm>
+          <a:prstGeom prst="rect">
+            <a:avLst/>
+          </a:prstGeom>
+          <a:solidFill>
+            <a:srgbClr val="0D9488"/>
+          </a:solidFill>
+          <a:ln/>
+        </p:spPr>
+      </p:sp>
+      <p:sp>
+        <p:nvSpPr>
+          <p:cNvPr id="19" name="Text 17"/>
+          <p:cNvSpPr/>
+          <p:nvPr/>
+        </p:nvSpPr>
+        <p:spPr>
+          <a:xfrm>
+            <a:off x="8595360" y="2514600"/>
+            <a:ext cx="1371600" cy="640080"/>
+          </a:xfrm>
+          <a:prstGeom prst="rect">
+            <a:avLst/>
+          </a:prstGeom>
+          <a:noFill/>
+          <a:ln/>
+        </p:spPr>
+        <p:txBody>
+          <a:bodyPr wrap="square" lIns="0" tIns="0" rIns="0" bIns="0" rtlCol="0" anchor="t"/>
+          <a:lstStyle/>
+          <a:p>
+            <a:pPr algn="l" indent="0" marL="0">
+              <a:buNone/>
+            </a:pPr>
+            <a:r>
+              <a:rPr lang="en-US" sz="3600" b="1" dirty="0">
+                <a:solidFill>
+                  <a:srgbClr val="14B8A6"/>
                 </a:solidFill>
                 <a:latin typeface="Georgia" pitchFamily="34" charset="0"/>
                 <a:ea typeface="Georgia" pitchFamily="34" charset="-122"/>
                 <a:cs typeface="Georgia" pitchFamily="34" charset="-120"/>
               </a:rPr>
-              <a:t>Triangulation + panel expansion</a:t>
-            </a:r>
-            <a:endParaRPr lang="en-US" sz="1400" dirty="0"/>
-          </a:p>
-        </p:txBody>
-      </p:sp>
-      <p:sp>
-        <p:nvSpPr>
-          <p:cNvPr id="15" name="Text 13"/>
-          <p:cNvSpPr/>
-          <p:nvPr/>
-        </p:nvSpPr>
-        <p:spPr>
-          <a:xfrm>
-            <a:off x="2921508" y="3017520"/>
-            <a:ext cx="2743200" cy="1097280"/>
-          </a:xfrm>
-          <a:prstGeom prst="rect">
-            <a:avLst/>
-          </a:prstGeom>
-          <a:noFill/>
-          <a:ln/>
-        </p:spPr>
-        <p:txBody>
-          <a:bodyPr wrap="square" lIns="0" tIns="0" rIns="0" bIns="0" rtlCol="0" anchor="t"/>
-          <a:lstStyle/>
-          <a:p>
-            <a:pPr algn="ctr" indent="0" marL="0">
-              <a:buNone/>
-            </a:pPr>
-            <a:r>
-              <a:rPr lang="en-US" sz="1100" dirty="0">
-                <a:solidFill>
-                  <a:srgbClr val="CBD5E1"/>
-                </a:solidFill>
-                <a:latin typeface="Calibri" pitchFamily="34" charset="0"/>
-                <a:ea typeface="Calibri" pitchFamily="34" charset="-122"/>
-                <a:cs typeface="Calibri" pitchFamily="34" charset="-120"/>
-              </a:rPr>
-              <a:t>GraphQL fallback. n = 37 with 37/37 coverage on burstiness.</a:t>
-            </a:r>
-            <a:endParaRPr lang="en-US" sz="1100" dirty="0"/>
-          </a:p>
-        </p:txBody>
-      </p:sp>
-      <p:sp>
-        <p:nvSpPr>
-          <p:cNvPr id="16" name="Shape 14"/>
-          <p:cNvSpPr/>
-          <p:nvPr/>
-        </p:nvSpPr>
-        <p:spPr>
-          <a:xfrm>
-            <a:off x="7653528" y="2633472"/>
-            <a:ext cx="219456" cy="219456"/>
-          </a:xfrm>
-          <a:prstGeom prst="ellipse">
-            <a:avLst/>
-          </a:prstGeom>
-          <a:solidFill>
-            <a:srgbClr val="14B8A6"/>
-          </a:solidFill>
-          <a:ln w="25400">
-            <a:solidFill>
-              <a:srgbClr val="0F172A"/>
-            </a:solidFill>
-            <a:prstDash val="solid"/>
-          </a:ln>
-        </p:spPr>
-      </p:sp>
-      <p:sp>
-        <p:nvSpPr>
-          <p:cNvPr id="17" name="Text 15"/>
-          <p:cNvSpPr/>
-          <p:nvPr/>
-        </p:nvSpPr>
-        <p:spPr>
-          <a:xfrm>
-            <a:off x="6391656" y="1874520"/>
-            <a:ext cx="2743200" cy="274320"/>
-          </a:xfrm>
-          <a:prstGeom prst="rect">
-            <a:avLst/>
-          </a:prstGeom>
-          <a:noFill/>
-          <a:ln/>
-        </p:spPr>
-        <p:txBody>
-          <a:bodyPr wrap="square" lIns="0" tIns="0" rIns="0" bIns="0" rtlCol="0" anchor="t"/>
-          <a:lstStyle/>
-          <a:p>
-            <a:pPr algn="ctr" indent="0" marL="0">
-              <a:buNone/>
-            </a:pPr>
-            <a:r>
-              <a:rPr lang="en-US" sz="1000" b="1" spc="300" kern="0" dirty="0">
-                <a:solidFill>
-                  <a:srgbClr val="14B8A6"/>
-                </a:solidFill>
-                <a:latin typeface="Calibri" pitchFamily="34" charset="0"/>
-                <a:ea typeface="Calibri" pitchFamily="34" charset="-122"/>
-                <a:cs typeface="Calibri" pitchFamily="34" charset="-120"/>
-              </a:rPr>
-              <a:t>MAY 2026</a:t>
-            </a:r>
-            <a:endParaRPr lang="en-US" sz="1000" dirty="0"/>
-          </a:p>
-        </p:txBody>
-      </p:sp>
-      <p:sp>
-        <p:nvSpPr>
-          <p:cNvPr id="18" name="Text 16"/>
-          <p:cNvSpPr/>
-          <p:nvPr/>
-        </p:nvSpPr>
-        <p:spPr>
-          <a:xfrm>
-            <a:off x="6391656" y="2194560"/>
-            <a:ext cx="2743200" cy="320040"/>
-          </a:xfrm>
-          <a:prstGeom prst="rect">
-            <a:avLst/>
-          </a:prstGeom>
-          <a:noFill/>
-          <a:ln/>
-        </p:spPr>
-        <p:txBody>
-          <a:bodyPr wrap="square" lIns="0" tIns="0" rIns="0" bIns="0" rtlCol="0" anchor="t"/>
-          <a:lstStyle/>
-          <a:p>
-            <a:pPr algn="ctr" indent="0" marL="0">
-              <a:buNone/>
-            </a:pPr>
-            <a:r>
-              <a:rPr lang="en-US" sz="1400" b="1" dirty="0">
+              <a:t>L3</a:t>
+            </a:r>
+            <a:endParaRPr lang="en-US" sz="3600" dirty="0"/>
+          </a:p>
+        </p:txBody>
+      </p:sp>
+      <p:sp>
+        <p:nvSpPr>
+          <p:cNvPr id="20" name="Text 18"/>
+          <p:cNvSpPr/>
+          <p:nvPr/>
+        </p:nvSpPr>
+        <p:spPr>
+          <a:xfrm>
+            <a:off x="8595360" y="3246120"/>
+            <a:ext cx="3108960" cy="457200"/>
+          </a:xfrm>
+          <a:prstGeom prst="rect">
+            <a:avLst/>
+          </a:prstGeom>
+          <a:noFill/>
+          <a:ln/>
+        </p:spPr>
+        <p:txBody>
+          <a:bodyPr wrap="square" lIns="0" tIns="0" rIns="0" bIns="0" rtlCol="0" anchor="t"/>
+          <a:lstStyle/>
+          <a:p>
+            <a:pPr algn="l" indent="0" marL="0">
+              <a:buNone/>
+            </a:pPr>
+            <a:r>
+              <a:rPr lang="en-US" sz="1600" b="1" dirty="0">
                 <a:solidFill>
                   <a:srgbClr val="FFFFFF"/>
                 </a:solidFill>
@@ -6879,229 +7517,135 @@
                 <a:ea typeface="Georgia" pitchFamily="34" charset="-122"/>
                 <a:cs typeface="Georgia" pitchFamily="34" charset="-120"/>
               </a:rPr>
-              <a:t>ESEM submission</a:t>
+              <a:t>Failed-projects comparison</a:t>
+            </a:r>
+            <a:endParaRPr lang="en-US" sz="1600" dirty="0"/>
+          </a:p>
+        </p:txBody>
+      </p:sp>
+      <p:sp>
+        <p:nvSpPr>
+          <p:cNvPr id="21" name="Text 19"/>
+          <p:cNvSpPr/>
+          <p:nvPr/>
+        </p:nvSpPr>
+        <p:spPr>
+          <a:xfrm>
+            <a:off x="8595360" y="3794760"/>
+            <a:ext cx="3108960" cy="1463040"/>
+          </a:xfrm>
+          <a:prstGeom prst="rect">
+            <a:avLst/>
+          </a:prstGeom>
+          <a:noFill/>
+          <a:ln/>
+        </p:spPr>
+        <p:txBody>
+          <a:bodyPr wrap="square" lIns="0" tIns="0" rIns="0" bIns="0" rtlCol="0" anchor="t"/>
+          <a:lstStyle/>
+          <a:p>
+            <a:pPr algn="l" indent="0" marL="0">
+              <a:buNone/>
+            </a:pPr>
+            <a:r>
+              <a:rPr lang="en-US" sz="1200" dirty="0">
+                <a:solidFill>
+                  <a:srgbClr val="94A3B8"/>
+                </a:solidFill>
+                <a:latin typeface="Calibri" pitchFamily="34" charset="0"/>
+                <a:ea typeface="Calibri" pitchFamily="34" charset="-122"/>
+                <a:cs typeface="Calibri" pitchFamily="34" charset="-120"/>
+              </a:rPr>
+              <a:t>Parallel panel of civic-tech repositories that ceased activity. Convert survivor observations into causal claims about lifecycle.</a:t>
+            </a:r>
+            <a:endParaRPr lang="en-US" sz="1200" dirty="0"/>
+          </a:p>
+        </p:txBody>
+      </p:sp>
+      <p:sp>
+        <p:nvSpPr>
+          <p:cNvPr id="22" name="Shape 20"/>
+          <p:cNvSpPr/>
+          <p:nvPr/>
+        </p:nvSpPr>
+        <p:spPr>
+          <a:xfrm>
+            <a:off x="640080" y="5623560"/>
+            <a:ext cx="10881360" cy="868680"/>
+          </a:xfrm>
+          <a:prstGeom prst="rect">
+            <a:avLst/>
+          </a:prstGeom>
+          <a:solidFill>
+            <a:srgbClr val="0D9488"/>
+          </a:solidFill>
+          <a:ln/>
+        </p:spPr>
+      </p:sp>
+      <p:sp>
+        <p:nvSpPr>
+          <p:cNvPr id="23" name="Text 21"/>
+          <p:cNvSpPr/>
+          <p:nvPr/>
+        </p:nvSpPr>
+        <p:spPr>
+          <a:xfrm>
+            <a:off x="868680" y="5623560"/>
+            <a:ext cx="10424160" cy="868680"/>
+          </a:xfrm>
+          <a:prstGeom prst="rect">
+            <a:avLst/>
+          </a:prstGeom>
+          <a:noFill/>
+          <a:ln/>
+        </p:spPr>
+        <p:txBody>
+          <a:bodyPr wrap="square" lIns="0" tIns="0" rIns="0" bIns="0" rtlCol="0" anchor="ctr"/>
+          <a:lstStyle/>
+          <a:p>
+            <a:pPr algn="l" indent="0" marL="0">
+              <a:buNone/>
+            </a:pPr>
+            <a:r>
+              <a:rPr lang="en-US" sz="1400" b="1" dirty="0">
+                <a:solidFill>
+                  <a:srgbClr val="FFFFFF"/>
+                </a:solidFill>
+                <a:latin typeface="Calibri" pitchFamily="34" charset="0"/>
+                <a:ea typeface="Calibri" pitchFamily="34" charset="-122"/>
+                <a:cs typeface="Calibri" pitchFamily="34" charset="-120"/>
+              </a:rPr>
+              <a:t>Where I'd love your input:  </a:t>
+            </a:r>
+            <a:pPr algn="l" indent="0" marL="0">
+              <a:buNone/>
+            </a:pPr>
+            <a:r>
+              <a:rPr lang="en-US" sz="1400" dirty="0">
+                <a:solidFill>
+                  <a:srgbClr val="FFFFFF"/>
+                </a:solidFill>
+                <a:latin typeface="Calibri" pitchFamily="34" charset="0"/>
+                <a:ea typeface="Calibri" pitchFamily="34" charset="-122"/>
+                <a:cs typeface="Calibri" pitchFamily="34" charset="-120"/>
+              </a:rPr>
+              <a:t>framing of the six challenges  ·  candidates for L1/L2/L3  ·  </a:t>
+            </a:r>
+            <a:pPr algn="l" indent="0" marL="0">
+              <a:buNone/>
+            </a:pPr>
+            <a:r>
+              <a:rPr lang="en-US" sz="1400" b="1" dirty="0">
+                <a:solidFill>
+                  <a:srgbClr val="FEF3C7"/>
+                </a:solidFill>
+                <a:latin typeface="Calibri" pitchFamily="34" charset="0"/>
+                <a:ea typeface="Calibri" pitchFamily="34" charset="-122"/>
+                <a:cs typeface="Calibri" pitchFamily="34" charset="-120"/>
+              </a:rPr>
+              <a:t>recent (2023–25) OSS-health refs</a:t>
             </a:r>
             <a:endParaRPr lang="en-US" sz="1400" dirty="0"/>
-          </a:p>
-        </p:txBody>
-      </p:sp>
-      <p:sp>
-        <p:nvSpPr>
-          <p:cNvPr id="19" name="Text 17"/>
-          <p:cNvSpPr/>
-          <p:nvPr/>
-        </p:nvSpPr>
-        <p:spPr>
-          <a:xfrm>
-            <a:off x="6391656" y="3017520"/>
-            <a:ext cx="2743200" cy="1097280"/>
-          </a:xfrm>
-          <a:prstGeom prst="rect">
-            <a:avLst/>
-          </a:prstGeom>
-          <a:noFill/>
-          <a:ln/>
-        </p:spPr>
-        <p:txBody>
-          <a:bodyPr wrap="square" lIns="0" tIns="0" rIns="0" bIns="0" rtlCol="0" anchor="t"/>
-          <a:lstStyle/>
-          <a:p>
-            <a:pPr algn="ctr" indent="0" marL="0">
-              <a:buNone/>
-            </a:pPr>
-            <a:r>
-              <a:rPr lang="en-US" sz="1100" dirty="0">
-                <a:solidFill>
-                  <a:srgbClr val="CBD5E1"/>
-                </a:solidFill>
-                <a:latin typeface="Calibri" pitchFamily="34" charset="0"/>
-                <a:ea typeface="Calibri" pitchFamily="34" charset="-122"/>
-                <a:cs typeface="Calibri" pitchFamily="34" charset="-120"/>
-              </a:rPr>
-              <a:t>You are here. Feedback welcome.</a:t>
-            </a:r>
-            <a:endParaRPr lang="en-US" sz="1100" dirty="0"/>
-          </a:p>
-        </p:txBody>
-      </p:sp>
-      <p:sp>
-        <p:nvSpPr>
-          <p:cNvPr id="20" name="Shape 18"/>
-          <p:cNvSpPr/>
-          <p:nvPr/>
-        </p:nvSpPr>
-        <p:spPr>
-          <a:xfrm>
-            <a:off x="11228832" y="2633472"/>
-            <a:ext cx="219456" cy="219456"/>
-          </a:xfrm>
-          <a:prstGeom prst="ellipse">
-            <a:avLst/>
-          </a:prstGeom>
-          <a:solidFill>
-            <a:srgbClr val="94A3B8"/>
-          </a:solidFill>
-          <a:ln w="25400">
-            <a:solidFill>
-              <a:srgbClr val="0F172A"/>
-            </a:solidFill>
-            <a:prstDash val="solid"/>
-          </a:ln>
-        </p:spPr>
-      </p:sp>
-      <p:sp>
-        <p:nvSpPr>
-          <p:cNvPr id="21" name="Text 19"/>
-          <p:cNvSpPr/>
-          <p:nvPr/>
-        </p:nvSpPr>
-        <p:spPr>
-          <a:xfrm>
-            <a:off x="9966960" y="1874520"/>
-            <a:ext cx="2743200" cy="274320"/>
-          </a:xfrm>
-          <a:prstGeom prst="rect">
-            <a:avLst/>
-          </a:prstGeom>
-          <a:noFill/>
-          <a:ln/>
-        </p:spPr>
-        <p:txBody>
-          <a:bodyPr wrap="square" lIns="0" tIns="0" rIns="0" bIns="0" rtlCol="0" anchor="t"/>
-          <a:lstStyle/>
-          <a:p>
-            <a:pPr algn="ctr" indent="0" marL="0">
-              <a:buNone/>
-            </a:pPr>
-            <a:r>
-              <a:rPr lang="en-US" sz="1000" b="1" spc="300" kern="0" dirty="0">
-                <a:solidFill>
-                  <a:srgbClr val="94A3B8"/>
-                </a:solidFill>
-                <a:latin typeface="Calibri" pitchFamily="34" charset="0"/>
-                <a:ea typeface="Calibri" pitchFamily="34" charset="-122"/>
-                <a:cs typeface="Calibri" pitchFamily="34" charset="-120"/>
-              </a:rPr>
-              <a:t>2026 – 2028</a:t>
-            </a:r>
-            <a:endParaRPr lang="en-US" sz="1000" dirty="0"/>
-          </a:p>
-        </p:txBody>
-      </p:sp>
-      <p:sp>
-        <p:nvSpPr>
-          <p:cNvPr id="22" name="Text 20"/>
-          <p:cNvSpPr/>
-          <p:nvPr/>
-        </p:nvSpPr>
-        <p:spPr>
-          <a:xfrm>
-            <a:off x="9966960" y="2194560"/>
-            <a:ext cx="2743200" cy="320040"/>
-          </a:xfrm>
-          <a:prstGeom prst="rect">
-            <a:avLst/>
-          </a:prstGeom>
-          <a:noFill/>
-          <a:ln/>
-        </p:spPr>
-        <p:txBody>
-          <a:bodyPr wrap="square" lIns="0" tIns="0" rIns="0" bIns="0" rtlCol="0" anchor="t"/>
-          <a:lstStyle/>
-          <a:p>
-            <a:pPr algn="ctr" indent="0" marL="0">
-              <a:buNone/>
-            </a:pPr>
-            <a:r>
-              <a:rPr lang="en-US" sz="1400" b="1" dirty="0">
-                <a:solidFill>
-                  <a:srgbClr val="FFFFFF"/>
-                </a:solidFill>
-                <a:latin typeface="Georgia" pitchFamily="34" charset="0"/>
-                <a:ea typeface="Georgia" pitchFamily="34" charset="-122"/>
-                <a:cs typeface="Georgia" pitchFamily="34" charset="-120"/>
-              </a:rPr>
-              <a:t>L1 · L2 · L3</a:t>
-            </a:r>
-            <a:endParaRPr lang="en-US" sz="1400" dirty="0"/>
-          </a:p>
-        </p:txBody>
-      </p:sp>
-      <p:sp>
-        <p:nvSpPr>
-          <p:cNvPr id="23" name="Text 21"/>
-          <p:cNvSpPr/>
-          <p:nvPr/>
-        </p:nvSpPr>
-        <p:spPr>
-          <a:xfrm>
-            <a:off x="9966960" y="3017520"/>
-            <a:ext cx="2743200" cy="1097280"/>
-          </a:xfrm>
-          <a:prstGeom prst="rect">
-            <a:avLst/>
-          </a:prstGeom>
-          <a:noFill/>
-          <a:ln/>
-        </p:spPr>
-        <p:txBody>
-          <a:bodyPr wrap="square" lIns="0" tIns="0" rIns="0" bIns="0" rtlCol="0" anchor="t"/>
-          <a:lstStyle/>
-          <a:p>
-            <a:pPr algn="ctr" indent="0" marL="0">
-              <a:buNone/>
-            </a:pPr>
-            <a:r>
-              <a:rPr lang="en-US" sz="1100" dirty="0">
-                <a:solidFill>
-                  <a:srgbClr val="CBD5E1"/>
-                </a:solidFill>
-                <a:latin typeface="Calibri" pitchFamily="34" charset="0"/>
-                <a:ea typeface="Calibri" pitchFamily="34" charset="-122"/>
-                <a:cs typeface="Calibri" pitchFamily="34" charset="-120"/>
-              </a:rPr>
-              <a:t>Longitudinal · platform replication · coverage-bias audit.</a:t>
-            </a:r>
-            <a:endParaRPr lang="en-US" sz="1100" dirty="0"/>
-          </a:p>
-        </p:txBody>
-      </p:sp>
-      <p:sp>
-        <p:nvSpPr>
-          <p:cNvPr id="24" name="Text 22"/>
-          <p:cNvSpPr/>
-          <p:nvPr/>
-        </p:nvSpPr>
-        <p:spPr>
-          <a:xfrm>
-            <a:off x="640080" y="5852160"/>
-            <a:ext cx="10881360" cy="457200"/>
-          </a:xfrm>
-          <a:prstGeom prst="rect">
-            <a:avLst/>
-          </a:prstGeom>
-          <a:noFill/>
-          <a:ln/>
-        </p:spPr>
-        <p:txBody>
-          <a:bodyPr wrap="square" lIns="0" tIns="0" rIns="0" bIns="0" rtlCol="0" anchor="ctr"/>
-          <a:lstStyle/>
-          <a:p>
-            <a:pPr algn="ctr" indent="0" marL="0">
-              <a:buNone/>
-            </a:pPr>
-            <a:r>
-              <a:rPr lang="en-US" sz="1800" b="1" i="1" dirty="0">
-                <a:solidFill>
-                  <a:srgbClr val="14B8A6"/>
-                </a:solidFill>
-                <a:latin typeface="Georgia" pitchFamily="34" charset="0"/>
-                <a:ea typeface="Georgia" pitchFamily="34" charset="-122"/>
-                <a:cs typeface="Georgia" pitchFamily="34" charset="-120"/>
-              </a:rPr>
-              <a:t>Thanks — questions, pushback, and replication ideas all very welcome.</a:t>
-            </a:r>
-            <a:endParaRPr lang="en-US" sz="1800" dirty="0"/>
           </a:p>
         </p:txBody>
       </p:sp>

--- a/paper_esem/slides/colleague_briefing.pptx
+++ b/paper_esem/slides/colleague_briefing.pptx
@@ -2534,7 +2534,7 @@
                 <a:ea typeface="Georgia" pitchFamily="34" charset="-122"/>
                 <a:cs typeface="Georgia" pitchFamily="34" charset="-120"/>
               </a:rPr>
-              <a:t>A purposive panel covering scale, age, and topic.</a:t>
+              <a:t>A purposive sample covering scale, age, and topic.</a:t>
             </a:r>
             <a:endParaRPr lang="en-US" sz="2800" dirty="0"/>
           </a:p>
@@ -3623,7 +3623,7 @@
                 <a:ea typeface="Calibri" pitchFamily="34" charset="-122"/>
                 <a:cs typeface="Calibri" pitchFamily="34" charset="-120"/>
               </a:rPr>
-              <a:t>64 candidate repositories  →  21 failed C1  ·  6 failed C3  →  37 in panel</a:t>
+              <a:t>64 candidate repositories  →  21 failed C1  ·  6 failed C3  →  37 in sample</a:t>
             </a:r>
             <a:endParaRPr lang="en-US" sz="1400" dirty="0"/>
           </a:p>
@@ -5022,7 +5022,7 @@
                 <a:ea typeface="Georgia" pitchFamily="34" charset="-122"/>
                 <a:cs typeface="Georgia" pitchFamily="34" charset="-120"/>
               </a:rPr>
-              <a:t>For half the panel, almost every active week is dominated by a single contributor.</a:t>
+              <a:t>For half the 37 repositories, almost every active week is dominated by a single contributor.</a:t>
             </a:r>
             <a:endParaRPr lang="en-US" sz="1600" dirty="0"/>
           </a:p>
@@ -6657,7 +6657,7 @@
                 <a:ea typeface="Calibri" pitchFamily="34" charset="-122"/>
                 <a:cs typeface="Calibri" pitchFamily="34" charset="-120"/>
               </a:rPr>
-              <a:t>of contributors are active in ≥ 2 panel projects.</a:t>
+              <a:t>of contributors are active in ≥ 2 of our 37 repositories.</a:t>
             </a:r>
             <a:endParaRPr lang="en-US" sz="1500" dirty="0"/>
           </a:p>
@@ -7232,7 +7232,7 @@
                 <a:ea typeface="Calibri" pitchFamily="34" charset="-122"/>
                 <a:cs typeface="Calibri" pitchFamily="34" charset="-120"/>
               </a:rPr>
-              <a:t>Quarterly recrawls of the 37-repo panel over 24 months. Change-over-time on the six challenges. Event-study designs around governance changes.</a:t>
+              <a:t>Quarterly recrawls of the 37 repositories over 24 months. Change-over-time on the six challenges. Event-study designs around governance changes.</a:t>
             </a:r>
             <a:endParaRPr lang="en-US" sz="1200" dirty="0"/>
           </a:p>
@@ -7556,7 +7556,7 @@
                 <a:ea typeface="Calibri" pitchFamily="34" charset="-122"/>
                 <a:cs typeface="Calibri" pitchFamily="34" charset="-120"/>
               </a:rPr>
-              <a:t>Parallel panel of civic-tech repositories that ceased activity. Convert survivor observations into causal claims about lifecycle.</a:t>
+              <a:t>Parallel sample of civic-tech repositories that ceased activity. Convert survivor observations into causal claims about lifecycle.</a:t>
             </a:r>
             <a:endParaRPr lang="en-US" sz="1200" dirty="0"/>
           </a:p>

--- a/paper_esem/slides/colleague_briefing.pptx
+++ b/paper_esem/slides/colleague_briefing.pptx
@@ -5483,7 +5483,7 @@
       </p:sp>
       <p:pic>
         <p:nvPicPr>
-          <p:cNvPr id="14" name="Image 0" descr="../figures/fig2_effort_gini.png">    </p:cNvPr>
+          <p:cNvPr id="14" name="Image 0" descr="../figures/fig_effort_gini_clean.png">    </p:cNvPr>
           <p:cNvPicPr>
             <a:picLocks noChangeAspect="1"/>
           </p:cNvPicPr>
@@ -6579,7 +6579,7 @@
                 <a:ea typeface="Georgia" pitchFamily="34" charset="-122"/>
                 <a:cs typeface="Georgia" pitchFamily="34" charset="-120"/>
               </a:rPr>
-              <a:t>Cross-project work happens inside umbrella networks.</a:t>
+              <a:t>The civic-tech ecosystem is thin and umbrella-bounded.</a:t>
             </a:r>
             <a:endParaRPr lang="en-US" sz="2800" dirty="0"/>
           </a:p>
@@ -6593,24 +6593,24 @@
         </p:nvSpPr>
         <p:spPr>
           <a:xfrm>
-            <a:off x="640080" y="2286000"/>
-            <a:ext cx="5029200" cy="1280160"/>
-          </a:xfrm>
-          <a:prstGeom prst="rect">
-            <a:avLst/>
-          </a:prstGeom>
-          <a:noFill/>
-          <a:ln/>
-        </p:spPr>
-        <p:txBody>
-          <a:bodyPr wrap="square" lIns="0" tIns="0" rIns="0" bIns="0" rtlCol="0" anchor="t"/>
-          <a:lstStyle/>
-          <a:p>
-            <a:pPr algn="l" indent="0" marL="0">
-              <a:buNone/>
-            </a:pPr>
-            <a:r>
-              <a:rPr lang="en-US" sz="11000" b="1" dirty="0">
+            <a:off x="640080" y="2194560"/>
+            <a:ext cx="5029200" cy="1188720"/>
+          </a:xfrm>
+          <a:prstGeom prst="rect">
+            <a:avLst/>
+          </a:prstGeom>
+          <a:noFill/>
+          <a:ln/>
+        </p:spPr>
+        <p:txBody>
+          <a:bodyPr wrap="square" lIns="0" tIns="0" rIns="0" bIns="0" rtlCol="0" anchor="t"/>
+          <a:lstStyle/>
+          <a:p>
+            <a:pPr algn="l" indent="0" marL="0">
+              <a:buNone/>
+            </a:pPr>
+            <a:r>
+              <a:rPr lang="en-US" sz="9000" b="1" dirty="0">
                 <a:solidFill>
                   <a:srgbClr val="F59E0B"/>
                 </a:solidFill>
@@ -6618,9 +6618,9 @@
                 <a:ea typeface="Georgia" pitchFamily="34" charset="-122"/>
                 <a:cs typeface="Georgia" pitchFamily="34" charset="-120"/>
               </a:rPr>
-              <a:t>12.3%</a:t>
-            </a:r>
-            <a:endParaRPr lang="en-US" sz="11000" dirty="0"/>
+              <a:t>5.5%</a:t>
+            </a:r>
+            <a:endParaRPr lang="en-US" sz="9000" dirty="0"/>
           </a:p>
         </p:txBody>
       </p:sp>
@@ -6632,24 +6632,24 @@
         </p:nvSpPr>
         <p:spPr>
           <a:xfrm>
-            <a:off x="640080" y="3657600"/>
-            <a:ext cx="5029200" cy="411480"/>
-          </a:xfrm>
-          <a:prstGeom prst="rect">
-            <a:avLst/>
-          </a:prstGeom>
-          <a:noFill/>
-          <a:ln/>
-        </p:spPr>
-        <p:txBody>
-          <a:bodyPr wrap="square" lIns="0" tIns="0" rIns="0" bIns="0" rtlCol="0" anchor="t"/>
-          <a:lstStyle/>
-          <a:p>
-            <a:pPr algn="l" indent="0" marL="0">
-              <a:buNone/>
-            </a:pPr>
-            <a:r>
-              <a:rPr lang="en-US" sz="1500" b="1" dirty="0">
+            <a:off x="640080" y="3383280"/>
+            <a:ext cx="5029200" cy="457200"/>
+          </a:xfrm>
+          <a:prstGeom prst="rect">
+            <a:avLst/>
+          </a:prstGeom>
+          <a:noFill/>
+          <a:ln/>
+        </p:spPr>
+        <p:txBody>
+          <a:bodyPr wrap="square" lIns="0" tIns="0" rIns="0" bIns="0" rtlCol="0" anchor="t"/>
+          <a:lstStyle/>
+          <a:p>
+            <a:pPr algn="l" indent="0" marL="0">
+              <a:buNone/>
+            </a:pPr>
+            <a:r>
+              <a:rPr lang="en-US" sz="1400" b="1" dirty="0">
                 <a:solidFill>
                   <a:srgbClr val="1E293B"/>
                 </a:solidFill>
@@ -6657,9 +6657,9 @@
                 <a:ea typeface="Calibri" pitchFamily="34" charset="-122"/>
                 <a:cs typeface="Calibri" pitchFamily="34" charset="-120"/>
               </a:rPr>
-              <a:t>of contributors are active in ≥ 2 of our 37 repositories.</a:t>
-            </a:r>
-            <a:endParaRPr lang="en-US" sz="1500" dirty="0"/>
+              <a:t>of unique humans contribute to ≥ 2 of our 37 repositories.</a:t>
+            </a:r>
+            <a:endParaRPr lang="en-US" sz="1400" dirty="0"/>
           </a:p>
         </p:txBody>
       </p:sp>
@@ -6671,24 +6671,24 @@
         </p:nvSpPr>
         <p:spPr>
           <a:xfrm>
-            <a:off x="640080" y="4069080"/>
-            <a:ext cx="5029200" cy="365760"/>
-          </a:xfrm>
-          <a:prstGeom prst="rect">
-            <a:avLst/>
-          </a:prstGeom>
-          <a:noFill/>
-          <a:ln/>
-        </p:spPr>
-        <p:txBody>
-          <a:bodyPr wrap="square" lIns="0" tIns="0" rIns="0" bIns="0" rtlCol="0" anchor="t"/>
-          <a:lstStyle/>
-          <a:p>
-            <a:pPr algn="l" indent="0" marL="0">
-              <a:buNone/>
-            </a:pPr>
-            <a:r>
-              <a:rPr lang="en-US" sz="1200" i="1" dirty="0">
+            <a:off x="640080" y="3794760"/>
+            <a:ext cx="5029200" cy="320040"/>
+          </a:xfrm>
+          <a:prstGeom prst="rect">
+            <a:avLst/>
+          </a:prstGeom>
+          <a:noFill/>
+          <a:ln/>
+        </p:spPr>
+        <p:txBody>
+          <a:bodyPr wrap="square" lIns="0" tIns="0" rIns="0" bIns="0" rtlCol="0" anchor="t"/>
+          <a:lstStyle/>
+          <a:p>
+            <a:pPr algn="l" indent="0" marL="0">
+              <a:buNone/>
+            </a:pPr>
+            <a:r>
+              <a:rPr lang="en-US" sz="1100" i="1" dirty="0">
                 <a:solidFill>
                   <a:srgbClr val="64748B"/>
                 </a:solidFill>
@@ -6696,9 +6696,9 @@
                 <a:ea typeface="Calibri" pitchFamily="34" charset="-122"/>
                 <a:cs typeface="Calibri" pitchFamily="34" charset="-120"/>
               </a:rPr>
-              <a:t>63 of 511 total contributors (59 of 498 humans).</a:t>
-            </a:r>
-            <a:endParaRPr lang="en-US" sz="1200" dirty="0"/>
+              <a:t>112 of 2,055 humans, after bot filtering.</a:t>
+            </a:r>
+            <a:endParaRPr lang="en-US" sz="1100" dirty="0"/>
           </a:p>
         </p:txBody>
       </p:sp>
@@ -6710,8 +6710,8 @@
         </p:nvSpPr>
         <p:spPr>
           <a:xfrm>
-            <a:off x="640080" y="4663440"/>
-            <a:ext cx="5029200" cy="1737360"/>
+            <a:off x="640080" y="4297680"/>
+            <a:ext cx="5029200" cy="2103120"/>
           </a:xfrm>
           <a:prstGeom prst="rect">
             <a:avLst/>
@@ -6735,7 +6735,7 @@
         </p:nvSpPr>
         <p:spPr>
           <a:xfrm>
-            <a:off x="822960" y="4800600"/>
+            <a:off x="822960" y="4434840"/>
             <a:ext cx="4663440" cy="274320"/>
           </a:xfrm>
           <a:prstGeom prst="rect">
@@ -6760,7 +6760,7 @@
                 <a:ea typeface="Calibri" pitchFamily="34" charset="-122"/>
                 <a:cs typeface="Calibri" pitchFamily="34" charset="-120"/>
               </a:rPr>
-              <a:t>WHO THE CIVIC-TECH CONTRIBUTOR CLASS IS</a:t>
+              <a:t>THE SENSITIVITY CHECK</a:t>
             </a:r>
             <a:endParaRPr lang="en-US" sz="1000" dirty="0"/>
           </a:p>
@@ -6774,8 +6774,8 @@
         </p:nvSpPr>
         <p:spPr>
           <a:xfrm>
-            <a:off x="822960" y="5120640"/>
-            <a:ext cx="4663440" cy="1188720"/>
+            <a:off x="822960" y="4754880"/>
+            <a:ext cx="4663440" cy="1554480"/>
           </a:xfrm>
           <a:prstGeom prst="rect">
             <a:avLst/>
@@ -6799,7 +6799,94 @@
                 <a:ea typeface="Calibri" pitchFamily="34" charset="-122"/>
                 <a:cs typeface="Calibri" pitchFamily="34" charset="-120"/>
               </a:rPr>
-              <a:t>Code for Africa supplies the four most-cross-project humans. Code for America and Democracy Club contribute others. The ecosystem that exists is organisational, not topic-wide.</a:t>
+              <a:t>of those 112 multi-repo humans, only </a:t>
+            </a:r>
+            <a:pPr algn="l" indent="0" marL="0">
+              <a:buNone/>
+            </a:pPr>
+            <a:r>
+              <a:rPr lang="en-US" sz="1400" b="1" dirty="0">
+                <a:solidFill>
+                  <a:srgbClr val="047857"/>
+                </a:solidFill>
+                <a:latin typeface="Georgia" pitchFamily="34" charset="0"/>
+                <a:ea typeface="Georgia" pitchFamily="34" charset="-122"/>
+                <a:cs typeface="Georgia" pitchFamily="34" charset="-120"/>
+              </a:rPr>
+              <a:t>8.9% (10)</a:t>
+            </a:r>
+            <a:pPr algn="l" indent="0" marL="0">
+              <a:buNone/>
+            </a:pPr>
+            <a:r>
+              <a:rPr lang="en-US" sz="1200" dirty="0">
+                <a:solidFill>
+                  <a:srgbClr val="065F46"/>
+                </a:solidFill>
+                <a:latin typeface="Calibri" pitchFamily="34" charset="0"/>
+                <a:ea typeface="Calibri" pitchFamily="34" charset="-122"/>
+                <a:cs typeface="Calibri" pitchFamily="34" charset="-120"/>
+              </a:rPr>
+              <a:t> span ≥ 2 distinct organisations.</a:t>
+            </a:r>
+            <a:endParaRPr lang="en-US" sz="1200" dirty="0"/>
+          </a:p>
+          <a:p>
+            <a:pPr algn="l" indent="0" marL="0">
+              <a:buNone/>
+            </a:pPr>
+            <a:r>
+              <a:rPr lang="en-US" sz="1200" dirty="0">
+                <a:solidFill>
+                  <a:srgbClr val="000000"/>
+                </a:solidFill>
+              </a:rPr>
+              <a:t> </a:t>
+            </a:r>
+            <a:endParaRPr lang="en-US" sz="1200" dirty="0"/>
+          </a:p>
+          <a:p>
+            <a:pPr algn="l" indent="0" marL="0">
+              <a:buNone/>
+            </a:pPr>
+            <a:r>
+              <a:rPr lang="en-US" sz="1200" dirty="0">
+                <a:solidFill>
+                  <a:srgbClr val="065F46"/>
+                </a:solidFill>
+                <a:latin typeface="Calibri" pitchFamily="34" charset="0"/>
+                <a:ea typeface="Calibri" pitchFamily="34" charset="-122"/>
+                <a:cs typeface="Calibri" pitchFamily="34" charset="-120"/>
+              </a:rPr>
+              <a:t>Across the whole sample that leaves </a:t>
+            </a:r>
+            <a:pPr algn="l" indent="0" marL="0">
+              <a:buNone/>
+            </a:pPr>
+            <a:r>
+              <a:rPr lang="en-US" sz="1400" b="1" dirty="0">
+                <a:solidFill>
+                  <a:srgbClr val="047857"/>
+                </a:solidFill>
+                <a:latin typeface="Georgia" pitchFamily="34" charset="0"/>
+                <a:ea typeface="Georgia" pitchFamily="34" charset="-122"/>
+                <a:cs typeface="Georgia" pitchFamily="34" charset="-120"/>
+              </a:rPr>
+              <a:t>≈ 0.5%</a:t>
+            </a:r>
+            <a:pPr algn="l" indent="0" marL="0">
+              <a:buNone/>
+            </a:pPr>
+            <a:r>
+              <a:rPr lang="en-US" sz="1200" dirty="0">
+                <a:solidFill>
+                  <a:srgbClr val="065F46"/>
+                </a:solidFill>
+                <a:latin typeface="Calibri" pitchFamily="34" charset="0"/>
+                <a:ea typeface="Calibri" pitchFamily="34" charset="-122"/>
+                <a:cs typeface="Calibri" pitchFamily="34" charset="-120"/>
+              </a:rPr>
+              <a:t> of all humans across the 37 repositories as genuinely cross-organisational. Invariant to umbrella over-representation in our frame.</a:t>
             </a:r>
             <a:endParaRPr lang="en-US" sz="1200" dirty="0"/>
           </a:p>
@@ -6807,7 +6894,7 @@
       </p:sp>
       <p:pic>
         <p:nvPicPr>
-          <p:cNvPr id="14" name="Image 0" descr="../figures/fig_cross_project.png">    </p:cNvPr>
+          <p:cNvPr id="14" name="Image 0" descr="../figures/fig_cross_project_v2.png">    </p:cNvPr>
           <p:cNvPicPr>
             <a:picLocks noChangeAspect="1"/>
           </p:cNvPicPr>
@@ -6862,7 +6949,7 @@
                 <a:ea typeface="Calibri" pitchFamily="34" charset="-122"/>
                 <a:cs typeface="Calibri" pitchFamily="34" charset="-120"/>
               </a:rPr>
-              <a:t>Implication: sustainability programmes that aim to grow a broader cross-cutting contributor class need to provide cross-umbrella programming explicitly — there isn't one already.</a:t>
+              <a:t>Implication: the cross-project contributor pool is small AND umbrella-bounded. Sustainability interventions assuming cross-cutting volunteer flow don't have that flow to work with.</a:t>
             </a:r>
             <a:endParaRPr lang="en-US" sz="1100" dirty="0"/>
           </a:p>
